--- a/20243/Part 5-Associatin Rules Mining/association_rules_mining.pptx
+++ b/20243/Part 5-Associatin Rules Mining/association_rules_mining.pptx
@@ -150,8 +150,552 @@
 </p:cmAuthorLst>
 </file>
 
+<file path=ppt/revisionInfo.xml><?xml version="1.0" encoding="utf-8"?>
+<p1510:revInfo xmlns:a="http://schemas.openxmlformats.org/drawingml/2006/main" xmlns:r="http://schemas.openxmlformats.org/officeDocument/2006/relationships" xmlns:p1510="http://schemas.microsoft.com/office/powerpoint/2015/10/main">
+  <p1510:revLst>
+    <p1510:client id="{5A53F68D-5D62-2F91-0C34-5AF0710613BB}" v="270" dt="2025-06-18T07:34:46.145"/>
+  </p1510:revLst>
+</p1510:revInfo>
+</file>
+
 <file path=ppt/changesInfos/changesInfo1.xml><?xml version="1.0" encoding="utf-8"?>
 <pc:chgInfo xmlns:a="http://schemas.openxmlformats.org/drawingml/2006/main" xmlns:r="http://schemas.openxmlformats.org/officeDocument/2006/relationships" xmlns:ac="http://schemas.microsoft.com/office/drawing/2013/main/command" xmlns:pc="http://schemas.microsoft.com/office/powerpoint/2013/main/command">
+  <pc:docChgLst>
+    <pc:chgData name="Mohammed Fasha" userId="cc64f42d-a1a6-4f08-b97b-0c37f877119f" providerId="ADAL" clId="{BECD4A7F-C1AF-4585-8C31-FE7D4FE3ED16}"/>
+    <pc:docChg chg="undo redo custSel addSld delSld modSld sldOrd">
+      <pc:chgData name="Mohammed Fasha" userId="cc64f42d-a1a6-4f08-b97b-0c37f877119f" providerId="ADAL" clId="{BECD4A7F-C1AF-4585-8C31-FE7D4FE3ED16}" dt="2025-01-05T16:36:16.605" v="1945" actId="1076"/>
+      <pc:docMkLst>
+        <pc:docMk/>
+      </pc:docMkLst>
+      <pc:sldChg chg="modSp mod">
+        <pc:chgData name="Mohammed Fasha" userId="cc64f42d-a1a6-4f08-b97b-0c37f877119f" providerId="ADAL" clId="{BECD4A7F-C1AF-4585-8C31-FE7D4FE3ED16}" dt="2024-12-30T18:47:27.683" v="988" actId="20577"/>
+        <pc:sldMkLst>
+          <pc:docMk/>
+          <pc:sldMk cId="2281221656" sldId="527"/>
+        </pc:sldMkLst>
+      </pc:sldChg>
+      <pc:sldChg chg="modSp mod">
+        <pc:chgData name="Mohammed Fasha" userId="cc64f42d-a1a6-4f08-b97b-0c37f877119f" providerId="ADAL" clId="{BECD4A7F-C1AF-4585-8C31-FE7D4FE3ED16}" dt="2024-12-27T13:59:26.893" v="366" actId="20577"/>
+        <pc:sldMkLst>
+          <pc:docMk/>
+          <pc:sldMk cId="3474268344" sldId="596"/>
+        </pc:sldMkLst>
+      </pc:sldChg>
+      <pc:sldChg chg="modSp mod">
+        <pc:chgData name="Mohammed Fasha" userId="cc64f42d-a1a6-4f08-b97b-0c37f877119f" providerId="ADAL" clId="{BECD4A7F-C1AF-4585-8C31-FE7D4FE3ED16}" dt="2024-12-30T18:44:34.649" v="884" actId="20577"/>
+        <pc:sldMkLst>
+          <pc:docMk/>
+          <pc:sldMk cId="916802035" sldId="651"/>
+        </pc:sldMkLst>
+      </pc:sldChg>
+      <pc:sldChg chg="del">
+        <pc:chgData name="Mohammed Fasha" userId="cc64f42d-a1a6-4f08-b97b-0c37f877119f" providerId="ADAL" clId="{BECD4A7F-C1AF-4585-8C31-FE7D4FE3ED16}" dt="2025-01-05T14:42:38.675" v="989" actId="2696"/>
+        <pc:sldMkLst>
+          <pc:docMk/>
+          <pc:sldMk cId="426516858" sldId="662"/>
+        </pc:sldMkLst>
+      </pc:sldChg>
+      <pc:sldChg chg="modSp add del mod">
+        <pc:chgData name="Mohammed Fasha" userId="cc64f42d-a1a6-4f08-b97b-0c37f877119f" providerId="ADAL" clId="{BECD4A7F-C1AF-4585-8C31-FE7D4FE3ED16}" dt="2025-01-05T16:34:59.233" v="1926" actId="20577"/>
+        <pc:sldMkLst>
+          <pc:docMk/>
+          <pc:sldMk cId="691538069" sldId="662"/>
+        </pc:sldMkLst>
+      </pc:sldChg>
+      <pc:sldChg chg="del">
+        <pc:chgData name="Mohammed Fasha" userId="cc64f42d-a1a6-4f08-b97b-0c37f877119f" providerId="ADAL" clId="{BECD4A7F-C1AF-4585-8C31-FE7D4FE3ED16}" dt="2025-01-05T14:42:38.675" v="989" actId="2696"/>
+        <pc:sldMkLst>
+          <pc:docMk/>
+          <pc:sldMk cId="895445062" sldId="663"/>
+        </pc:sldMkLst>
+      </pc:sldChg>
+      <pc:sldChg chg="add del">
+        <pc:chgData name="Mohammed Fasha" userId="cc64f42d-a1a6-4f08-b97b-0c37f877119f" providerId="ADAL" clId="{BECD4A7F-C1AF-4585-8C31-FE7D4FE3ED16}" dt="2025-01-05T14:43:16.100" v="993" actId="2696"/>
+        <pc:sldMkLst>
+          <pc:docMk/>
+          <pc:sldMk cId="3980180774" sldId="663"/>
+        </pc:sldMkLst>
+      </pc:sldChg>
+      <pc:sldChg chg="add del">
+        <pc:chgData name="Mohammed Fasha" userId="cc64f42d-a1a6-4f08-b97b-0c37f877119f" providerId="ADAL" clId="{BECD4A7F-C1AF-4585-8C31-FE7D4FE3ED16}" dt="2025-01-05T14:43:16.100" v="993" actId="2696"/>
+        <pc:sldMkLst>
+          <pc:docMk/>
+          <pc:sldMk cId="1728680596" sldId="664"/>
+        </pc:sldMkLst>
+      </pc:sldChg>
+      <pc:sldChg chg="del">
+        <pc:chgData name="Mohammed Fasha" userId="cc64f42d-a1a6-4f08-b97b-0c37f877119f" providerId="ADAL" clId="{BECD4A7F-C1AF-4585-8C31-FE7D4FE3ED16}" dt="2025-01-05T14:42:38.675" v="989" actId="2696"/>
+        <pc:sldMkLst>
+          <pc:docMk/>
+          <pc:sldMk cId="3900588277" sldId="664"/>
+        </pc:sldMkLst>
+      </pc:sldChg>
+      <pc:sldChg chg="del">
+        <pc:chgData name="Mohammed Fasha" userId="cc64f42d-a1a6-4f08-b97b-0c37f877119f" providerId="ADAL" clId="{BECD4A7F-C1AF-4585-8C31-FE7D4FE3ED16}" dt="2025-01-05T14:42:38.675" v="989" actId="2696"/>
+        <pc:sldMkLst>
+          <pc:docMk/>
+          <pc:sldMk cId="123002105" sldId="665"/>
+        </pc:sldMkLst>
+      </pc:sldChg>
+      <pc:sldChg chg="modSp add del mod">
+        <pc:chgData name="Mohammed Fasha" userId="cc64f42d-a1a6-4f08-b97b-0c37f877119f" providerId="ADAL" clId="{BECD4A7F-C1AF-4585-8C31-FE7D4FE3ED16}" dt="2025-01-05T15:05:12.729" v="1226" actId="21"/>
+        <pc:sldMkLst>
+          <pc:docMk/>
+          <pc:sldMk cId="148099094" sldId="665"/>
+        </pc:sldMkLst>
+      </pc:sldChg>
+      <pc:sldChg chg="del">
+        <pc:chgData name="Mohammed Fasha" userId="cc64f42d-a1a6-4f08-b97b-0c37f877119f" providerId="ADAL" clId="{BECD4A7F-C1AF-4585-8C31-FE7D4FE3ED16}" dt="2025-01-05T14:42:38.675" v="989" actId="2696"/>
+        <pc:sldMkLst>
+          <pc:docMk/>
+          <pc:sldMk cId="659863378" sldId="676"/>
+        </pc:sldMkLst>
+      </pc:sldChg>
+      <pc:sldChg chg="modSp add del mod">
+        <pc:chgData name="Mohammed Fasha" userId="cc64f42d-a1a6-4f08-b97b-0c37f877119f" providerId="ADAL" clId="{BECD4A7F-C1AF-4585-8C31-FE7D4FE3ED16}" dt="2025-01-05T14:55:27.595" v="1130" actId="255"/>
+        <pc:sldMkLst>
+          <pc:docMk/>
+          <pc:sldMk cId="1577854815" sldId="676"/>
+        </pc:sldMkLst>
+      </pc:sldChg>
+      <pc:sldChg chg="modSp add del mod">
+        <pc:chgData name="Mohammed Fasha" userId="cc64f42d-a1a6-4f08-b97b-0c37f877119f" providerId="ADAL" clId="{BECD4A7F-C1AF-4585-8C31-FE7D4FE3ED16}" dt="2025-01-05T14:55:43.754" v="1132" actId="1076"/>
+        <pc:sldMkLst>
+          <pc:docMk/>
+          <pc:sldMk cId="139882925" sldId="677"/>
+        </pc:sldMkLst>
+      </pc:sldChg>
+      <pc:sldChg chg="del">
+        <pc:chgData name="Mohammed Fasha" userId="cc64f42d-a1a6-4f08-b97b-0c37f877119f" providerId="ADAL" clId="{BECD4A7F-C1AF-4585-8C31-FE7D4FE3ED16}" dt="2025-01-05T14:42:38.675" v="989" actId="2696"/>
+        <pc:sldMkLst>
+          <pc:docMk/>
+          <pc:sldMk cId="2736863534" sldId="677"/>
+        </pc:sldMkLst>
+      </pc:sldChg>
+      <pc:sldChg chg="add del">
+        <pc:chgData name="Mohammed Fasha" userId="cc64f42d-a1a6-4f08-b97b-0c37f877119f" providerId="ADAL" clId="{BECD4A7F-C1AF-4585-8C31-FE7D4FE3ED16}" dt="2025-01-05T14:43:16.100" v="993" actId="2696"/>
+        <pc:sldMkLst>
+          <pc:docMk/>
+          <pc:sldMk cId="4146654093" sldId="678"/>
+        </pc:sldMkLst>
+      </pc:sldChg>
+      <pc:sldChg chg="del">
+        <pc:chgData name="Mohammed Fasha" userId="cc64f42d-a1a6-4f08-b97b-0c37f877119f" providerId="ADAL" clId="{BECD4A7F-C1AF-4585-8C31-FE7D4FE3ED16}" dt="2025-01-05T14:42:38.675" v="989" actId="2696"/>
+        <pc:sldMkLst>
+          <pc:docMk/>
+          <pc:sldMk cId="4228312762" sldId="678"/>
+        </pc:sldMkLst>
+      </pc:sldChg>
+      <pc:sldChg chg="del">
+        <pc:chgData name="Mohammed Fasha" userId="cc64f42d-a1a6-4f08-b97b-0c37f877119f" providerId="ADAL" clId="{BECD4A7F-C1AF-4585-8C31-FE7D4FE3ED16}" dt="2025-01-05T14:42:38.675" v="989" actId="2696"/>
+        <pc:sldMkLst>
+          <pc:docMk/>
+          <pc:sldMk cId="581717462" sldId="679"/>
+        </pc:sldMkLst>
+      </pc:sldChg>
+      <pc:sldChg chg="addSp delSp modSp add del mod chgLayout">
+        <pc:chgData name="Mohammed Fasha" userId="cc64f42d-a1a6-4f08-b97b-0c37f877119f" providerId="ADAL" clId="{BECD4A7F-C1AF-4585-8C31-FE7D4FE3ED16}" dt="2025-01-05T16:36:16.605" v="1945" actId="1076"/>
+        <pc:sldMkLst>
+          <pc:docMk/>
+          <pc:sldMk cId="3454522070" sldId="679"/>
+        </pc:sldMkLst>
+      </pc:sldChg>
+      <pc:sldChg chg="add del">
+        <pc:chgData name="Mohammed Fasha" userId="cc64f42d-a1a6-4f08-b97b-0c37f877119f" providerId="ADAL" clId="{BECD4A7F-C1AF-4585-8C31-FE7D4FE3ED16}" dt="2025-01-05T14:43:16.100" v="993" actId="2696"/>
+        <pc:sldMkLst>
+          <pc:docMk/>
+          <pc:sldMk cId="2856814121" sldId="681"/>
+        </pc:sldMkLst>
+      </pc:sldChg>
+      <pc:sldChg chg="del">
+        <pc:chgData name="Mohammed Fasha" userId="cc64f42d-a1a6-4f08-b97b-0c37f877119f" providerId="ADAL" clId="{BECD4A7F-C1AF-4585-8C31-FE7D4FE3ED16}" dt="2025-01-05T14:42:38.675" v="989" actId="2696"/>
+        <pc:sldMkLst>
+          <pc:docMk/>
+          <pc:sldMk cId="3083966018" sldId="681"/>
+        </pc:sldMkLst>
+      </pc:sldChg>
+      <pc:sldChg chg="modSp mod">
+        <pc:chgData name="Mohammed Fasha" userId="cc64f42d-a1a6-4f08-b97b-0c37f877119f" providerId="ADAL" clId="{BECD4A7F-C1AF-4585-8C31-FE7D4FE3ED16}" dt="2025-01-05T14:42:50.596" v="990" actId="14100"/>
+        <pc:sldMkLst>
+          <pc:docMk/>
+          <pc:sldMk cId="1697141369" sldId="695"/>
+        </pc:sldMkLst>
+      </pc:sldChg>
+      <pc:sldChg chg="addSp delSp modSp add del mod">
+        <pc:chgData name="Mohammed Fasha" userId="cc64f42d-a1a6-4f08-b97b-0c37f877119f" providerId="ADAL" clId="{BECD4A7F-C1AF-4585-8C31-FE7D4FE3ED16}" dt="2025-01-05T14:54:31.375" v="1125" actId="14100"/>
+        <pc:sldMkLst>
+          <pc:docMk/>
+          <pc:sldMk cId="265576630" sldId="698"/>
+        </pc:sldMkLst>
+      </pc:sldChg>
+      <pc:sldChg chg="del">
+        <pc:chgData name="Mohammed Fasha" userId="cc64f42d-a1a6-4f08-b97b-0c37f877119f" providerId="ADAL" clId="{BECD4A7F-C1AF-4585-8C31-FE7D4FE3ED16}" dt="2025-01-05T14:42:38.675" v="989" actId="2696"/>
+        <pc:sldMkLst>
+          <pc:docMk/>
+          <pc:sldMk cId="991725834" sldId="698"/>
+        </pc:sldMkLst>
+      </pc:sldChg>
+      <pc:sldChg chg="del">
+        <pc:chgData name="Mohammed Fasha" userId="cc64f42d-a1a6-4f08-b97b-0c37f877119f" providerId="ADAL" clId="{BECD4A7F-C1AF-4585-8C31-FE7D4FE3ED16}" dt="2025-01-05T14:42:38.675" v="989" actId="2696"/>
+        <pc:sldMkLst>
+          <pc:docMk/>
+          <pc:sldMk cId="3109561867" sldId="700"/>
+        </pc:sldMkLst>
+      </pc:sldChg>
+      <pc:sldChg chg="addSp delSp modSp add del mod">
+        <pc:chgData name="Mohammed Fasha" userId="cc64f42d-a1a6-4f08-b97b-0c37f877119f" providerId="ADAL" clId="{BECD4A7F-C1AF-4585-8C31-FE7D4FE3ED16}" dt="2025-01-05T16:00:05.564" v="1529" actId="20577"/>
+        <pc:sldMkLst>
+          <pc:docMk/>
+          <pc:sldMk cId="4247717824" sldId="700"/>
+        </pc:sldMkLst>
+      </pc:sldChg>
+      <pc:sldChg chg="addSp delSp modSp add mod">
+        <pc:chgData name="Mohammed Fasha" userId="cc64f42d-a1a6-4f08-b97b-0c37f877119f" providerId="ADAL" clId="{BECD4A7F-C1AF-4585-8C31-FE7D4FE3ED16}" dt="2025-01-05T14:53:29.185" v="1101" actId="21"/>
+        <pc:sldMkLst>
+          <pc:docMk/>
+          <pc:sldMk cId="67871309" sldId="709"/>
+        </pc:sldMkLst>
+      </pc:sldChg>
+      <pc:sldChg chg="modSp add mod">
+        <pc:chgData name="Mohammed Fasha" userId="cc64f42d-a1a6-4f08-b97b-0c37f877119f" providerId="ADAL" clId="{BECD4A7F-C1AF-4585-8C31-FE7D4FE3ED16}" dt="2025-01-05T15:31:09.113" v="1385" actId="6549"/>
+        <pc:sldMkLst>
+          <pc:docMk/>
+          <pc:sldMk cId="4114896152" sldId="710"/>
+        </pc:sldMkLst>
+      </pc:sldChg>
+      <pc:sldChg chg="addSp modSp add mod">
+        <pc:chgData name="Mohammed Fasha" userId="cc64f42d-a1a6-4f08-b97b-0c37f877119f" providerId="ADAL" clId="{BECD4A7F-C1AF-4585-8C31-FE7D4FE3ED16}" dt="2025-01-05T15:27:36.027" v="1348" actId="20577"/>
+        <pc:sldMkLst>
+          <pc:docMk/>
+          <pc:sldMk cId="3794385322" sldId="711"/>
+        </pc:sldMkLst>
+      </pc:sldChg>
+      <pc:sldChg chg="add del">
+        <pc:chgData name="Mohammed Fasha" userId="cc64f42d-a1a6-4f08-b97b-0c37f877119f" providerId="ADAL" clId="{BECD4A7F-C1AF-4585-8C31-FE7D4FE3ED16}" dt="2025-01-05T14:57:43.613" v="1146" actId="2696"/>
+        <pc:sldMkLst>
+          <pc:docMk/>
+          <pc:sldMk cId="501127302" sldId="712"/>
+        </pc:sldMkLst>
+      </pc:sldChg>
+      <pc:sldChg chg="modSp add mod">
+        <pc:chgData name="Mohammed Fasha" userId="cc64f42d-a1a6-4f08-b97b-0c37f877119f" providerId="ADAL" clId="{BECD4A7F-C1AF-4585-8C31-FE7D4FE3ED16}" dt="2025-01-05T15:32:23.870" v="1388"/>
+        <pc:sldMkLst>
+          <pc:docMk/>
+          <pc:sldMk cId="3701206727" sldId="712"/>
+        </pc:sldMkLst>
+      </pc:sldChg>
+      <pc:sldChg chg="addSp modSp add mod">
+        <pc:chgData name="Mohammed Fasha" userId="cc64f42d-a1a6-4f08-b97b-0c37f877119f" providerId="ADAL" clId="{BECD4A7F-C1AF-4585-8C31-FE7D4FE3ED16}" dt="2025-01-05T16:06:36.028" v="1538" actId="1076"/>
+        <pc:sldMkLst>
+          <pc:docMk/>
+          <pc:sldMk cId="1499972066" sldId="713"/>
+        </pc:sldMkLst>
+      </pc:sldChg>
+      <pc:sldChg chg="addSp delSp modSp add mod">
+        <pc:chgData name="Mohammed Fasha" userId="cc64f42d-a1a6-4f08-b97b-0c37f877119f" providerId="ADAL" clId="{BECD4A7F-C1AF-4585-8C31-FE7D4FE3ED16}" dt="2025-01-05T16:19:08.436" v="1705" actId="1036"/>
+        <pc:sldMkLst>
+          <pc:docMk/>
+          <pc:sldMk cId="1270641495" sldId="714"/>
+        </pc:sldMkLst>
+      </pc:sldChg>
+      <pc:sldChg chg="addSp modSp new mod">
+        <pc:chgData name="Mohammed Fasha" userId="cc64f42d-a1a6-4f08-b97b-0c37f877119f" providerId="ADAL" clId="{BECD4A7F-C1AF-4585-8C31-FE7D4FE3ED16}" dt="2025-01-05T16:23:44.632" v="1736" actId="12"/>
+        <pc:sldMkLst>
+          <pc:docMk/>
+          <pc:sldMk cId="1096386322" sldId="715"/>
+        </pc:sldMkLst>
+      </pc:sldChg>
+      <pc:sldChg chg="modSp new mod">
+        <pc:chgData name="Mohammed Fasha" userId="cc64f42d-a1a6-4f08-b97b-0c37f877119f" providerId="ADAL" clId="{BECD4A7F-C1AF-4585-8C31-FE7D4FE3ED16}" dt="2025-01-05T16:34:02.360" v="1902" actId="27636"/>
+        <pc:sldMkLst>
+          <pc:docMk/>
+          <pc:sldMk cId="1784058309" sldId="716"/>
+        </pc:sldMkLst>
+      </pc:sldChg>
+      <pc:sldChg chg="modSp add mod ord">
+        <pc:chgData name="Mohammed Fasha" userId="cc64f42d-a1a6-4f08-b97b-0c37f877119f" providerId="ADAL" clId="{BECD4A7F-C1AF-4585-8C31-FE7D4FE3ED16}" dt="2025-01-05T16:27:20.520" v="1803"/>
+        <pc:sldMkLst>
+          <pc:docMk/>
+          <pc:sldMk cId="3139017106" sldId="717"/>
+        </pc:sldMkLst>
+      </pc:sldChg>
+      <pc:sldChg chg="addSp delSp modSp new mod">
+        <pc:chgData name="Mohammed Fasha" userId="cc64f42d-a1a6-4f08-b97b-0c37f877119f" providerId="ADAL" clId="{BECD4A7F-C1AF-4585-8C31-FE7D4FE3ED16}" dt="2025-01-05T16:32:45.446" v="1897" actId="20577"/>
+        <pc:sldMkLst>
+          <pc:docMk/>
+          <pc:sldMk cId="3043812923" sldId="718"/>
+        </pc:sldMkLst>
+      </pc:sldChg>
+    </pc:docChg>
+  </pc:docChgLst>
+  <pc:docChgLst>
+    <pc:chgData name="Mohammed Fasha" userId="S::mohammed.fasha@uop.edu.jo::cc64f42d-a1a6-4f08-b97b-0c37f877119f" providerId="AD" clId="Web-{5A53F68D-5D62-2F91-0C34-5AF0710613BB}"/>
+    <pc:docChg chg="addSld modSld">
+      <pc:chgData name="Mohammed Fasha" userId="S::mohammed.fasha@uop.edu.jo::cc64f42d-a1a6-4f08-b97b-0c37f877119f" providerId="AD" clId="Web-{5A53F68D-5D62-2F91-0C34-5AF0710613BB}" dt="2025-06-18T07:34:46.145" v="255" actId="20577"/>
+      <pc:docMkLst>
+        <pc:docMk/>
+      </pc:docMkLst>
+      <pc:sldChg chg="modSp">
+        <pc:chgData name="Mohammed Fasha" userId="S::mohammed.fasha@uop.edu.jo::cc64f42d-a1a6-4f08-b97b-0c37f877119f" providerId="AD" clId="Web-{5A53F68D-5D62-2F91-0C34-5AF0710613BB}" dt="2025-06-18T07:34:46.145" v="255" actId="20577"/>
+        <pc:sldMkLst>
+          <pc:docMk/>
+          <pc:sldMk cId="1855355283" sldId="498"/>
+        </pc:sldMkLst>
+        <pc:spChg chg="mod">
+          <ac:chgData name="Mohammed Fasha" userId="S::mohammed.fasha@uop.edu.jo::cc64f42d-a1a6-4f08-b97b-0c37f877119f" providerId="AD" clId="Web-{5A53F68D-5D62-2F91-0C34-5AF0710613BB}" dt="2025-06-18T07:34:46.145" v="255" actId="20577"/>
+          <ac:spMkLst>
+            <pc:docMk/>
+            <pc:sldMk cId="1855355283" sldId="498"/>
+            <ac:spMk id="3" creationId="{EE397667-A7E4-7E53-67C9-F8B9D8DAF6D5}"/>
+          </ac:spMkLst>
+        </pc:spChg>
+      </pc:sldChg>
+      <pc:sldChg chg="modSp">
+        <pc:chgData name="Mohammed Fasha" userId="S::mohammed.fasha@uop.edu.jo::cc64f42d-a1a6-4f08-b97b-0c37f877119f" providerId="AD" clId="Web-{5A53F68D-5D62-2F91-0C34-5AF0710613BB}" dt="2025-06-18T07:33:42.518" v="245" actId="20577"/>
+        <pc:sldMkLst>
+          <pc:docMk/>
+          <pc:sldMk cId="3589465999" sldId="514"/>
+        </pc:sldMkLst>
+        <pc:spChg chg="mod">
+          <ac:chgData name="Mohammed Fasha" userId="S::mohammed.fasha@uop.edu.jo::cc64f42d-a1a6-4f08-b97b-0c37f877119f" providerId="AD" clId="Web-{5A53F68D-5D62-2F91-0C34-5AF0710613BB}" dt="2025-06-18T07:32:02.797" v="218" actId="20577"/>
+          <ac:spMkLst>
+            <pc:docMk/>
+            <pc:sldMk cId="3589465999" sldId="514"/>
+            <ac:spMk id="2" creationId="{88A29053-B25D-8437-7DDD-113C9833833C}"/>
+          </ac:spMkLst>
+        </pc:spChg>
+        <pc:spChg chg="mod">
+          <ac:chgData name="Mohammed Fasha" userId="S::mohammed.fasha@uop.edu.jo::cc64f42d-a1a6-4f08-b97b-0c37f877119f" providerId="AD" clId="Web-{5A53F68D-5D62-2F91-0C34-5AF0710613BB}" dt="2025-06-18T07:33:42.518" v="245" actId="20577"/>
+          <ac:spMkLst>
+            <pc:docMk/>
+            <pc:sldMk cId="3589465999" sldId="514"/>
+            <ac:spMk id="3" creationId="{5B93E470-126F-0470-F370-550A166C8CE3}"/>
+          </ac:spMkLst>
+        </pc:spChg>
+      </pc:sldChg>
+      <pc:sldChg chg="modSp">
+        <pc:chgData name="Mohammed Fasha" userId="S::mohammed.fasha@uop.edu.jo::cc64f42d-a1a6-4f08-b97b-0c37f877119f" providerId="AD" clId="Web-{5A53F68D-5D62-2F91-0C34-5AF0710613BB}" dt="2025-06-18T07:32:07.031" v="219" actId="20577"/>
+        <pc:sldMkLst>
+          <pc:docMk/>
+          <pc:sldMk cId="2311531301" sldId="515"/>
+        </pc:sldMkLst>
+        <pc:spChg chg="mod">
+          <ac:chgData name="Mohammed Fasha" userId="S::mohammed.fasha@uop.edu.jo::cc64f42d-a1a6-4f08-b97b-0c37f877119f" providerId="AD" clId="Web-{5A53F68D-5D62-2F91-0C34-5AF0710613BB}" dt="2025-06-18T07:32:07.031" v="219" actId="20577"/>
+          <ac:spMkLst>
+            <pc:docMk/>
+            <pc:sldMk cId="2311531301" sldId="515"/>
+            <ac:spMk id="2" creationId="{DC04C7CB-A0FB-53BD-F5B2-69AE96A0E5A0}"/>
+          </ac:spMkLst>
+        </pc:spChg>
+      </pc:sldChg>
+      <pc:sldChg chg="modSp">
+        <pc:chgData name="Mohammed Fasha" userId="S::mohammed.fasha@uop.edu.jo::cc64f42d-a1a6-4f08-b97b-0c37f877119f" providerId="AD" clId="Web-{5A53F68D-5D62-2F91-0C34-5AF0710613BB}" dt="2025-06-18T07:34:15.676" v="252" actId="14100"/>
+        <pc:sldMkLst>
+          <pc:docMk/>
+          <pc:sldMk cId="1201106649" sldId="516"/>
+        </pc:sldMkLst>
+        <pc:spChg chg="mod">
+          <ac:chgData name="Mohammed Fasha" userId="S::mohammed.fasha@uop.edu.jo::cc64f42d-a1a6-4f08-b97b-0c37f877119f" providerId="AD" clId="Web-{5A53F68D-5D62-2F91-0C34-5AF0710613BB}" dt="2025-06-18T07:34:04.910" v="248" actId="20577"/>
+          <ac:spMkLst>
+            <pc:docMk/>
+            <pc:sldMk cId="1201106649" sldId="516"/>
+            <ac:spMk id="2" creationId="{0200F449-8EB2-4A35-0E5D-148ACC5A1F7D}"/>
+          </ac:spMkLst>
+        </pc:spChg>
+        <pc:spChg chg="mod">
+          <ac:chgData name="Mohammed Fasha" userId="S::mohammed.fasha@uop.edu.jo::cc64f42d-a1a6-4f08-b97b-0c37f877119f" providerId="AD" clId="Web-{5A53F68D-5D62-2F91-0C34-5AF0710613BB}" dt="2025-06-18T07:34:15.676" v="252" actId="14100"/>
+          <ac:spMkLst>
+            <pc:docMk/>
+            <pc:sldMk cId="1201106649" sldId="516"/>
+            <ac:spMk id="10" creationId="{CBD069FD-7B37-85AA-7C66-0FC15C990DD8}"/>
+          </ac:spMkLst>
+        </pc:spChg>
+      </pc:sldChg>
+      <pc:sldChg chg="modSp">
+        <pc:chgData name="Mohammed Fasha" userId="S::mohammed.fasha@uop.edu.jo::cc64f42d-a1a6-4f08-b97b-0c37f877119f" providerId="AD" clId="Web-{5A53F68D-5D62-2F91-0C34-5AF0710613BB}" dt="2025-06-18T07:31:30.389" v="215" actId="20577"/>
+        <pc:sldMkLst>
+          <pc:docMk/>
+          <pc:sldMk cId="834475357" sldId="517"/>
+        </pc:sldMkLst>
+        <pc:spChg chg="mod">
+          <ac:chgData name="Mohammed Fasha" userId="S::mohammed.fasha@uop.edu.jo::cc64f42d-a1a6-4f08-b97b-0c37f877119f" providerId="AD" clId="Web-{5A53F68D-5D62-2F91-0C34-5AF0710613BB}" dt="2025-06-18T07:28:32.493" v="127" actId="20577"/>
+          <ac:spMkLst>
+            <pc:docMk/>
+            <pc:sldMk cId="834475357" sldId="517"/>
+            <ac:spMk id="2" creationId="{748EBE3E-0A49-2947-0CEC-18B7160B878C}"/>
+          </ac:spMkLst>
+        </pc:spChg>
+        <pc:spChg chg="mod">
+          <ac:chgData name="Mohammed Fasha" userId="S::mohammed.fasha@uop.edu.jo::cc64f42d-a1a6-4f08-b97b-0c37f877119f" providerId="AD" clId="Web-{5A53F68D-5D62-2F91-0C34-5AF0710613BB}" dt="2025-06-18T07:31:30.389" v="215" actId="20577"/>
+          <ac:spMkLst>
+            <pc:docMk/>
+            <pc:sldMk cId="834475357" sldId="517"/>
+            <ac:spMk id="3" creationId="{ACE394C5-CDB7-FD4D-AA66-701E1D158182}"/>
+          </ac:spMkLst>
+        </pc:spChg>
+      </pc:sldChg>
+      <pc:sldChg chg="addSp delSp modSp new">
+        <pc:chgData name="Mohammed Fasha" userId="S::mohammed.fasha@uop.edu.jo::cc64f42d-a1a6-4f08-b97b-0c37f877119f" providerId="AD" clId="Web-{5A53F68D-5D62-2F91-0C34-5AF0710613BB}" dt="2025-06-18T07:30:05.621" v="168"/>
+        <pc:sldMkLst>
+          <pc:docMk/>
+          <pc:sldMk cId="2757035436" sldId="524"/>
+        </pc:sldMkLst>
+        <pc:spChg chg="mod">
+          <ac:chgData name="Mohammed Fasha" userId="S::mohammed.fasha@uop.edu.jo::cc64f42d-a1a6-4f08-b97b-0c37f877119f" providerId="AD" clId="Web-{5A53F68D-5D62-2F91-0C34-5AF0710613BB}" dt="2025-06-18T07:27:14.553" v="64" actId="20577"/>
+          <ac:spMkLst>
+            <pc:docMk/>
+            <pc:sldMk cId="2757035436" sldId="524"/>
+            <ac:spMk id="2" creationId="{1462616C-41EE-2B5B-760C-E900F7CFDE29}"/>
+          </ac:spMkLst>
+        </pc:spChg>
+        <pc:spChg chg="del">
+          <ac:chgData name="Mohammed Fasha" userId="S::mohammed.fasha@uop.edu.jo::cc64f42d-a1a6-4f08-b97b-0c37f877119f" providerId="AD" clId="Web-{5A53F68D-5D62-2F91-0C34-5AF0710613BB}" dt="2025-06-18T07:26:35.287" v="1"/>
+          <ac:spMkLst>
+            <pc:docMk/>
+            <pc:sldMk cId="2757035436" sldId="524"/>
+            <ac:spMk id="3" creationId="{0249785F-B0B6-B72E-2196-10705E6D2A17}"/>
+          </ac:spMkLst>
+        </pc:spChg>
+        <pc:graphicFrameChg chg="add mod ord modGraphic">
+          <ac:chgData name="Mohammed Fasha" userId="S::mohammed.fasha@uop.edu.jo::cc64f42d-a1a6-4f08-b97b-0c37f877119f" providerId="AD" clId="Web-{5A53F68D-5D62-2F91-0C34-5AF0710613BB}" dt="2025-06-18T07:30:05.621" v="168"/>
+          <ac:graphicFrameMkLst>
+            <pc:docMk/>
+            <pc:sldMk cId="2757035436" sldId="524"/>
+            <ac:graphicFrameMk id="5" creationId="{D986A135-B943-08AB-BF49-B8AFBFF1A02E}"/>
+          </ac:graphicFrameMkLst>
+        </pc:graphicFrameChg>
+      </pc:sldChg>
+    </pc:docChg>
+  </pc:docChgLst>
+  <pc:docChgLst>
+    <pc:chgData name="Mohammed Fasha" userId="cc64f42d-a1a6-4f08-b97b-0c37f877119f" providerId="ADAL" clId="{25C05559-E4DC-4EE1-91BC-1444D09EE869}"/>
+    <pc:docChg chg="undo custSel addSld delSld modSld sldOrd">
+      <pc:chgData name="Mohammed Fasha" userId="cc64f42d-a1a6-4f08-b97b-0c37f877119f" providerId="ADAL" clId="{25C05559-E4DC-4EE1-91BC-1444D09EE869}" dt="2025-04-30T07:51:18.812" v="264" actId="47"/>
+      <pc:docMkLst>
+        <pc:docMk/>
+      </pc:docMkLst>
+      <pc:sldChg chg="modSp mod">
+        <pc:chgData name="Mohammed Fasha" userId="cc64f42d-a1a6-4f08-b97b-0c37f877119f" providerId="ADAL" clId="{25C05559-E4DC-4EE1-91BC-1444D09EE869}" dt="2025-04-16T06:14:55.232" v="16" actId="1076"/>
+        <pc:sldMkLst>
+          <pc:docMk/>
+          <pc:sldMk cId="1499958888" sldId="394"/>
+        </pc:sldMkLst>
+      </pc:sldChg>
+      <pc:sldChg chg="delSp modSp mod delAnim">
+        <pc:chgData name="Mohammed Fasha" userId="cc64f42d-a1a6-4f08-b97b-0c37f877119f" providerId="ADAL" clId="{25C05559-E4DC-4EE1-91BC-1444D09EE869}" dt="2025-04-16T06:43:36.666" v="20" actId="478"/>
+        <pc:sldMkLst>
+          <pc:docMk/>
+          <pc:sldMk cId="2905491798" sldId="440"/>
+        </pc:sldMkLst>
+      </pc:sldChg>
+      <pc:sldChg chg="modSp mod">
+        <pc:chgData name="Mohammed Fasha" userId="cc64f42d-a1a6-4f08-b97b-0c37f877119f" providerId="ADAL" clId="{25C05559-E4DC-4EE1-91BC-1444D09EE869}" dt="2025-04-09T06:23:26.187" v="0" actId="20577"/>
+        <pc:sldMkLst>
+          <pc:docMk/>
+          <pc:sldMk cId="2297456757" sldId="483"/>
+        </pc:sldMkLst>
+        <pc:spChg chg="mod">
+          <ac:chgData name="Mohammed Fasha" userId="cc64f42d-a1a6-4f08-b97b-0c37f877119f" providerId="ADAL" clId="{25C05559-E4DC-4EE1-91BC-1444D09EE869}" dt="2025-04-09T06:23:26.187" v="0" actId="20577"/>
+          <ac:spMkLst>
+            <pc:docMk/>
+            <pc:sldMk cId="2297456757" sldId="483"/>
+            <ac:spMk id="5" creationId="{89403830-E271-DAA0-8838-E295A84A8B5B}"/>
+          </ac:spMkLst>
+        </pc:spChg>
+      </pc:sldChg>
+      <pc:sldChg chg="ord">
+        <pc:chgData name="Mohammed Fasha" userId="cc64f42d-a1a6-4f08-b97b-0c37f877119f" providerId="ADAL" clId="{25C05559-E4DC-4EE1-91BC-1444D09EE869}" dt="2025-04-16T06:46:21.733" v="23" actId="20578"/>
+        <pc:sldMkLst>
+          <pc:docMk/>
+          <pc:sldMk cId="3480194047" sldId="599"/>
+        </pc:sldMkLst>
+      </pc:sldChg>
+      <pc:sldChg chg="modSp mod">
+        <pc:chgData name="Mohammed Fasha" userId="cc64f42d-a1a6-4f08-b97b-0c37f877119f" providerId="ADAL" clId="{25C05559-E4DC-4EE1-91BC-1444D09EE869}" dt="2025-04-16T06:46:47.902" v="27" actId="404"/>
+        <pc:sldMkLst>
+          <pc:docMk/>
+          <pc:sldMk cId="3146452721" sldId="600"/>
+        </pc:sldMkLst>
+      </pc:sldChg>
+      <pc:sldChg chg="delSp mod">
+        <pc:chgData name="Mohammed Fasha" userId="cc64f42d-a1a6-4f08-b97b-0c37f877119f" providerId="ADAL" clId="{25C05559-E4DC-4EE1-91BC-1444D09EE869}" dt="2025-04-16T06:47:57.131" v="35" actId="21"/>
+        <pc:sldMkLst>
+          <pc:docMk/>
+          <pc:sldMk cId="202107314" sldId="647"/>
+        </pc:sldMkLst>
+      </pc:sldChg>
+      <pc:sldChg chg="modSp mod">
+        <pc:chgData name="Mohammed Fasha" userId="cc64f42d-a1a6-4f08-b97b-0c37f877119f" providerId="ADAL" clId="{25C05559-E4DC-4EE1-91BC-1444D09EE869}" dt="2025-04-16T06:48:42.467" v="40" actId="14100"/>
+        <pc:sldMkLst>
+          <pc:docMk/>
+          <pc:sldMk cId="3454522070" sldId="679"/>
+        </pc:sldMkLst>
+      </pc:sldChg>
+      <pc:sldChg chg="modSp mod">
+        <pc:chgData name="Mohammed Fasha" userId="cc64f42d-a1a6-4f08-b97b-0c37f877119f" providerId="ADAL" clId="{25C05559-E4DC-4EE1-91BC-1444D09EE869}" dt="2025-04-16T06:49:10.468" v="48" actId="404"/>
+        <pc:sldMkLst>
+          <pc:docMk/>
+          <pc:sldMk cId="2856814121" sldId="681"/>
+        </pc:sldMkLst>
+      </pc:sldChg>
+      <pc:sldChg chg="modSp mod">
+        <pc:chgData name="Mohammed Fasha" userId="cc64f42d-a1a6-4f08-b97b-0c37f877119f" providerId="ADAL" clId="{25C05559-E4DC-4EE1-91BC-1444D09EE869}" dt="2025-04-16T06:48:55.287" v="46" actId="27636"/>
+        <pc:sldMkLst>
+          <pc:docMk/>
+          <pc:sldMk cId="265576630" sldId="698"/>
+        </pc:sldMkLst>
+      </pc:sldChg>
+      <pc:sldChg chg="modSp">
+        <pc:chgData name="Mohammed Fasha" userId="cc64f42d-a1a6-4f08-b97b-0c37f877119f" providerId="ADAL" clId="{25C05559-E4DC-4EE1-91BC-1444D09EE869}" dt="2025-04-16T06:48:02.658" v="36" actId="1076"/>
+        <pc:sldMkLst>
+          <pc:docMk/>
+          <pc:sldMk cId="3085160177" sldId="704"/>
+        </pc:sldMkLst>
+      </pc:sldChg>
+      <pc:sldChg chg="modSp mod">
+        <pc:chgData name="Mohammed Fasha" userId="cc64f42d-a1a6-4f08-b97b-0c37f877119f" providerId="ADAL" clId="{25C05559-E4DC-4EE1-91BC-1444D09EE869}" dt="2025-04-16T06:47:18.630" v="34" actId="1076"/>
+        <pc:sldMkLst>
+          <pc:docMk/>
+          <pc:sldMk cId="32004852" sldId="708"/>
+        </pc:sldMkLst>
+      </pc:sldChg>
+      <pc:sldChg chg="addSp delSp modSp mod">
+        <pc:chgData name="Mohammed Fasha" userId="cc64f42d-a1a6-4f08-b97b-0c37f877119f" providerId="ADAL" clId="{25C05559-E4DC-4EE1-91BC-1444D09EE869}" dt="2025-04-16T06:14:10.424" v="11" actId="167"/>
+        <pc:sldMkLst>
+          <pc:docMk/>
+          <pc:sldMk cId="3150550060" sldId="720"/>
+        </pc:sldMkLst>
+      </pc:sldChg>
+      <pc:sldChg chg="addSp modSp new mod">
+        <pc:chgData name="Mohammed Fasha" userId="cc64f42d-a1a6-4f08-b97b-0c37f877119f" providerId="ADAL" clId="{25C05559-E4DC-4EE1-91BC-1444D09EE869}" dt="2025-04-30T06:40:50.224" v="212" actId="6549"/>
+        <pc:sldMkLst>
+          <pc:docMk/>
+          <pc:sldMk cId="666527140" sldId="725"/>
+        </pc:sldMkLst>
+      </pc:sldChg>
+      <pc:sldChg chg="addSp delSp modSp new mod">
+        <pc:chgData name="Mohammed Fasha" userId="cc64f42d-a1a6-4f08-b97b-0c37f877119f" providerId="ADAL" clId="{25C05559-E4DC-4EE1-91BC-1444D09EE869}" dt="2025-04-30T07:05:36.135" v="263" actId="122"/>
+        <pc:sldMkLst>
+          <pc:docMk/>
+          <pc:sldMk cId="3660604927" sldId="726"/>
+        </pc:sldMkLst>
+      </pc:sldChg>
+      <pc:sldChg chg="add del">
+        <pc:chgData name="Mohammed Fasha" userId="cc64f42d-a1a6-4f08-b97b-0c37f877119f" providerId="ADAL" clId="{25C05559-E4DC-4EE1-91BC-1444D09EE869}" dt="2025-04-30T07:51:18.812" v="264" actId="47"/>
+        <pc:sldMkLst>
+          <pc:docMk/>
+          <pc:sldMk cId="2399550384" sldId="727"/>
+        </pc:sldMkLst>
+      </pc:sldChg>
+      <pc:sldChg chg="modSp add mod ord">
+        <pc:chgData name="Mohammed Fasha" userId="cc64f42d-a1a6-4f08-b97b-0c37f877119f" providerId="ADAL" clId="{25C05559-E4DC-4EE1-91BC-1444D09EE869}" dt="2025-04-30T06:47:23.280" v="238" actId="20577"/>
+        <pc:sldMkLst>
+          <pc:docMk/>
+          <pc:sldMk cId="4051640529" sldId="728"/>
+        </pc:sldMkLst>
+      </pc:sldChg>
+    </pc:docChg>
+  </pc:docChgLst>
   <pc:docChgLst>
     <pc:chgData name="Mohammed Fasha" userId="cc64f42d-a1a6-4f08-b97b-0c37f877119f" providerId="ADAL" clId="{4C71ED24-115E-432D-933D-C801DA3E52F1}"/>
     <pc:docChg chg="delSld">
@@ -178,6 +722,790 @@
         <pc:sldMkLst>
           <pc:docMk/>
           <pc:sldMk cId="3934257344" sldId="703"/>
+        </pc:sldMkLst>
+      </pc:sldChg>
+    </pc:docChg>
+  </pc:docChgLst>
+  <pc:docChgLst>
+    <pc:chgData name="Mohammed Fasha" userId="cc64f42d-a1a6-4f08-b97b-0c37f877119f" providerId="ADAL" clId="{FEC9C214-E726-4192-8176-A8C9AACEB478}"/>
+    <pc:docChg chg="custSel addSld delSld modSld">
+      <pc:chgData name="Mohammed Fasha" userId="cc64f42d-a1a6-4f08-b97b-0c37f877119f" providerId="ADAL" clId="{FEC9C214-E726-4192-8176-A8C9AACEB478}" dt="2025-05-16T05:43:36.510" v="126" actId="2696"/>
+      <pc:docMkLst>
+        <pc:docMk/>
+      </pc:docMkLst>
+      <pc:sldChg chg="del">
+        <pc:chgData name="Mohammed Fasha" userId="cc64f42d-a1a6-4f08-b97b-0c37f877119f" providerId="ADAL" clId="{FEC9C214-E726-4192-8176-A8C9AACEB478}" dt="2025-05-16T05:43:36.510" v="126" actId="2696"/>
+        <pc:sldMkLst>
+          <pc:docMk/>
+          <pc:sldMk cId="607684796" sldId="333"/>
+        </pc:sldMkLst>
+      </pc:sldChg>
+      <pc:sldChg chg="del">
+        <pc:chgData name="Mohammed Fasha" userId="cc64f42d-a1a6-4f08-b97b-0c37f877119f" providerId="ADAL" clId="{FEC9C214-E726-4192-8176-A8C9AACEB478}" dt="2025-05-16T05:43:36.510" v="126" actId="2696"/>
+        <pc:sldMkLst>
+          <pc:docMk/>
+          <pc:sldMk cId="587789057" sldId="423"/>
+        </pc:sldMkLst>
+      </pc:sldChg>
+      <pc:sldChg chg="del">
+        <pc:chgData name="Mohammed Fasha" userId="cc64f42d-a1a6-4f08-b97b-0c37f877119f" providerId="ADAL" clId="{FEC9C214-E726-4192-8176-A8C9AACEB478}" dt="2025-05-16T05:43:36.510" v="126" actId="2696"/>
+        <pc:sldMkLst>
+          <pc:docMk/>
+          <pc:sldMk cId="2127906749" sldId="427"/>
+        </pc:sldMkLst>
+      </pc:sldChg>
+      <pc:sldChg chg="del">
+        <pc:chgData name="Mohammed Fasha" userId="cc64f42d-a1a6-4f08-b97b-0c37f877119f" providerId="ADAL" clId="{FEC9C214-E726-4192-8176-A8C9AACEB478}" dt="2025-05-16T05:43:36.510" v="126" actId="2696"/>
+        <pc:sldMkLst>
+          <pc:docMk/>
+          <pc:sldMk cId="391491219" sldId="428"/>
+        </pc:sldMkLst>
+      </pc:sldChg>
+      <pc:sldChg chg="del">
+        <pc:chgData name="Mohammed Fasha" userId="cc64f42d-a1a6-4f08-b97b-0c37f877119f" providerId="ADAL" clId="{FEC9C214-E726-4192-8176-A8C9AACEB478}" dt="2025-05-16T05:43:36.510" v="126" actId="2696"/>
+        <pc:sldMkLst>
+          <pc:docMk/>
+          <pc:sldMk cId="3339445507" sldId="430"/>
+        </pc:sldMkLst>
+      </pc:sldChg>
+      <pc:sldChg chg="del">
+        <pc:chgData name="Mohammed Fasha" userId="cc64f42d-a1a6-4f08-b97b-0c37f877119f" providerId="ADAL" clId="{FEC9C214-E726-4192-8176-A8C9AACEB478}" dt="2025-05-16T05:43:36.510" v="126" actId="2696"/>
+        <pc:sldMkLst>
+          <pc:docMk/>
+          <pc:sldMk cId="3389046835" sldId="431"/>
+        </pc:sldMkLst>
+      </pc:sldChg>
+      <pc:sldChg chg="modSp mod">
+        <pc:chgData name="Mohammed Fasha" userId="cc64f42d-a1a6-4f08-b97b-0c37f877119f" providerId="ADAL" clId="{FEC9C214-E726-4192-8176-A8C9AACEB478}" dt="2025-05-16T05:42:48.998" v="99" actId="6549"/>
+        <pc:sldMkLst>
+          <pc:docMk/>
+          <pc:sldMk cId="4208461039" sldId="447"/>
+        </pc:sldMkLst>
+      </pc:sldChg>
+      <pc:sldChg chg="modSp mod">
+        <pc:chgData name="Mohammed Fasha" userId="cc64f42d-a1a6-4f08-b97b-0c37f877119f" providerId="ADAL" clId="{FEC9C214-E726-4192-8176-A8C9AACEB478}" dt="2025-05-16T05:43:13.101" v="125" actId="6549"/>
+        <pc:sldMkLst>
+          <pc:docMk/>
+          <pc:sldMk cId="2297456757" sldId="483"/>
+        </pc:sldMkLst>
+        <pc:spChg chg="mod">
+          <ac:chgData name="Mohammed Fasha" userId="cc64f42d-a1a6-4f08-b97b-0c37f877119f" providerId="ADAL" clId="{FEC9C214-E726-4192-8176-A8C9AACEB478}" dt="2025-05-16T05:43:13.101" v="125" actId="6549"/>
+          <ac:spMkLst>
+            <pc:docMk/>
+            <pc:sldMk cId="2297456757" sldId="483"/>
+            <ac:spMk id="5" creationId="{89403830-E271-DAA0-8838-E295A84A8B5B}"/>
+          </ac:spMkLst>
+        </pc:spChg>
+      </pc:sldChg>
+      <pc:sldChg chg="del">
+        <pc:chgData name="Mohammed Fasha" userId="cc64f42d-a1a6-4f08-b97b-0c37f877119f" providerId="ADAL" clId="{FEC9C214-E726-4192-8176-A8C9AACEB478}" dt="2025-05-16T05:43:36.510" v="126" actId="2696"/>
+        <pc:sldMkLst>
+          <pc:docMk/>
+          <pc:sldMk cId="1586650541" sldId="510"/>
+        </pc:sldMkLst>
+      </pc:sldChg>
+      <pc:sldChg chg="del">
+        <pc:chgData name="Mohammed Fasha" userId="cc64f42d-a1a6-4f08-b97b-0c37f877119f" providerId="ADAL" clId="{FEC9C214-E726-4192-8176-A8C9AACEB478}" dt="2025-05-16T05:43:36.510" v="126" actId="2696"/>
+        <pc:sldMkLst>
+          <pc:docMk/>
+          <pc:sldMk cId="1271956779" sldId="514"/>
+        </pc:sldMkLst>
+      </pc:sldChg>
+      <pc:sldChg chg="del">
+        <pc:chgData name="Mohammed Fasha" userId="cc64f42d-a1a6-4f08-b97b-0c37f877119f" providerId="ADAL" clId="{FEC9C214-E726-4192-8176-A8C9AACEB478}" dt="2025-05-16T05:43:36.510" v="126" actId="2696"/>
+        <pc:sldMkLst>
+          <pc:docMk/>
+          <pc:sldMk cId="2281221656" sldId="527"/>
+        </pc:sldMkLst>
+      </pc:sldChg>
+      <pc:sldChg chg="del">
+        <pc:chgData name="Mohammed Fasha" userId="cc64f42d-a1a6-4f08-b97b-0c37f877119f" providerId="ADAL" clId="{FEC9C214-E726-4192-8176-A8C9AACEB478}" dt="2025-05-16T05:43:36.510" v="126" actId="2696"/>
+        <pc:sldMkLst>
+          <pc:docMk/>
+          <pc:sldMk cId="2877973779" sldId="607"/>
+        </pc:sldMkLst>
+      </pc:sldChg>
+      <pc:sldChg chg="del">
+        <pc:chgData name="Mohammed Fasha" userId="cc64f42d-a1a6-4f08-b97b-0c37f877119f" providerId="ADAL" clId="{FEC9C214-E726-4192-8176-A8C9AACEB478}" dt="2025-05-16T05:43:36.510" v="126" actId="2696"/>
+        <pc:sldMkLst>
+          <pc:docMk/>
+          <pc:sldMk cId="21481256" sldId="611"/>
+        </pc:sldMkLst>
+      </pc:sldChg>
+      <pc:sldChg chg="del">
+        <pc:chgData name="Mohammed Fasha" userId="cc64f42d-a1a6-4f08-b97b-0c37f877119f" providerId="ADAL" clId="{FEC9C214-E726-4192-8176-A8C9AACEB478}" dt="2025-05-16T05:43:36.510" v="126" actId="2696"/>
+        <pc:sldMkLst>
+          <pc:docMk/>
+          <pc:sldMk cId="4040874025" sldId="612"/>
+        </pc:sldMkLst>
+      </pc:sldChg>
+      <pc:sldChg chg="del">
+        <pc:chgData name="Mohammed Fasha" userId="cc64f42d-a1a6-4f08-b97b-0c37f877119f" providerId="ADAL" clId="{FEC9C214-E726-4192-8176-A8C9AACEB478}" dt="2025-05-16T05:43:36.510" v="126" actId="2696"/>
+        <pc:sldMkLst>
+          <pc:docMk/>
+          <pc:sldMk cId="399592497" sldId="613"/>
+        </pc:sldMkLst>
+      </pc:sldChg>
+      <pc:sldChg chg="del">
+        <pc:chgData name="Mohammed Fasha" userId="cc64f42d-a1a6-4f08-b97b-0c37f877119f" providerId="ADAL" clId="{FEC9C214-E726-4192-8176-A8C9AACEB478}" dt="2025-05-16T05:43:36.510" v="126" actId="2696"/>
+        <pc:sldMkLst>
+          <pc:docMk/>
+          <pc:sldMk cId="3535314737" sldId="614"/>
+        </pc:sldMkLst>
+      </pc:sldChg>
+      <pc:sldChg chg="del">
+        <pc:chgData name="Mohammed Fasha" userId="cc64f42d-a1a6-4f08-b97b-0c37f877119f" providerId="ADAL" clId="{FEC9C214-E726-4192-8176-A8C9AACEB478}" dt="2025-05-16T05:43:36.510" v="126" actId="2696"/>
+        <pc:sldMkLst>
+          <pc:docMk/>
+          <pc:sldMk cId="627652750" sldId="615"/>
+        </pc:sldMkLst>
+      </pc:sldChg>
+      <pc:sldChg chg="del">
+        <pc:chgData name="Mohammed Fasha" userId="cc64f42d-a1a6-4f08-b97b-0c37f877119f" providerId="ADAL" clId="{FEC9C214-E726-4192-8176-A8C9AACEB478}" dt="2025-05-16T05:43:36.510" v="126" actId="2696"/>
+        <pc:sldMkLst>
+          <pc:docMk/>
+          <pc:sldMk cId="423212581" sldId="616"/>
+        </pc:sldMkLst>
+      </pc:sldChg>
+      <pc:sldChg chg="del">
+        <pc:chgData name="Mohammed Fasha" userId="cc64f42d-a1a6-4f08-b97b-0c37f877119f" providerId="ADAL" clId="{FEC9C214-E726-4192-8176-A8C9AACEB478}" dt="2025-05-16T05:43:36.510" v="126" actId="2696"/>
+        <pc:sldMkLst>
+          <pc:docMk/>
+          <pc:sldMk cId="3329135496" sldId="617"/>
+        </pc:sldMkLst>
+      </pc:sldChg>
+      <pc:sldChg chg="del">
+        <pc:chgData name="Mohammed Fasha" userId="cc64f42d-a1a6-4f08-b97b-0c37f877119f" providerId="ADAL" clId="{FEC9C214-E726-4192-8176-A8C9AACEB478}" dt="2025-05-16T05:43:36.510" v="126" actId="2696"/>
+        <pc:sldMkLst>
+          <pc:docMk/>
+          <pc:sldMk cId="1380276415" sldId="618"/>
+        </pc:sldMkLst>
+      </pc:sldChg>
+      <pc:sldChg chg="del">
+        <pc:chgData name="Mohammed Fasha" userId="cc64f42d-a1a6-4f08-b97b-0c37f877119f" providerId="ADAL" clId="{FEC9C214-E726-4192-8176-A8C9AACEB478}" dt="2025-05-16T05:43:36.510" v="126" actId="2696"/>
+        <pc:sldMkLst>
+          <pc:docMk/>
+          <pc:sldMk cId="246730148" sldId="619"/>
+        </pc:sldMkLst>
+      </pc:sldChg>
+      <pc:sldChg chg="del">
+        <pc:chgData name="Mohammed Fasha" userId="cc64f42d-a1a6-4f08-b97b-0c37f877119f" providerId="ADAL" clId="{FEC9C214-E726-4192-8176-A8C9AACEB478}" dt="2025-05-16T05:43:36.510" v="126" actId="2696"/>
+        <pc:sldMkLst>
+          <pc:docMk/>
+          <pc:sldMk cId="839834530" sldId="621"/>
+        </pc:sldMkLst>
+      </pc:sldChg>
+      <pc:sldChg chg="del">
+        <pc:chgData name="Mohammed Fasha" userId="cc64f42d-a1a6-4f08-b97b-0c37f877119f" providerId="ADAL" clId="{FEC9C214-E726-4192-8176-A8C9AACEB478}" dt="2025-05-16T05:43:36.510" v="126" actId="2696"/>
+        <pc:sldMkLst>
+          <pc:docMk/>
+          <pc:sldMk cId="3734309461" sldId="625"/>
+        </pc:sldMkLst>
+      </pc:sldChg>
+      <pc:sldChg chg="del">
+        <pc:chgData name="Mohammed Fasha" userId="cc64f42d-a1a6-4f08-b97b-0c37f877119f" providerId="ADAL" clId="{FEC9C214-E726-4192-8176-A8C9AACEB478}" dt="2025-05-16T05:43:36.510" v="126" actId="2696"/>
+        <pc:sldMkLst>
+          <pc:docMk/>
+          <pc:sldMk cId="4269580935" sldId="634"/>
+        </pc:sldMkLst>
+      </pc:sldChg>
+      <pc:sldChg chg="del">
+        <pc:chgData name="Mohammed Fasha" userId="cc64f42d-a1a6-4f08-b97b-0c37f877119f" providerId="ADAL" clId="{FEC9C214-E726-4192-8176-A8C9AACEB478}" dt="2025-05-16T05:43:36.510" v="126" actId="2696"/>
+        <pc:sldMkLst>
+          <pc:docMk/>
+          <pc:sldMk cId="2838240985" sldId="635"/>
+        </pc:sldMkLst>
+      </pc:sldChg>
+      <pc:sldChg chg="del">
+        <pc:chgData name="Mohammed Fasha" userId="cc64f42d-a1a6-4f08-b97b-0c37f877119f" providerId="ADAL" clId="{FEC9C214-E726-4192-8176-A8C9AACEB478}" dt="2025-05-16T05:43:36.510" v="126" actId="2696"/>
+        <pc:sldMkLst>
+          <pc:docMk/>
+          <pc:sldMk cId="1675291572" sldId="638"/>
+        </pc:sldMkLst>
+      </pc:sldChg>
+      <pc:sldChg chg="modSp del">
+        <pc:chgData name="Mohammed Fasha" userId="cc64f42d-a1a6-4f08-b97b-0c37f877119f" providerId="ADAL" clId="{FEC9C214-E726-4192-8176-A8C9AACEB478}" dt="2025-05-16T05:43:36.510" v="126" actId="2696"/>
+        <pc:sldMkLst>
+          <pc:docMk/>
+          <pc:sldMk cId="2145145303" sldId="640"/>
+        </pc:sldMkLst>
+      </pc:sldChg>
+      <pc:sldChg chg="del">
+        <pc:chgData name="Mohammed Fasha" userId="cc64f42d-a1a6-4f08-b97b-0c37f877119f" providerId="ADAL" clId="{FEC9C214-E726-4192-8176-A8C9AACEB478}" dt="2025-05-16T05:43:36.510" v="126" actId="2696"/>
+        <pc:sldMkLst>
+          <pc:docMk/>
+          <pc:sldMk cId="1135291414" sldId="643"/>
+        </pc:sldMkLst>
+      </pc:sldChg>
+      <pc:sldChg chg="del">
+        <pc:chgData name="Mohammed Fasha" userId="cc64f42d-a1a6-4f08-b97b-0c37f877119f" providerId="ADAL" clId="{FEC9C214-E726-4192-8176-A8C9AACEB478}" dt="2025-05-16T05:43:36.510" v="126" actId="2696"/>
+        <pc:sldMkLst>
+          <pc:docMk/>
+          <pc:sldMk cId="1030124935" sldId="644"/>
+        </pc:sldMkLst>
+      </pc:sldChg>
+      <pc:sldChg chg="del">
+        <pc:chgData name="Mohammed Fasha" userId="cc64f42d-a1a6-4f08-b97b-0c37f877119f" providerId="ADAL" clId="{FEC9C214-E726-4192-8176-A8C9AACEB478}" dt="2025-05-16T05:43:36.510" v="126" actId="2696"/>
+        <pc:sldMkLst>
+          <pc:docMk/>
+          <pc:sldMk cId="2168644593" sldId="645"/>
+        </pc:sldMkLst>
+      </pc:sldChg>
+      <pc:sldChg chg="del">
+        <pc:chgData name="Mohammed Fasha" userId="cc64f42d-a1a6-4f08-b97b-0c37f877119f" providerId="ADAL" clId="{FEC9C214-E726-4192-8176-A8C9AACEB478}" dt="2025-05-16T05:43:36.510" v="126" actId="2696"/>
+        <pc:sldMkLst>
+          <pc:docMk/>
+          <pc:sldMk cId="2743226386" sldId="646"/>
+        </pc:sldMkLst>
+      </pc:sldChg>
+      <pc:sldChg chg="del">
+        <pc:chgData name="Mohammed Fasha" userId="cc64f42d-a1a6-4f08-b97b-0c37f877119f" providerId="ADAL" clId="{FEC9C214-E726-4192-8176-A8C9AACEB478}" dt="2025-05-16T05:43:36.510" v="126" actId="2696"/>
+        <pc:sldMkLst>
+          <pc:docMk/>
+          <pc:sldMk cId="202107314" sldId="647"/>
+        </pc:sldMkLst>
+      </pc:sldChg>
+      <pc:sldChg chg="del">
+        <pc:chgData name="Mohammed Fasha" userId="cc64f42d-a1a6-4f08-b97b-0c37f877119f" providerId="ADAL" clId="{FEC9C214-E726-4192-8176-A8C9AACEB478}" dt="2025-05-16T05:43:36.510" v="126" actId="2696"/>
+        <pc:sldMkLst>
+          <pc:docMk/>
+          <pc:sldMk cId="662689605" sldId="649"/>
+        </pc:sldMkLst>
+      </pc:sldChg>
+      <pc:sldChg chg="del">
+        <pc:chgData name="Mohammed Fasha" userId="cc64f42d-a1a6-4f08-b97b-0c37f877119f" providerId="ADAL" clId="{FEC9C214-E726-4192-8176-A8C9AACEB478}" dt="2025-05-16T05:43:36.510" v="126" actId="2696"/>
+        <pc:sldMkLst>
+          <pc:docMk/>
+          <pc:sldMk cId="3942060319" sldId="650"/>
+        </pc:sldMkLst>
+      </pc:sldChg>
+      <pc:sldChg chg="del">
+        <pc:chgData name="Mohammed Fasha" userId="cc64f42d-a1a6-4f08-b97b-0c37f877119f" providerId="ADAL" clId="{FEC9C214-E726-4192-8176-A8C9AACEB478}" dt="2025-05-16T05:43:36.510" v="126" actId="2696"/>
+        <pc:sldMkLst>
+          <pc:docMk/>
+          <pc:sldMk cId="916802035" sldId="651"/>
+        </pc:sldMkLst>
+      </pc:sldChg>
+      <pc:sldChg chg="del">
+        <pc:chgData name="Mohammed Fasha" userId="cc64f42d-a1a6-4f08-b97b-0c37f877119f" providerId="ADAL" clId="{FEC9C214-E726-4192-8176-A8C9AACEB478}" dt="2025-05-16T05:43:36.510" v="126" actId="2696"/>
+        <pc:sldMkLst>
+          <pc:docMk/>
+          <pc:sldMk cId="3061130053" sldId="653"/>
+        </pc:sldMkLst>
+      </pc:sldChg>
+      <pc:sldChg chg="del">
+        <pc:chgData name="Mohammed Fasha" userId="cc64f42d-a1a6-4f08-b97b-0c37f877119f" providerId="ADAL" clId="{FEC9C214-E726-4192-8176-A8C9AACEB478}" dt="2025-05-16T05:43:36.510" v="126" actId="2696"/>
+        <pc:sldMkLst>
+          <pc:docMk/>
+          <pc:sldMk cId="3585687456" sldId="654"/>
+        </pc:sldMkLst>
+      </pc:sldChg>
+      <pc:sldChg chg="del">
+        <pc:chgData name="Mohammed Fasha" userId="cc64f42d-a1a6-4f08-b97b-0c37f877119f" providerId="ADAL" clId="{FEC9C214-E726-4192-8176-A8C9AACEB478}" dt="2025-05-16T05:43:36.510" v="126" actId="2696"/>
+        <pc:sldMkLst>
+          <pc:docMk/>
+          <pc:sldMk cId="2892622100" sldId="655"/>
+        </pc:sldMkLst>
+      </pc:sldChg>
+      <pc:sldChg chg="modSp del mod">
+        <pc:chgData name="Mohammed Fasha" userId="cc64f42d-a1a6-4f08-b97b-0c37f877119f" providerId="ADAL" clId="{FEC9C214-E726-4192-8176-A8C9AACEB478}" dt="2025-05-16T05:43:36.510" v="126" actId="2696"/>
+        <pc:sldMkLst>
+          <pc:docMk/>
+          <pc:sldMk cId="555764928" sldId="657"/>
+        </pc:sldMkLst>
+      </pc:sldChg>
+      <pc:sldChg chg="del">
+        <pc:chgData name="Mohammed Fasha" userId="cc64f42d-a1a6-4f08-b97b-0c37f877119f" providerId="ADAL" clId="{FEC9C214-E726-4192-8176-A8C9AACEB478}" dt="2025-05-16T05:43:36.510" v="126" actId="2696"/>
+        <pc:sldMkLst>
+          <pc:docMk/>
+          <pc:sldMk cId="1461426122" sldId="658"/>
+        </pc:sldMkLst>
+      </pc:sldChg>
+      <pc:sldChg chg="del">
+        <pc:chgData name="Mohammed Fasha" userId="cc64f42d-a1a6-4f08-b97b-0c37f877119f" providerId="ADAL" clId="{FEC9C214-E726-4192-8176-A8C9AACEB478}" dt="2025-05-16T05:43:36.510" v="126" actId="2696"/>
+        <pc:sldMkLst>
+          <pc:docMk/>
+          <pc:sldMk cId="2990045589" sldId="659"/>
+        </pc:sldMkLst>
+      </pc:sldChg>
+      <pc:sldChg chg="del">
+        <pc:chgData name="Mohammed Fasha" userId="cc64f42d-a1a6-4f08-b97b-0c37f877119f" providerId="ADAL" clId="{FEC9C214-E726-4192-8176-A8C9AACEB478}" dt="2025-05-16T05:43:36.510" v="126" actId="2696"/>
+        <pc:sldMkLst>
+          <pc:docMk/>
+          <pc:sldMk cId="2575039538" sldId="660"/>
+        </pc:sldMkLst>
+      </pc:sldChg>
+      <pc:sldChg chg="del">
+        <pc:chgData name="Mohammed Fasha" userId="cc64f42d-a1a6-4f08-b97b-0c37f877119f" providerId="ADAL" clId="{FEC9C214-E726-4192-8176-A8C9AACEB478}" dt="2025-05-16T05:43:36.510" v="126" actId="2696"/>
+        <pc:sldMkLst>
+          <pc:docMk/>
+          <pc:sldMk cId="1554491934" sldId="661"/>
+        </pc:sldMkLst>
+      </pc:sldChg>
+      <pc:sldChg chg="del">
+        <pc:chgData name="Mohammed Fasha" userId="cc64f42d-a1a6-4f08-b97b-0c37f877119f" providerId="ADAL" clId="{FEC9C214-E726-4192-8176-A8C9AACEB478}" dt="2025-05-16T05:43:36.510" v="126" actId="2696"/>
+        <pc:sldMkLst>
+          <pc:docMk/>
+          <pc:sldMk cId="691538069" sldId="662"/>
+        </pc:sldMkLst>
+      </pc:sldChg>
+      <pc:sldChg chg="del">
+        <pc:chgData name="Mohammed Fasha" userId="cc64f42d-a1a6-4f08-b97b-0c37f877119f" providerId="ADAL" clId="{FEC9C214-E726-4192-8176-A8C9AACEB478}" dt="2025-05-16T05:43:36.510" v="126" actId="2696"/>
+        <pc:sldMkLst>
+          <pc:docMk/>
+          <pc:sldMk cId="3980180774" sldId="663"/>
+        </pc:sldMkLst>
+      </pc:sldChg>
+      <pc:sldChg chg="del">
+        <pc:chgData name="Mohammed Fasha" userId="cc64f42d-a1a6-4f08-b97b-0c37f877119f" providerId="ADAL" clId="{FEC9C214-E726-4192-8176-A8C9AACEB478}" dt="2025-05-16T05:43:36.510" v="126" actId="2696"/>
+        <pc:sldMkLst>
+          <pc:docMk/>
+          <pc:sldMk cId="1728680596" sldId="664"/>
+        </pc:sldMkLst>
+      </pc:sldChg>
+      <pc:sldChg chg="del">
+        <pc:chgData name="Mohammed Fasha" userId="cc64f42d-a1a6-4f08-b97b-0c37f877119f" providerId="ADAL" clId="{FEC9C214-E726-4192-8176-A8C9AACEB478}" dt="2025-05-16T05:43:36.510" v="126" actId="2696"/>
+        <pc:sldMkLst>
+          <pc:docMk/>
+          <pc:sldMk cId="148099094" sldId="665"/>
+        </pc:sldMkLst>
+      </pc:sldChg>
+      <pc:sldChg chg="del">
+        <pc:chgData name="Mohammed Fasha" userId="cc64f42d-a1a6-4f08-b97b-0c37f877119f" providerId="ADAL" clId="{FEC9C214-E726-4192-8176-A8C9AACEB478}" dt="2025-05-16T05:43:36.510" v="126" actId="2696"/>
+        <pc:sldMkLst>
+          <pc:docMk/>
+          <pc:sldMk cId="898885298" sldId="667"/>
+        </pc:sldMkLst>
+      </pc:sldChg>
+      <pc:sldChg chg="del">
+        <pc:chgData name="Mohammed Fasha" userId="cc64f42d-a1a6-4f08-b97b-0c37f877119f" providerId="ADAL" clId="{FEC9C214-E726-4192-8176-A8C9AACEB478}" dt="2025-05-16T05:43:36.510" v="126" actId="2696"/>
+        <pc:sldMkLst>
+          <pc:docMk/>
+          <pc:sldMk cId="2652660250" sldId="668"/>
+        </pc:sldMkLst>
+      </pc:sldChg>
+      <pc:sldChg chg="del">
+        <pc:chgData name="Mohammed Fasha" userId="cc64f42d-a1a6-4f08-b97b-0c37f877119f" providerId="ADAL" clId="{FEC9C214-E726-4192-8176-A8C9AACEB478}" dt="2025-05-16T05:43:36.510" v="126" actId="2696"/>
+        <pc:sldMkLst>
+          <pc:docMk/>
+          <pc:sldMk cId="2680231355" sldId="669"/>
+        </pc:sldMkLst>
+      </pc:sldChg>
+      <pc:sldChg chg="modSp del mod">
+        <pc:chgData name="Mohammed Fasha" userId="cc64f42d-a1a6-4f08-b97b-0c37f877119f" providerId="ADAL" clId="{FEC9C214-E726-4192-8176-A8C9AACEB478}" dt="2025-05-16T05:43:36.510" v="126" actId="2696"/>
+        <pc:sldMkLst>
+          <pc:docMk/>
+          <pc:sldMk cId="1960150938" sldId="670"/>
+        </pc:sldMkLst>
+      </pc:sldChg>
+      <pc:sldChg chg="del">
+        <pc:chgData name="Mohammed Fasha" userId="cc64f42d-a1a6-4f08-b97b-0c37f877119f" providerId="ADAL" clId="{FEC9C214-E726-4192-8176-A8C9AACEB478}" dt="2025-05-16T05:43:36.510" v="126" actId="2696"/>
+        <pc:sldMkLst>
+          <pc:docMk/>
+          <pc:sldMk cId="3605011436" sldId="671"/>
+        </pc:sldMkLst>
+      </pc:sldChg>
+      <pc:sldChg chg="del">
+        <pc:chgData name="Mohammed Fasha" userId="cc64f42d-a1a6-4f08-b97b-0c37f877119f" providerId="ADAL" clId="{FEC9C214-E726-4192-8176-A8C9AACEB478}" dt="2025-05-16T05:43:36.510" v="126" actId="2696"/>
+        <pc:sldMkLst>
+          <pc:docMk/>
+          <pc:sldMk cId="1620993364" sldId="672"/>
+        </pc:sldMkLst>
+      </pc:sldChg>
+      <pc:sldChg chg="del">
+        <pc:chgData name="Mohammed Fasha" userId="cc64f42d-a1a6-4f08-b97b-0c37f877119f" providerId="ADAL" clId="{FEC9C214-E726-4192-8176-A8C9AACEB478}" dt="2025-05-16T05:43:36.510" v="126" actId="2696"/>
+        <pc:sldMkLst>
+          <pc:docMk/>
+          <pc:sldMk cId="2865119215" sldId="674"/>
+        </pc:sldMkLst>
+      </pc:sldChg>
+      <pc:sldChg chg="del">
+        <pc:chgData name="Mohammed Fasha" userId="cc64f42d-a1a6-4f08-b97b-0c37f877119f" providerId="ADAL" clId="{FEC9C214-E726-4192-8176-A8C9AACEB478}" dt="2025-05-16T05:43:36.510" v="126" actId="2696"/>
+        <pc:sldMkLst>
+          <pc:docMk/>
+          <pc:sldMk cId="2170303756" sldId="675"/>
+        </pc:sldMkLst>
+      </pc:sldChg>
+      <pc:sldChg chg="del">
+        <pc:chgData name="Mohammed Fasha" userId="cc64f42d-a1a6-4f08-b97b-0c37f877119f" providerId="ADAL" clId="{FEC9C214-E726-4192-8176-A8C9AACEB478}" dt="2025-05-16T05:43:36.510" v="126" actId="2696"/>
+        <pc:sldMkLst>
+          <pc:docMk/>
+          <pc:sldMk cId="1577854815" sldId="676"/>
+        </pc:sldMkLst>
+      </pc:sldChg>
+      <pc:sldChg chg="del">
+        <pc:chgData name="Mohammed Fasha" userId="cc64f42d-a1a6-4f08-b97b-0c37f877119f" providerId="ADAL" clId="{FEC9C214-E726-4192-8176-A8C9AACEB478}" dt="2025-05-16T05:43:36.510" v="126" actId="2696"/>
+        <pc:sldMkLst>
+          <pc:docMk/>
+          <pc:sldMk cId="139882925" sldId="677"/>
+        </pc:sldMkLst>
+      </pc:sldChg>
+      <pc:sldChg chg="del">
+        <pc:chgData name="Mohammed Fasha" userId="cc64f42d-a1a6-4f08-b97b-0c37f877119f" providerId="ADAL" clId="{FEC9C214-E726-4192-8176-A8C9AACEB478}" dt="2025-05-16T05:43:36.510" v="126" actId="2696"/>
+        <pc:sldMkLst>
+          <pc:docMk/>
+          <pc:sldMk cId="4146654093" sldId="678"/>
+        </pc:sldMkLst>
+      </pc:sldChg>
+      <pc:sldChg chg="del">
+        <pc:chgData name="Mohammed Fasha" userId="cc64f42d-a1a6-4f08-b97b-0c37f877119f" providerId="ADAL" clId="{FEC9C214-E726-4192-8176-A8C9AACEB478}" dt="2025-05-16T05:43:36.510" v="126" actId="2696"/>
+        <pc:sldMkLst>
+          <pc:docMk/>
+          <pc:sldMk cId="3454522070" sldId="679"/>
+        </pc:sldMkLst>
+      </pc:sldChg>
+      <pc:sldChg chg="del">
+        <pc:chgData name="Mohammed Fasha" userId="cc64f42d-a1a6-4f08-b97b-0c37f877119f" providerId="ADAL" clId="{FEC9C214-E726-4192-8176-A8C9AACEB478}" dt="2025-05-16T05:43:36.510" v="126" actId="2696"/>
+        <pc:sldMkLst>
+          <pc:docMk/>
+          <pc:sldMk cId="2856814121" sldId="681"/>
+        </pc:sldMkLst>
+      </pc:sldChg>
+      <pc:sldChg chg="del">
+        <pc:chgData name="Mohammed Fasha" userId="cc64f42d-a1a6-4f08-b97b-0c37f877119f" providerId="ADAL" clId="{FEC9C214-E726-4192-8176-A8C9AACEB478}" dt="2025-05-16T05:43:36.510" v="126" actId="2696"/>
+        <pc:sldMkLst>
+          <pc:docMk/>
+          <pc:sldMk cId="1377124484" sldId="682"/>
+        </pc:sldMkLst>
+      </pc:sldChg>
+      <pc:sldChg chg="del">
+        <pc:chgData name="Mohammed Fasha" userId="cc64f42d-a1a6-4f08-b97b-0c37f877119f" providerId="ADAL" clId="{FEC9C214-E726-4192-8176-A8C9AACEB478}" dt="2025-05-16T05:43:36.510" v="126" actId="2696"/>
+        <pc:sldMkLst>
+          <pc:docMk/>
+          <pc:sldMk cId="2630096202" sldId="683"/>
+        </pc:sldMkLst>
+      </pc:sldChg>
+      <pc:sldChg chg="del">
+        <pc:chgData name="Mohammed Fasha" userId="cc64f42d-a1a6-4f08-b97b-0c37f877119f" providerId="ADAL" clId="{FEC9C214-E726-4192-8176-A8C9AACEB478}" dt="2025-05-16T05:43:36.510" v="126" actId="2696"/>
+        <pc:sldMkLst>
+          <pc:docMk/>
+          <pc:sldMk cId="3328652623" sldId="684"/>
+        </pc:sldMkLst>
+      </pc:sldChg>
+      <pc:sldChg chg="del">
+        <pc:chgData name="Mohammed Fasha" userId="cc64f42d-a1a6-4f08-b97b-0c37f877119f" providerId="ADAL" clId="{FEC9C214-E726-4192-8176-A8C9AACEB478}" dt="2025-05-16T05:43:36.510" v="126" actId="2696"/>
+        <pc:sldMkLst>
+          <pc:docMk/>
+          <pc:sldMk cId="916102856" sldId="685"/>
+        </pc:sldMkLst>
+      </pc:sldChg>
+      <pc:sldChg chg="del">
+        <pc:chgData name="Mohammed Fasha" userId="cc64f42d-a1a6-4f08-b97b-0c37f877119f" providerId="ADAL" clId="{FEC9C214-E726-4192-8176-A8C9AACEB478}" dt="2025-05-16T05:43:36.510" v="126" actId="2696"/>
+        <pc:sldMkLst>
+          <pc:docMk/>
+          <pc:sldMk cId="2620697854" sldId="686"/>
+        </pc:sldMkLst>
+      </pc:sldChg>
+      <pc:sldChg chg="del">
+        <pc:chgData name="Mohammed Fasha" userId="cc64f42d-a1a6-4f08-b97b-0c37f877119f" providerId="ADAL" clId="{FEC9C214-E726-4192-8176-A8C9AACEB478}" dt="2025-05-16T05:43:36.510" v="126" actId="2696"/>
+        <pc:sldMkLst>
+          <pc:docMk/>
+          <pc:sldMk cId="140683555" sldId="687"/>
+        </pc:sldMkLst>
+      </pc:sldChg>
+      <pc:sldChg chg="del">
+        <pc:chgData name="Mohammed Fasha" userId="cc64f42d-a1a6-4f08-b97b-0c37f877119f" providerId="ADAL" clId="{FEC9C214-E726-4192-8176-A8C9AACEB478}" dt="2025-05-16T05:43:36.510" v="126" actId="2696"/>
+        <pc:sldMkLst>
+          <pc:docMk/>
+          <pc:sldMk cId="1788308240" sldId="688"/>
+        </pc:sldMkLst>
+      </pc:sldChg>
+      <pc:sldChg chg="del">
+        <pc:chgData name="Mohammed Fasha" userId="cc64f42d-a1a6-4f08-b97b-0c37f877119f" providerId="ADAL" clId="{FEC9C214-E726-4192-8176-A8C9AACEB478}" dt="2025-05-16T05:43:36.510" v="126" actId="2696"/>
+        <pc:sldMkLst>
+          <pc:docMk/>
+          <pc:sldMk cId="1660737293" sldId="689"/>
+        </pc:sldMkLst>
+      </pc:sldChg>
+      <pc:sldChg chg="del">
+        <pc:chgData name="Mohammed Fasha" userId="cc64f42d-a1a6-4f08-b97b-0c37f877119f" providerId="ADAL" clId="{FEC9C214-E726-4192-8176-A8C9AACEB478}" dt="2025-05-16T05:43:36.510" v="126" actId="2696"/>
+        <pc:sldMkLst>
+          <pc:docMk/>
+          <pc:sldMk cId="1987101698" sldId="690"/>
+        </pc:sldMkLst>
+      </pc:sldChg>
+      <pc:sldChg chg="del">
+        <pc:chgData name="Mohammed Fasha" userId="cc64f42d-a1a6-4f08-b97b-0c37f877119f" providerId="ADAL" clId="{FEC9C214-E726-4192-8176-A8C9AACEB478}" dt="2025-05-16T05:43:36.510" v="126" actId="2696"/>
+        <pc:sldMkLst>
+          <pc:docMk/>
+          <pc:sldMk cId="1982708772" sldId="692"/>
+        </pc:sldMkLst>
+      </pc:sldChg>
+      <pc:sldChg chg="del">
+        <pc:chgData name="Mohammed Fasha" userId="cc64f42d-a1a6-4f08-b97b-0c37f877119f" providerId="ADAL" clId="{FEC9C214-E726-4192-8176-A8C9AACEB478}" dt="2025-05-16T05:43:36.510" v="126" actId="2696"/>
+        <pc:sldMkLst>
+          <pc:docMk/>
+          <pc:sldMk cId="3424197979" sldId="694"/>
+        </pc:sldMkLst>
+      </pc:sldChg>
+      <pc:sldChg chg="del">
+        <pc:chgData name="Mohammed Fasha" userId="cc64f42d-a1a6-4f08-b97b-0c37f877119f" providerId="ADAL" clId="{FEC9C214-E726-4192-8176-A8C9AACEB478}" dt="2025-05-16T05:43:36.510" v="126" actId="2696"/>
+        <pc:sldMkLst>
+          <pc:docMk/>
+          <pc:sldMk cId="1697141369" sldId="695"/>
+        </pc:sldMkLst>
+      </pc:sldChg>
+      <pc:sldChg chg="del">
+        <pc:chgData name="Mohammed Fasha" userId="cc64f42d-a1a6-4f08-b97b-0c37f877119f" providerId="ADAL" clId="{FEC9C214-E726-4192-8176-A8C9AACEB478}" dt="2025-05-16T05:43:36.510" v="126" actId="2696"/>
+        <pc:sldMkLst>
+          <pc:docMk/>
+          <pc:sldMk cId="1317643237" sldId="696"/>
+        </pc:sldMkLst>
+      </pc:sldChg>
+      <pc:sldChg chg="del">
+        <pc:chgData name="Mohammed Fasha" userId="cc64f42d-a1a6-4f08-b97b-0c37f877119f" providerId="ADAL" clId="{FEC9C214-E726-4192-8176-A8C9AACEB478}" dt="2025-05-16T05:43:36.510" v="126" actId="2696"/>
+        <pc:sldMkLst>
+          <pc:docMk/>
+          <pc:sldMk cId="265576630" sldId="698"/>
+        </pc:sldMkLst>
+      </pc:sldChg>
+      <pc:sldChg chg="del">
+        <pc:chgData name="Mohammed Fasha" userId="cc64f42d-a1a6-4f08-b97b-0c37f877119f" providerId="ADAL" clId="{FEC9C214-E726-4192-8176-A8C9AACEB478}" dt="2025-05-16T05:43:36.510" v="126" actId="2696"/>
+        <pc:sldMkLst>
+          <pc:docMk/>
+          <pc:sldMk cId="4247717824" sldId="700"/>
+        </pc:sldMkLst>
+      </pc:sldChg>
+      <pc:sldChg chg="del">
+        <pc:chgData name="Mohammed Fasha" userId="cc64f42d-a1a6-4f08-b97b-0c37f877119f" providerId="ADAL" clId="{FEC9C214-E726-4192-8176-A8C9AACEB478}" dt="2025-05-16T05:43:36.510" v="126" actId="2696"/>
+        <pc:sldMkLst>
+          <pc:docMk/>
+          <pc:sldMk cId="3085160177" sldId="704"/>
+        </pc:sldMkLst>
+      </pc:sldChg>
+      <pc:sldChg chg="del">
+        <pc:chgData name="Mohammed Fasha" userId="cc64f42d-a1a6-4f08-b97b-0c37f877119f" providerId="ADAL" clId="{FEC9C214-E726-4192-8176-A8C9AACEB478}" dt="2025-05-16T05:43:36.510" v="126" actId="2696"/>
+        <pc:sldMkLst>
+          <pc:docMk/>
+          <pc:sldMk cId="1862107672" sldId="705"/>
+        </pc:sldMkLst>
+      </pc:sldChg>
+      <pc:sldChg chg="modSp del mod">
+        <pc:chgData name="Mohammed Fasha" userId="cc64f42d-a1a6-4f08-b97b-0c37f877119f" providerId="ADAL" clId="{FEC9C214-E726-4192-8176-A8C9AACEB478}" dt="2025-05-16T05:43:36.510" v="126" actId="2696"/>
+        <pc:sldMkLst>
+          <pc:docMk/>
+          <pc:sldMk cId="1142780366" sldId="706"/>
+        </pc:sldMkLst>
+      </pc:sldChg>
+      <pc:sldChg chg="del">
+        <pc:chgData name="Mohammed Fasha" userId="cc64f42d-a1a6-4f08-b97b-0c37f877119f" providerId="ADAL" clId="{FEC9C214-E726-4192-8176-A8C9AACEB478}" dt="2025-05-16T05:43:36.510" v="126" actId="2696"/>
+        <pc:sldMkLst>
+          <pc:docMk/>
+          <pc:sldMk cId="67871309" sldId="709"/>
+        </pc:sldMkLst>
+      </pc:sldChg>
+      <pc:sldChg chg="del">
+        <pc:chgData name="Mohammed Fasha" userId="cc64f42d-a1a6-4f08-b97b-0c37f877119f" providerId="ADAL" clId="{FEC9C214-E726-4192-8176-A8C9AACEB478}" dt="2025-05-16T05:43:36.510" v="126" actId="2696"/>
+        <pc:sldMkLst>
+          <pc:docMk/>
+          <pc:sldMk cId="4114896152" sldId="710"/>
+        </pc:sldMkLst>
+      </pc:sldChg>
+      <pc:sldChg chg="del">
+        <pc:chgData name="Mohammed Fasha" userId="cc64f42d-a1a6-4f08-b97b-0c37f877119f" providerId="ADAL" clId="{FEC9C214-E726-4192-8176-A8C9AACEB478}" dt="2025-05-16T05:43:36.510" v="126" actId="2696"/>
+        <pc:sldMkLst>
+          <pc:docMk/>
+          <pc:sldMk cId="3794385322" sldId="711"/>
+        </pc:sldMkLst>
+      </pc:sldChg>
+      <pc:sldChg chg="del">
+        <pc:chgData name="Mohammed Fasha" userId="cc64f42d-a1a6-4f08-b97b-0c37f877119f" providerId="ADAL" clId="{FEC9C214-E726-4192-8176-A8C9AACEB478}" dt="2025-05-16T05:43:36.510" v="126" actId="2696"/>
+        <pc:sldMkLst>
+          <pc:docMk/>
+          <pc:sldMk cId="3701206727" sldId="712"/>
+        </pc:sldMkLst>
+      </pc:sldChg>
+      <pc:sldChg chg="del">
+        <pc:chgData name="Mohammed Fasha" userId="cc64f42d-a1a6-4f08-b97b-0c37f877119f" providerId="ADAL" clId="{FEC9C214-E726-4192-8176-A8C9AACEB478}" dt="2025-05-16T05:43:36.510" v="126" actId="2696"/>
+        <pc:sldMkLst>
+          <pc:docMk/>
+          <pc:sldMk cId="1499972066" sldId="713"/>
+        </pc:sldMkLst>
+      </pc:sldChg>
+      <pc:sldChg chg="del">
+        <pc:chgData name="Mohammed Fasha" userId="cc64f42d-a1a6-4f08-b97b-0c37f877119f" providerId="ADAL" clId="{FEC9C214-E726-4192-8176-A8C9AACEB478}" dt="2025-05-16T05:43:36.510" v="126" actId="2696"/>
+        <pc:sldMkLst>
+          <pc:docMk/>
+          <pc:sldMk cId="1270641495" sldId="714"/>
+        </pc:sldMkLst>
+      </pc:sldChg>
+      <pc:sldChg chg="modSp del mod">
+        <pc:chgData name="Mohammed Fasha" userId="cc64f42d-a1a6-4f08-b97b-0c37f877119f" providerId="ADAL" clId="{FEC9C214-E726-4192-8176-A8C9AACEB478}" dt="2025-05-16T05:43:36.510" v="126" actId="2696"/>
+        <pc:sldMkLst>
+          <pc:docMk/>
+          <pc:sldMk cId="1096386322" sldId="715"/>
+        </pc:sldMkLst>
+      </pc:sldChg>
+      <pc:sldChg chg="modSp del mod">
+        <pc:chgData name="Mohammed Fasha" userId="cc64f42d-a1a6-4f08-b97b-0c37f877119f" providerId="ADAL" clId="{FEC9C214-E726-4192-8176-A8C9AACEB478}" dt="2025-05-16T05:43:36.510" v="126" actId="2696"/>
+        <pc:sldMkLst>
+          <pc:docMk/>
+          <pc:sldMk cId="1784058309" sldId="716"/>
+        </pc:sldMkLst>
+      </pc:sldChg>
+      <pc:sldChg chg="modSp del mod">
+        <pc:chgData name="Mohammed Fasha" userId="cc64f42d-a1a6-4f08-b97b-0c37f877119f" providerId="ADAL" clId="{FEC9C214-E726-4192-8176-A8C9AACEB478}" dt="2025-05-16T05:43:36.510" v="126" actId="2696"/>
+        <pc:sldMkLst>
+          <pc:docMk/>
+          <pc:sldMk cId="3139017106" sldId="717"/>
+        </pc:sldMkLst>
+      </pc:sldChg>
+      <pc:sldChg chg="del">
+        <pc:chgData name="Mohammed Fasha" userId="cc64f42d-a1a6-4f08-b97b-0c37f877119f" providerId="ADAL" clId="{FEC9C214-E726-4192-8176-A8C9AACEB478}" dt="2025-05-16T05:43:36.510" v="126" actId="2696"/>
+        <pc:sldMkLst>
+          <pc:docMk/>
+          <pc:sldMk cId="3043812923" sldId="718"/>
+        </pc:sldMkLst>
+      </pc:sldChg>
+      <pc:sldChg chg="modSp del mod">
+        <pc:chgData name="Mohammed Fasha" userId="cc64f42d-a1a6-4f08-b97b-0c37f877119f" providerId="ADAL" clId="{FEC9C214-E726-4192-8176-A8C9AACEB478}" dt="2025-05-12T03:04:56.963" v="45" actId="2696"/>
+        <pc:sldMkLst>
+          <pc:docMk/>
+          <pc:sldMk cId="666527140" sldId="725"/>
+        </pc:sldMkLst>
+      </pc:sldChg>
+      <pc:sldChg chg="add del">
+        <pc:chgData name="Mohammed Fasha" userId="cc64f42d-a1a6-4f08-b97b-0c37f877119f" providerId="ADAL" clId="{FEC9C214-E726-4192-8176-A8C9AACEB478}" dt="2025-05-16T05:43:36.510" v="126" actId="2696"/>
+        <pc:sldMkLst>
+          <pc:docMk/>
+          <pc:sldMk cId="2280465272" sldId="725"/>
+        </pc:sldMkLst>
+      </pc:sldChg>
+      <pc:sldChg chg="del">
+        <pc:chgData name="Mohammed Fasha" userId="cc64f42d-a1a6-4f08-b97b-0c37f877119f" providerId="ADAL" clId="{FEC9C214-E726-4192-8176-A8C9AACEB478}" dt="2025-05-16T05:43:36.510" v="126" actId="2696"/>
+        <pc:sldMkLst>
+          <pc:docMk/>
+          <pc:sldMk cId="3660604927" sldId="726"/>
+        </pc:sldMkLst>
+      </pc:sldChg>
+      <pc:sldChg chg="del">
+        <pc:chgData name="Mohammed Fasha" userId="cc64f42d-a1a6-4f08-b97b-0c37f877119f" providerId="ADAL" clId="{FEC9C214-E726-4192-8176-A8C9AACEB478}" dt="2025-05-16T05:43:36.510" v="126" actId="2696"/>
+        <pc:sldMkLst>
+          <pc:docMk/>
+          <pc:sldMk cId="4051640529" sldId="728"/>
+        </pc:sldMkLst>
+      </pc:sldChg>
+      <pc:sldChg chg="modSp new del mod">
+        <pc:chgData name="Mohammed Fasha" userId="cc64f42d-a1a6-4f08-b97b-0c37f877119f" providerId="ADAL" clId="{FEC9C214-E726-4192-8176-A8C9AACEB478}" dt="2025-05-12T03:11:40.927" v="51" actId="47"/>
+        <pc:sldMkLst>
+          <pc:docMk/>
+          <pc:sldMk cId="1223704259" sldId="729"/>
+        </pc:sldMkLst>
+      </pc:sldChg>
+      <pc:sldChg chg="add del">
+        <pc:chgData name="Mohammed Fasha" userId="cc64f42d-a1a6-4f08-b97b-0c37f877119f" providerId="ADAL" clId="{FEC9C214-E726-4192-8176-A8C9AACEB478}" dt="2025-05-12T03:06:57.298" v="49"/>
+        <pc:sldMkLst>
+          <pc:docMk/>
+          <pc:sldMk cId="3927078588" sldId="730"/>
+        </pc:sldMkLst>
+      </pc:sldChg>
+    </pc:docChg>
+  </pc:docChgLst>
+  <pc:docChgLst>
+    <pc:chgData name="Mohammed Fasha" userId="cc64f42d-a1a6-4f08-b97b-0c37f877119f" providerId="ADAL" clId="{5980B3BB-4EB6-4E37-92BF-3A2A8F4B2C7A}"/>
+    <pc:docChg chg="custSel modSld">
+      <pc:chgData name="Mohammed Fasha" userId="cc64f42d-a1a6-4f08-b97b-0c37f877119f" providerId="ADAL" clId="{5980B3BB-4EB6-4E37-92BF-3A2A8F4B2C7A}" dt="2024-10-15T02:28:13.535" v="0" actId="478"/>
+      <pc:docMkLst>
+        <pc:docMk/>
+      </pc:docMkLst>
+      <pc:sldChg chg="delSp mod">
+        <pc:chgData name="Mohammed Fasha" userId="cc64f42d-a1a6-4f08-b97b-0c37f877119f" providerId="ADAL" clId="{5980B3BB-4EB6-4E37-92BF-3A2A8F4B2C7A}" dt="2024-10-15T02:28:13.535" v="0" actId="478"/>
+        <pc:sldMkLst>
+          <pc:docMk/>
+          <pc:sldMk cId="2297456757" sldId="483"/>
+        </pc:sldMkLst>
+      </pc:sldChg>
+    </pc:docChg>
+  </pc:docChgLst>
+  <pc:docChgLst>
+    <pc:chgData name="Mohammed Fasha" userId="cc64f42d-a1a6-4f08-b97b-0c37f877119f" providerId="ADAL" clId="{2E5FBF59-3168-4932-9518-582502FE1AD5}"/>
+    <pc:docChg chg="undo custSel delSld modSld">
+      <pc:chgData name="Mohammed Fasha" userId="cc64f42d-a1a6-4f08-b97b-0c37f877119f" providerId="ADAL" clId="{2E5FBF59-3168-4932-9518-582502FE1AD5}" dt="2024-12-24T08:08:19.987" v="550" actId="20577"/>
+      <pc:docMkLst>
+        <pc:docMk/>
+      </pc:docMkLst>
+      <pc:sldChg chg="delSp">
+        <pc:chgData name="Mohammed Fasha" userId="cc64f42d-a1a6-4f08-b97b-0c37f877119f" providerId="ADAL" clId="{2E5FBF59-3168-4932-9518-582502FE1AD5}" dt="2024-11-19T07:40:47.121" v="208" actId="478"/>
+        <pc:sldMkLst>
+          <pc:docMk/>
+          <pc:sldMk cId="391491219" sldId="428"/>
+        </pc:sldMkLst>
+      </pc:sldChg>
+      <pc:sldChg chg="modSp">
+        <pc:chgData name="Mohammed Fasha" userId="cc64f42d-a1a6-4f08-b97b-0c37f877119f" providerId="ADAL" clId="{2E5FBF59-3168-4932-9518-582502FE1AD5}" dt="2024-12-03T07:43:58.007" v="456" actId="1076"/>
+        <pc:sldMkLst>
+          <pc:docMk/>
+          <pc:sldMk cId="3339445507" sldId="430"/>
+        </pc:sldMkLst>
+      </pc:sldChg>
+      <pc:sldChg chg="modSp">
+        <pc:chgData name="Mohammed Fasha" userId="cc64f42d-a1a6-4f08-b97b-0c37f877119f" providerId="ADAL" clId="{2E5FBF59-3168-4932-9518-582502FE1AD5}" dt="2024-12-03T07:45:08.136" v="474" actId="20577"/>
+        <pc:sldMkLst>
+          <pc:docMk/>
+          <pc:sldMk cId="3389046835" sldId="431"/>
+        </pc:sldMkLst>
+      </pc:sldChg>
+      <pc:sldChg chg="modSp">
+        <pc:chgData name="Mohammed Fasha" userId="cc64f42d-a1a6-4f08-b97b-0c37f877119f" providerId="ADAL" clId="{2E5FBF59-3168-4932-9518-582502FE1AD5}" dt="2024-11-10T06:33:09.727" v="37" actId="207"/>
+        <pc:sldMkLst>
+          <pc:docMk/>
+          <pc:sldMk cId="2726994946" sldId="479"/>
+        </pc:sldMkLst>
+      </pc:sldChg>
+      <pc:sldChg chg="modSp">
+        <pc:chgData name="Mohammed Fasha" userId="cc64f42d-a1a6-4f08-b97b-0c37f877119f" providerId="ADAL" clId="{2E5FBF59-3168-4932-9518-582502FE1AD5}" dt="2024-11-19T07:44:28.766" v="211" actId="20577"/>
+        <pc:sldMkLst>
+          <pc:docMk/>
+          <pc:sldMk cId="2297456757" sldId="483"/>
+        </pc:sldMkLst>
+      </pc:sldChg>
+      <pc:sldChg chg="modSp">
+        <pc:chgData name="Mohammed Fasha" userId="cc64f42d-a1a6-4f08-b97b-0c37f877119f" providerId="ADAL" clId="{2E5FBF59-3168-4932-9518-582502FE1AD5}" dt="2024-11-10T06:45:09.392" v="40" actId="20577"/>
+        <pc:sldMkLst>
+          <pc:docMk/>
+          <pc:sldMk cId="3474268344" sldId="596"/>
+        </pc:sldMkLst>
+      </pc:sldChg>
+      <pc:sldChg chg="modSp">
+        <pc:chgData name="Mohammed Fasha" userId="cc64f42d-a1a6-4f08-b97b-0c37f877119f" providerId="ADAL" clId="{2E5FBF59-3168-4932-9518-582502FE1AD5}" dt="2024-12-03T07:47:21.561" v="476" actId="6549"/>
+        <pc:sldMkLst>
+          <pc:docMk/>
+          <pc:sldMk cId="399592497" sldId="613"/>
+        </pc:sldMkLst>
+      </pc:sldChg>
+      <pc:sldChg chg="modSp">
+        <pc:chgData name="Mohammed Fasha" userId="cc64f42d-a1a6-4f08-b97b-0c37f877119f" providerId="ADAL" clId="{2E5FBF59-3168-4932-9518-582502FE1AD5}" dt="2024-12-03T07:49:02.980" v="478" actId="207"/>
+        <pc:sldMkLst>
+          <pc:docMk/>
+          <pc:sldMk cId="3329135496" sldId="617"/>
+        </pc:sldMkLst>
+      </pc:sldChg>
+      <pc:sldChg chg="modSp">
+        <pc:chgData name="Mohammed Fasha" userId="cc64f42d-a1a6-4f08-b97b-0c37f877119f" providerId="ADAL" clId="{2E5FBF59-3168-4932-9518-582502FE1AD5}" dt="2024-12-24T08:05:16.608" v="482" actId="403"/>
+        <pc:sldMkLst>
+          <pc:docMk/>
+          <pc:sldMk cId="2990045589" sldId="659"/>
+        </pc:sldMkLst>
+      </pc:sldChg>
+      <pc:sldChg chg="modSp">
+        <pc:chgData name="Mohammed Fasha" userId="cc64f42d-a1a6-4f08-b97b-0c37f877119f" providerId="ADAL" clId="{2E5FBF59-3168-4932-9518-582502FE1AD5}" dt="2024-12-24T08:08:19.987" v="550" actId="20577"/>
+        <pc:sldMkLst>
+          <pc:docMk/>
+          <pc:sldMk cId="2680231355" sldId="669"/>
+        </pc:sldMkLst>
+      </pc:sldChg>
+      <pc:sldChg chg="addSp modSp">
+        <pc:chgData name="Mohammed Fasha" userId="cc64f42d-a1a6-4f08-b97b-0c37f877119f" providerId="ADAL" clId="{2E5FBF59-3168-4932-9518-582502FE1AD5}" dt="2024-12-24T08:05:52.910" v="488" actId="1076"/>
+        <pc:sldMkLst>
+          <pc:docMk/>
+          <pc:sldMk cId="916102856" sldId="685"/>
+        </pc:sldMkLst>
+      </pc:sldChg>
+      <pc:sldChg chg="modSp">
+        <pc:chgData name="Mohammed Fasha" userId="cc64f42d-a1a6-4f08-b97b-0c37f877119f" providerId="ADAL" clId="{2E5FBF59-3168-4932-9518-582502FE1AD5}" dt="2024-11-19T07:03:29.557" v="206" actId="207"/>
+        <pc:sldMkLst>
+          <pc:docMk/>
+          <pc:sldMk cId="32004852" sldId="708"/>
         </pc:sldMkLst>
       </pc:sldChg>
     </pc:docChg>
@@ -325,6 +1653,14 @@
             <ac:spMk id="3" creationId="{E2B5208B-AF09-6A8E-7623-44834ADB7FB6}"/>
           </ac:spMkLst>
         </pc:spChg>
+        <pc:spChg chg="add">
+          <ac:chgData name="Mohammed Fasha" userId="cc64f42d-a1a6-4f08-b97b-0c37f877119f" providerId="ADAL" clId="{7E2E8029-2718-4E74-A1E0-5ED48AB79672}" dt="2025-06-07T08:27:07.149" v="3389"/>
+          <ac:spMkLst>
+            <pc:docMk/>
+            <pc:sldMk cId="2426021593" sldId="485"/>
+            <ac:spMk id="4" creationId="{18B1457E-3AFF-EFEC-E42D-7150143C19B7}"/>
+          </ac:spMkLst>
+        </pc:spChg>
       </pc:sldChg>
       <pc:sldChg chg="addSp delSp modSp add del mod">
         <pc:chgData name="Mohammed Fasha" userId="cc64f42d-a1a6-4f08-b97b-0c37f877119f" providerId="ADAL" clId="{7E2E8029-2718-4E74-A1E0-5ED48AB79672}" dt="2025-06-04T04:03:22.922" v="132" actId="47"/>
@@ -339,6 +1675,22 @@
           <pc:docMk/>
           <pc:sldMk cId="3181280278" sldId="487"/>
         </pc:sldMkLst>
+        <pc:spChg chg="mod">
+          <ac:chgData name="Mohammed Fasha" userId="cc64f42d-a1a6-4f08-b97b-0c37f877119f" providerId="ADAL" clId="{7E2E8029-2718-4E74-A1E0-5ED48AB79672}" dt="2025-06-07T04:19:34.055" v="1344" actId="20577"/>
+          <ac:spMkLst>
+            <pc:docMk/>
+            <pc:sldMk cId="3181280278" sldId="487"/>
+            <ac:spMk id="2" creationId="{649BE8BB-7667-03ED-871D-1A09FFC8BDCC}"/>
+          </ac:spMkLst>
+        </pc:spChg>
+        <pc:spChg chg="mod">
+          <ac:chgData name="Mohammed Fasha" userId="cc64f42d-a1a6-4f08-b97b-0c37f877119f" providerId="ADAL" clId="{7E2E8029-2718-4E74-A1E0-5ED48AB79672}" dt="2025-06-07T08:12:58.489" v="3053" actId="21"/>
+          <ac:spMkLst>
+            <pc:docMk/>
+            <pc:sldMk cId="3181280278" sldId="487"/>
+            <ac:spMk id="3" creationId="{B4D50D09-1A60-3190-5579-2259B299C703}"/>
+          </ac:spMkLst>
+        </pc:spChg>
       </pc:sldChg>
       <pc:sldChg chg="addSp delSp modSp add del mod">
         <pc:chgData name="Mohammed Fasha" userId="cc64f42d-a1a6-4f08-b97b-0c37f877119f" providerId="ADAL" clId="{7E2E8029-2718-4E74-A1E0-5ED48AB79672}" dt="2025-06-04T04:10:43.708" v="203" actId="47"/>
@@ -359,6 +1711,14 @@
             <pc:docMk/>
             <pc:sldMk cId="4066742116" sldId="489"/>
             <ac:spMk id="2" creationId="{82973B80-800E-A863-13DB-91B41F70B7EF}"/>
+          </ac:spMkLst>
+        </pc:spChg>
+        <pc:spChg chg="add del mod">
+          <ac:chgData name="Mohammed Fasha" userId="cc64f42d-a1a6-4f08-b97b-0c37f877119f" providerId="ADAL" clId="{7E2E8029-2718-4E74-A1E0-5ED48AB79672}" dt="2025-06-07T08:18:29.940" v="3237" actId="478"/>
+          <ac:spMkLst>
+            <pc:docMk/>
+            <pc:sldMk cId="4066742116" sldId="489"/>
+            <ac:spMk id="5" creationId="{2F0A6D14-2F44-105E-848B-7DDF686FEB47}"/>
           </ac:spMkLst>
         </pc:spChg>
         <pc:spChg chg="add mod">
@@ -369,6 +1729,30 @@
             <ac:spMk id="10" creationId="{FBDD767E-EE4D-A94D-1BCC-A56951A51E7B}"/>
           </ac:spMkLst>
         </pc:spChg>
+        <pc:spChg chg="add del mod">
+          <ac:chgData name="Mohammed Fasha" userId="cc64f42d-a1a6-4f08-b97b-0c37f877119f" providerId="ADAL" clId="{7E2E8029-2718-4E74-A1E0-5ED48AB79672}" dt="2025-06-07T08:19:03.702" v="3242" actId="478"/>
+          <ac:spMkLst>
+            <pc:docMk/>
+            <pc:sldMk cId="4066742116" sldId="489"/>
+            <ac:spMk id="11" creationId="{269ABBB5-2CA6-18FD-9BD8-FE09CD880503}"/>
+          </ac:spMkLst>
+        </pc:spChg>
+        <pc:graphicFrameChg chg="add del mod modGraphic">
+          <ac:chgData name="Mohammed Fasha" userId="cc64f42d-a1a6-4f08-b97b-0c37f877119f" providerId="ADAL" clId="{7E2E8029-2718-4E74-A1E0-5ED48AB79672}" dt="2025-06-07T08:18:26.686" v="3236" actId="21"/>
+          <ac:graphicFrameMkLst>
+            <pc:docMk/>
+            <pc:sldMk cId="4066742116" sldId="489"/>
+            <ac:graphicFrameMk id="8" creationId="{C6C90679-34C7-D309-8F12-3418E50E21D3}"/>
+          </ac:graphicFrameMkLst>
+        </pc:graphicFrameChg>
+        <pc:picChg chg="add del mod">
+          <ac:chgData name="Mohammed Fasha" userId="cc64f42d-a1a6-4f08-b97b-0c37f877119f" providerId="ADAL" clId="{7E2E8029-2718-4E74-A1E0-5ED48AB79672}" dt="2025-06-07T08:29:07.243" v="3423" actId="21"/>
+          <ac:picMkLst>
+            <pc:docMk/>
+            <pc:sldMk cId="4066742116" sldId="489"/>
+            <ac:picMk id="4" creationId="{FE62F33E-DC36-69B1-6BA4-3F72051C658C}"/>
+          </ac:picMkLst>
+        </pc:picChg>
         <pc:picChg chg="add mod">
           <ac:chgData name="Mohammed Fasha" userId="cc64f42d-a1a6-4f08-b97b-0c37f877119f" providerId="ADAL" clId="{7E2E8029-2718-4E74-A1E0-5ED48AB79672}" dt="2025-06-07T08:30:14.419" v="3455"/>
           <ac:picMkLst>
@@ -423,6 +1807,14 @@
           <pc:docMk/>
           <pc:sldMk cId="2300690374" sldId="491"/>
         </pc:sldMkLst>
+        <pc:spChg chg="mod">
+          <ac:chgData name="Mohammed Fasha" userId="cc64f42d-a1a6-4f08-b97b-0c37f877119f" providerId="ADAL" clId="{7E2E8029-2718-4E74-A1E0-5ED48AB79672}" dt="2025-06-07T04:12:50.954" v="1136" actId="27636"/>
+          <ac:spMkLst>
+            <pc:docMk/>
+            <pc:sldMk cId="2300690374" sldId="491"/>
+            <ac:spMk id="3" creationId="{81C5FD02-18E5-FAF0-F50C-176BE3C8CD02}"/>
+          </ac:spMkLst>
+        </pc:spChg>
       </pc:sldChg>
       <pc:sldChg chg="modSp add del mod">
         <pc:chgData name="Mohammed Fasha" userId="cc64f42d-a1a6-4f08-b97b-0c37f877119f" providerId="ADAL" clId="{7E2E8029-2718-4E74-A1E0-5ED48AB79672}" dt="2025-06-04T07:31:18.148" v="797" actId="47"/>
@@ -437,6 +1829,14 @@
           <pc:docMk/>
           <pc:sldMk cId="3951544621" sldId="493"/>
         </pc:sldMkLst>
+        <pc:spChg chg="mod">
+          <ac:chgData name="Mohammed Fasha" userId="cc64f42d-a1a6-4f08-b97b-0c37f877119f" providerId="ADAL" clId="{7E2E8029-2718-4E74-A1E0-5ED48AB79672}" dt="2025-06-07T02:48:42.324" v="954" actId="27636"/>
+          <ac:spMkLst>
+            <pc:docMk/>
+            <pc:sldMk cId="3951544621" sldId="493"/>
+            <ac:spMk id="3" creationId="{57B2DD35-2E22-4FDD-96C0-AE3E993C2920}"/>
+          </ac:spMkLst>
+        </pc:spChg>
       </pc:sldChg>
       <pc:sldChg chg="addSp modSp add del mod">
         <pc:chgData name="Mohammed Fasha" userId="cc64f42d-a1a6-4f08-b97b-0c37f877119f" providerId="ADAL" clId="{7E2E8029-2718-4E74-A1E0-5ED48AB79672}" dt="2025-06-07T06:16:38.935" v="2813" actId="47"/>
@@ -444,6 +1844,14 @@
           <pc:docMk/>
           <pc:sldMk cId="3023457119" sldId="494"/>
         </pc:sldMkLst>
+        <pc:spChg chg="mod">
+          <ac:chgData name="Mohammed Fasha" userId="cc64f42d-a1a6-4f08-b97b-0c37f877119f" providerId="ADAL" clId="{7E2E8029-2718-4E74-A1E0-5ED48AB79672}" dt="2025-06-07T06:16:35.446" v="2812" actId="27636"/>
+          <ac:spMkLst>
+            <pc:docMk/>
+            <pc:sldMk cId="3023457119" sldId="494"/>
+            <ac:spMk id="3" creationId="{18A30A43-4203-4089-7D6B-E98B5E65891F}"/>
+          </ac:spMkLst>
+        </pc:spChg>
       </pc:sldChg>
       <pc:sldChg chg="modSp add del mod">
         <pc:chgData name="Mohammed Fasha" userId="cc64f42d-a1a6-4f08-b97b-0c37f877119f" providerId="ADAL" clId="{7E2E8029-2718-4E74-A1E0-5ED48AB79672}" dt="2025-06-07T06:16:43.777" v="2814" actId="47"/>
@@ -458,6 +1866,38 @@
           <pc:docMk/>
           <pc:sldMk cId="2805227895" sldId="496"/>
         </pc:sldMkLst>
+        <pc:spChg chg="add del mod">
+          <ac:chgData name="Mohammed Fasha" userId="cc64f42d-a1a6-4f08-b97b-0c37f877119f" providerId="ADAL" clId="{7E2E8029-2718-4E74-A1E0-5ED48AB79672}" dt="2025-06-07T02:50:29.749" v="955" actId="5793"/>
+          <ac:spMkLst>
+            <pc:docMk/>
+            <pc:sldMk cId="2805227895" sldId="496"/>
+            <ac:spMk id="3" creationId="{8A3F3DC4-AAFE-EBA7-A99B-EA18FC4D8D25}"/>
+          </ac:spMkLst>
+        </pc:spChg>
+        <pc:graphicFrameChg chg="add mod modGraphic">
+          <ac:chgData name="Mohammed Fasha" userId="cc64f42d-a1a6-4f08-b97b-0c37f877119f" providerId="ADAL" clId="{7E2E8029-2718-4E74-A1E0-5ED48AB79672}" dt="2025-06-07T06:23:55.150" v="2857" actId="14734"/>
+          <ac:graphicFrameMkLst>
+            <pc:docMk/>
+            <pc:sldMk cId="2805227895" sldId="496"/>
+            <ac:graphicFrameMk id="5" creationId="{45ABD52E-F79D-2160-1F1B-578B3029517C}"/>
+          </ac:graphicFrameMkLst>
+        </pc:graphicFrameChg>
+        <pc:graphicFrameChg chg="add mod modGraphic">
+          <ac:chgData name="Mohammed Fasha" userId="cc64f42d-a1a6-4f08-b97b-0c37f877119f" providerId="ADAL" clId="{7E2E8029-2718-4E74-A1E0-5ED48AB79672}" dt="2025-06-07T06:24:25.305" v="2858" actId="1076"/>
+          <ac:graphicFrameMkLst>
+            <pc:docMk/>
+            <pc:sldMk cId="2805227895" sldId="496"/>
+            <ac:graphicFrameMk id="8" creationId="{7E38B740-5670-3C41-5F59-A1140CDEAAA0}"/>
+          </ac:graphicFrameMkLst>
+        </pc:graphicFrameChg>
+        <pc:picChg chg="add del">
+          <ac:chgData name="Mohammed Fasha" userId="cc64f42d-a1a6-4f08-b97b-0c37f877119f" providerId="ADAL" clId="{7E2E8029-2718-4E74-A1E0-5ED48AB79672}" dt="2025-06-07T06:22:58.544" v="2849" actId="22"/>
+          <ac:picMkLst>
+            <pc:docMk/>
+            <pc:sldMk cId="2805227895" sldId="496"/>
+            <ac:picMk id="6" creationId="{0CA5BCB7-1ABA-7476-BF39-4257A7B2D536}"/>
+          </ac:picMkLst>
+        </pc:picChg>
       </pc:sldChg>
       <pc:sldChg chg="modSp add mod">
         <pc:chgData name="Mohammed Fasha" userId="cc64f42d-a1a6-4f08-b97b-0c37f877119f" providerId="ADAL" clId="{7E2E8029-2718-4E74-A1E0-5ED48AB79672}" dt="2025-06-07T08:51:01.005" v="4348" actId="27636"/>
@@ -850,6 +2290,22 @@
           <pc:docMk/>
           <pc:sldMk cId="18889404" sldId="512"/>
         </pc:sldMkLst>
+        <pc:spChg chg="mod">
+          <ac:chgData name="Mohammed Fasha" userId="cc64f42d-a1a6-4f08-b97b-0c37f877119f" providerId="ADAL" clId="{7E2E8029-2718-4E74-A1E0-5ED48AB79672}" dt="2025-06-07T04:25:42.683" v="1583" actId="20577"/>
+          <ac:spMkLst>
+            <pc:docMk/>
+            <pc:sldMk cId="18889404" sldId="512"/>
+            <ac:spMk id="2" creationId="{2E8AAFAD-4F13-D81B-8B17-B6638AAA08A1}"/>
+          </ac:spMkLst>
+        </pc:spChg>
+        <pc:spChg chg="mod">
+          <ac:chgData name="Mohammed Fasha" userId="cc64f42d-a1a6-4f08-b97b-0c37f877119f" providerId="ADAL" clId="{7E2E8029-2718-4E74-A1E0-5ED48AB79672}" dt="2025-06-07T04:28:39.655" v="1602" actId="27636"/>
+          <ac:spMkLst>
+            <pc:docMk/>
+            <pc:sldMk cId="18889404" sldId="512"/>
+            <ac:spMk id="3" creationId="{74B6284C-EB0A-B914-984A-9968E5EAE664}"/>
+          </ac:spMkLst>
+        </pc:spChg>
       </pc:sldChg>
       <pc:sldChg chg="modSp new del mod">
         <pc:chgData name="Mohammed Fasha" userId="cc64f42d-a1a6-4f08-b97b-0c37f877119f" providerId="ADAL" clId="{7E2E8029-2718-4E74-A1E0-5ED48AB79672}" dt="2025-06-04T07:34:03.454" v="875" actId="47"/>
@@ -917,6 +2373,30 @@
             <ac:spMk id="3" creationId="{5B93E470-126F-0470-F370-550A166C8CE3}"/>
           </ac:spMkLst>
         </pc:spChg>
+        <pc:spChg chg="add">
+          <ac:chgData name="Mohammed Fasha" userId="cc64f42d-a1a6-4f08-b97b-0c37f877119f" providerId="ADAL" clId="{7E2E8029-2718-4E74-A1E0-5ED48AB79672}" dt="2025-06-07T04:29:13.779" v="1604"/>
+          <ac:spMkLst>
+            <pc:docMk/>
+            <pc:sldMk cId="3589465999" sldId="514"/>
+            <ac:spMk id="4" creationId="{AE0EE7A9-C34F-99C6-24F3-A78E98760B4A}"/>
+          </ac:spMkLst>
+        </pc:spChg>
+        <pc:spChg chg="add">
+          <ac:chgData name="Mohammed Fasha" userId="cc64f42d-a1a6-4f08-b97b-0c37f877119f" providerId="ADAL" clId="{7E2E8029-2718-4E74-A1E0-5ED48AB79672}" dt="2025-06-07T04:29:13.779" v="1604"/>
+          <ac:spMkLst>
+            <pc:docMk/>
+            <pc:sldMk cId="3589465999" sldId="514"/>
+            <ac:spMk id="5" creationId="{E62FD89D-1516-4AF5-C2BC-304891E5D1DD}"/>
+          </ac:spMkLst>
+        </pc:spChg>
+        <pc:spChg chg="add">
+          <ac:chgData name="Mohammed Fasha" userId="cc64f42d-a1a6-4f08-b97b-0c37f877119f" providerId="ADAL" clId="{7E2E8029-2718-4E74-A1E0-5ED48AB79672}" dt="2025-06-07T04:29:13.779" v="1604"/>
+          <ac:spMkLst>
+            <pc:docMk/>
+            <pc:sldMk cId="3589465999" sldId="514"/>
+            <ac:spMk id="6" creationId="{B6B3074C-760C-0AC6-9596-D815ED707C23}"/>
+          </ac:spMkLst>
+        </pc:spChg>
       </pc:sldChg>
       <pc:sldChg chg="modSp new mod">
         <pc:chgData name="Mohammed Fasha" userId="cc64f42d-a1a6-4f08-b97b-0c37f877119f" providerId="ADAL" clId="{7E2E8029-2718-4E74-A1E0-5ED48AB79672}" dt="2025-06-07T08:48:13.280" v="4268" actId="20577"/>
@@ -961,6 +2441,46 @@
             <pc:docMk/>
             <pc:sldMk cId="1201106649" sldId="516"/>
             <ac:spMk id="3" creationId="{C0784354-661A-5C14-DFC3-A6A7DCA2C928}"/>
+          </ac:spMkLst>
+        </pc:spChg>
+        <pc:spChg chg="add">
+          <ac:chgData name="Mohammed Fasha" userId="cc64f42d-a1a6-4f08-b97b-0c37f877119f" providerId="ADAL" clId="{7E2E8029-2718-4E74-A1E0-5ED48AB79672}" dt="2025-06-07T04:34:19.914" v="1707"/>
+          <ac:spMkLst>
+            <pc:docMk/>
+            <pc:sldMk cId="1201106649" sldId="516"/>
+            <ac:spMk id="4" creationId="{2844257B-0B49-DA61-7A73-AA3EF5E9FFBE}"/>
+          </ac:spMkLst>
+        </pc:spChg>
+        <pc:spChg chg="add">
+          <ac:chgData name="Mohammed Fasha" userId="cc64f42d-a1a6-4f08-b97b-0c37f877119f" providerId="ADAL" clId="{7E2E8029-2718-4E74-A1E0-5ED48AB79672}" dt="2025-06-07T04:34:19.914" v="1707"/>
+          <ac:spMkLst>
+            <pc:docMk/>
+            <pc:sldMk cId="1201106649" sldId="516"/>
+            <ac:spMk id="5" creationId="{759AC453-9411-8B50-8485-EDC31FB389E3}"/>
+          </ac:spMkLst>
+        </pc:spChg>
+        <pc:spChg chg="add">
+          <ac:chgData name="Mohammed Fasha" userId="cc64f42d-a1a6-4f08-b97b-0c37f877119f" providerId="ADAL" clId="{7E2E8029-2718-4E74-A1E0-5ED48AB79672}" dt="2025-06-07T04:34:19.914" v="1707"/>
+          <ac:spMkLst>
+            <pc:docMk/>
+            <pc:sldMk cId="1201106649" sldId="516"/>
+            <ac:spMk id="6" creationId="{26E41BB1-9C81-5C1F-E55E-4BA48CFC2C7B}"/>
+          </ac:spMkLst>
+        </pc:spChg>
+        <pc:spChg chg="add">
+          <ac:chgData name="Mohammed Fasha" userId="cc64f42d-a1a6-4f08-b97b-0c37f877119f" providerId="ADAL" clId="{7E2E8029-2718-4E74-A1E0-5ED48AB79672}" dt="2025-06-07T04:34:19.914" v="1707"/>
+          <ac:spMkLst>
+            <pc:docMk/>
+            <pc:sldMk cId="1201106649" sldId="516"/>
+            <ac:spMk id="7" creationId="{07739F71-AF63-0695-0FA3-0057AE0E18A6}"/>
+          </ac:spMkLst>
+        </pc:spChg>
+        <pc:spChg chg="add">
+          <ac:chgData name="Mohammed Fasha" userId="cc64f42d-a1a6-4f08-b97b-0c37f877119f" providerId="ADAL" clId="{7E2E8029-2718-4E74-A1E0-5ED48AB79672}" dt="2025-06-07T04:34:19.914" v="1707"/>
+          <ac:spMkLst>
+            <pc:docMk/>
+            <pc:sldMk cId="1201106649" sldId="516"/>
+            <ac:spMk id="8" creationId="{DCB610EC-8F44-7D55-FB16-B023A63C266C}"/>
           </ac:spMkLst>
         </pc:spChg>
         <pc:spChg chg="add mod">
@@ -1048,6 +2568,22 @@
             <ac:spMk id="3" creationId="{057CA1C0-0DAB-5276-3F82-291A0C687611}"/>
           </ac:spMkLst>
         </pc:spChg>
+        <pc:spChg chg="add del">
+          <ac:chgData name="Mohammed Fasha" userId="cc64f42d-a1a6-4f08-b97b-0c37f877119f" providerId="ADAL" clId="{7E2E8029-2718-4E74-A1E0-5ED48AB79672}" dt="2025-06-07T08:10:49.473" v="3009" actId="22"/>
+          <ac:spMkLst>
+            <pc:docMk/>
+            <pc:sldMk cId="1615891368" sldId="519"/>
+            <ac:spMk id="5" creationId="{7DF245C8-E949-8BBE-6ADB-64ED54B38575}"/>
+          </ac:spMkLst>
+        </pc:spChg>
+        <pc:picChg chg="add mod">
+          <ac:chgData name="Mohammed Fasha" userId="cc64f42d-a1a6-4f08-b97b-0c37f877119f" providerId="ADAL" clId="{7E2E8029-2718-4E74-A1E0-5ED48AB79672}" dt="2025-06-07T08:11:53.355" v="3024" actId="1076"/>
+          <ac:picMkLst>
+            <pc:docMk/>
+            <pc:sldMk cId="1615891368" sldId="519"/>
+            <ac:picMk id="7" creationId="{BBF99406-1FB8-7EA1-9618-E641BC1BF424}"/>
+          </ac:picMkLst>
+        </pc:picChg>
         <pc:picChg chg="add mod">
           <ac:chgData name="Mohammed Fasha" userId="cc64f42d-a1a6-4f08-b97b-0c37f877119f" providerId="ADAL" clId="{7E2E8029-2718-4E74-A1E0-5ED48AB79672}" dt="2025-06-07T08:29:27.807" v="3430" actId="14100"/>
           <ac:picMkLst>
@@ -1071,6 +2607,14 @@
           <pc:docMk/>
           <pc:sldMk cId="419552046" sldId="520"/>
         </pc:sldMkLst>
+        <pc:spChg chg="mod">
+          <ac:chgData name="Mohammed Fasha" userId="cc64f42d-a1a6-4f08-b97b-0c37f877119f" providerId="ADAL" clId="{7E2E8029-2718-4E74-A1E0-5ED48AB79672}" dt="2025-06-07T08:12:12.141" v="3036"/>
+          <ac:spMkLst>
+            <pc:docMk/>
+            <pc:sldMk cId="419552046" sldId="520"/>
+            <ac:spMk id="3" creationId="{70FCBA02-267A-181F-1653-E9D7229C51BF}"/>
+          </ac:spMkLst>
+        </pc:spChg>
       </pc:sldChg>
       <pc:sldChg chg="addSp delSp modSp new mod">
         <pc:chgData name="Mohammed Fasha" userId="cc64f42d-a1a6-4f08-b97b-0c37f877119f" providerId="ADAL" clId="{7E2E8029-2718-4E74-A1E0-5ED48AB79672}" dt="2025-06-07T08:31:16.721" v="3464" actId="14100"/>
@@ -1084,6 +2628,14 @@
             <pc:docMk/>
             <pc:sldMk cId="2082955467" sldId="521"/>
             <ac:spMk id="2" creationId="{489FECB8-FCF6-A050-9BBB-E134B97CF3AE}"/>
+          </ac:spMkLst>
+        </pc:spChg>
+        <pc:spChg chg="del mod">
+          <ac:chgData name="Mohammed Fasha" userId="cc64f42d-a1a6-4f08-b97b-0c37f877119f" providerId="ADAL" clId="{7E2E8029-2718-4E74-A1E0-5ED48AB79672}" dt="2025-06-07T08:31:10.550" v="3461" actId="22"/>
+          <ac:spMkLst>
+            <pc:docMk/>
+            <pc:sldMk cId="2082955467" sldId="521"/>
+            <ac:spMk id="3" creationId="{CEAD3F1F-EA70-775D-8D90-17657BE1887E}"/>
           </ac:spMkLst>
         </pc:spChg>
         <pc:picChg chg="add mod ord">
@@ -1306,233 +2858,27 @@
     </pc:docChg>
   </pc:docChgLst>
   <pc:docChgLst>
-    <pc:chgData name="Mohammed Fasha" userId="cc64f42d-a1a6-4f08-b97b-0c37f877119f" providerId="ADAL" clId="{5980B3BB-4EB6-4E37-92BF-3A2A8F4B2C7A}"/>
-    <pc:docChg chg="custSel modSld">
-      <pc:chgData name="Mohammed Fasha" userId="cc64f42d-a1a6-4f08-b97b-0c37f877119f" providerId="ADAL" clId="{5980B3BB-4EB6-4E37-92BF-3A2A8F4B2C7A}" dt="2024-10-15T02:28:13.535" v="0" actId="478"/>
+    <pc:chgData name="Mohammed Fasha" userId="cc64f42d-a1a6-4f08-b97b-0c37f877119f" providerId="ADAL" clId="{6804A8E6-8D7F-46E3-B091-66A8F6B926BF}"/>
+    <pc:docChg chg="custSel modMainMaster">
+      <pc:chgData name="Mohammed Fasha" userId="cc64f42d-a1a6-4f08-b97b-0c37f877119f" providerId="ADAL" clId="{6804A8E6-8D7F-46E3-B091-66A8F6B926BF}" dt="2024-11-09T05:15:35.019" v="2" actId="1076"/>
       <pc:docMkLst>
         <pc:docMk/>
       </pc:docMkLst>
-      <pc:sldChg chg="delSp mod">
-        <pc:chgData name="Mohammed Fasha" userId="cc64f42d-a1a6-4f08-b97b-0c37f877119f" providerId="ADAL" clId="{5980B3BB-4EB6-4E37-92BF-3A2A8F4B2C7A}" dt="2024-10-15T02:28:13.535" v="0" actId="478"/>
-        <pc:sldMkLst>
-          <pc:docMk/>
-          <pc:sldMk cId="2297456757" sldId="483"/>
-        </pc:sldMkLst>
-      </pc:sldChg>
-    </pc:docChg>
-  </pc:docChgLst>
-  <pc:docChgLst>
-    <pc:chgData name="Mohammed Fasha" userId="cc64f42d-a1a6-4f08-b97b-0c37f877119f" providerId="ADAL" clId="{25C05559-E4DC-4EE1-91BC-1444D09EE869}"/>
-    <pc:docChg chg="undo custSel addSld delSld modSld sldOrd">
-      <pc:chgData name="Mohammed Fasha" userId="cc64f42d-a1a6-4f08-b97b-0c37f877119f" providerId="ADAL" clId="{25C05559-E4DC-4EE1-91BC-1444D09EE869}" dt="2025-04-30T07:51:18.812" v="264" actId="47"/>
-      <pc:docMkLst>
-        <pc:docMk/>
-      </pc:docMkLst>
-      <pc:sldChg chg="modSp mod">
-        <pc:chgData name="Mohammed Fasha" userId="cc64f42d-a1a6-4f08-b97b-0c37f877119f" providerId="ADAL" clId="{25C05559-E4DC-4EE1-91BC-1444D09EE869}" dt="2025-04-16T06:14:55.232" v="16" actId="1076"/>
-        <pc:sldMkLst>
-          <pc:docMk/>
-          <pc:sldMk cId="1499958888" sldId="394"/>
-        </pc:sldMkLst>
-      </pc:sldChg>
-      <pc:sldChg chg="delSp modSp mod delAnim">
-        <pc:chgData name="Mohammed Fasha" userId="cc64f42d-a1a6-4f08-b97b-0c37f877119f" providerId="ADAL" clId="{25C05559-E4DC-4EE1-91BC-1444D09EE869}" dt="2025-04-16T06:43:36.666" v="20" actId="478"/>
-        <pc:sldMkLst>
-          <pc:docMk/>
-          <pc:sldMk cId="2905491798" sldId="440"/>
-        </pc:sldMkLst>
-      </pc:sldChg>
-      <pc:sldChg chg="modSp mod">
-        <pc:chgData name="Mohammed Fasha" userId="cc64f42d-a1a6-4f08-b97b-0c37f877119f" providerId="ADAL" clId="{25C05559-E4DC-4EE1-91BC-1444D09EE869}" dt="2025-04-09T06:23:26.187" v="0" actId="20577"/>
-        <pc:sldMkLst>
-          <pc:docMk/>
-          <pc:sldMk cId="2297456757" sldId="483"/>
-        </pc:sldMkLst>
-      </pc:sldChg>
-      <pc:sldChg chg="ord">
-        <pc:chgData name="Mohammed Fasha" userId="cc64f42d-a1a6-4f08-b97b-0c37f877119f" providerId="ADAL" clId="{25C05559-E4DC-4EE1-91BC-1444D09EE869}" dt="2025-04-16T06:46:21.733" v="23" actId="20578"/>
-        <pc:sldMkLst>
-          <pc:docMk/>
-          <pc:sldMk cId="3480194047" sldId="599"/>
-        </pc:sldMkLst>
-      </pc:sldChg>
-      <pc:sldChg chg="modSp mod">
-        <pc:chgData name="Mohammed Fasha" userId="cc64f42d-a1a6-4f08-b97b-0c37f877119f" providerId="ADAL" clId="{25C05559-E4DC-4EE1-91BC-1444D09EE869}" dt="2025-04-16T06:46:47.902" v="27" actId="404"/>
-        <pc:sldMkLst>
-          <pc:docMk/>
-          <pc:sldMk cId="3146452721" sldId="600"/>
-        </pc:sldMkLst>
-      </pc:sldChg>
-      <pc:sldChg chg="delSp mod">
-        <pc:chgData name="Mohammed Fasha" userId="cc64f42d-a1a6-4f08-b97b-0c37f877119f" providerId="ADAL" clId="{25C05559-E4DC-4EE1-91BC-1444D09EE869}" dt="2025-04-16T06:47:57.131" v="35" actId="21"/>
-        <pc:sldMkLst>
-          <pc:docMk/>
-          <pc:sldMk cId="202107314" sldId="647"/>
-        </pc:sldMkLst>
-      </pc:sldChg>
-      <pc:sldChg chg="modSp mod">
-        <pc:chgData name="Mohammed Fasha" userId="cc64f42d-a1a6-4f08-b97b-0c37f877119f" providerId="ADAL" clId="{25C05559-E4DC-4EE1-91BC-1444D09EE869}" dt="2025-04-16T06:48:42.467" v="40" actId="14100"/>
-        <pc:sldMkLst>
-          <pc:docMk/>
-          <pc:sldMk cId="3454522070" sldId="679"/>
-        </pc:sldMkLst>
-      </pc:sldChg>
-      <pc:sldChg chg="modSp mod">
-        <pc:chgData name="Mohammed Fasha" userId="cc64f42d-a1a6-4f08-b97b-0c37f877119f" providerId="ADAL" clId="{25C05559-E4DC-4EE1-91BC-1444D09EE869}" dt="2025-04-16T06:49:10.468" v="48" actId="404"/>
-        <pc:sldMkLst>
-          <pc:docMk/>
-          <pc:sldMk cId="2856814121" sldId="681"/>
-        </pc:sldMkLst>
-      </pc:sldChg>
-      <pc:sldChg chg="modSp mod">
-        <pc:chgData name="Mohammed Fasha" userId="cc64f42d-a1a6-4f08-b97b-0c37f877119f" providerId="ADAL" clId="{25C05559-E4DC-4EE1-91BC-1444D09EE869}" dt="2025-04-16T06:48:55.287" v="46" actId="27636"/>
-        <pc:sldMkLst>
-          <pc:docMk/>
-          <pc:sldMk cId="265576630" sldId="698"/>
-        </pc:sldMkLst>
-      </pc:sldChg>
-      <pc:sldChg chg="modSp">
-        <pc:chgData name="Mohammed Fasha" userId="cc64f42d-a1a6-4f08-b97b-0c37f877119f" providerId="ADAL" clId="{25C05559-E4DC-4EE1-91BC-1444D09EE869}" dt="2025-04-16T06:48:02.658" v="36" actId="1076"/>
-        <pc:sldMkLst>
-          <pc:docMk/>
-          <pc:sldMk cId="3085160177" sldId="704"/>
-        </pc:sldMkLst>
-      </pc:sldChg>
-      <pc:sldChg chg="modSp mod">
-        <pc:chgData name="Mohammed Fasha" userId="cc64f42d-a1a6-4f08-b97b-0c37f877119f" providerId="ADAL" clId="{25C05559-E4DC-4EE1-91BC-1444D09EE869}" dt="2025-04-16T06:47:18.630" v="34" actId="1076"/>
-        <pc:sldMkLst>
-          <pc:docMk/>
-          <pc:sldMk cId="32004852" sldId="708"/>
-        </pc:sldMkLst>
-      </pc:sldChg>
-      <pc:sldChg chg="addSp delSp modSp mod">
-        <pc:chgData name="Mohammed Fasha" userId="cc64f42d-a1a6-4f08-b97b-0c37f877119f" providerId="ADAL" clId="{25C05559-E4DC-4EE1-91BC-1444D09EE869}" dt="2025-04-16T06:14:10.424" v="11" actId="167"/>
-        <pc:sldMkLst>
-          <pc:docMk/>
-          <pc:sldMk cId="3150550060" sldId="720"/>
-        </pc:sldMkLst>
-      </pc:sldChg>
-      <pc:sldChg chg="addSp modSp new mod">
-        <pc:chgData name="Mohammed Fasha" userId="cc64f42d-a1a6-4f08-b97b-0c37f877119f" providerId="ADAL" clId="{25C05559-E4DC-4EE1-91BC-1444D09EE869}" dt="2025-04-30T06:40:50.224" v="212" actId="6549"/>
-        <pc:sldMkLst>
-          <pc:docMk/>
-          <pc:sldMk cId="666527140" sldId="725"/>
-        </pc:sldMkLst>
-      </pc:sldChg>
-      <pc:sldChg chg="addSp delSp modSp new mod">
-        <pc:chgData name="Mohammed Fasha" userId="cc64f42d-a1a6-4f08-b97b-0c37f877119f" providerId="ADAL" clId="{25C05559-E4DC-4EE1-91BC-1444D09EE869}" dt="2025-04-30T07:05:36.135" v="263" actId="122"/>
-        <pc:sldMkLst>
-          <pc:docMk/>
-          <pc:sldMk cId="3660604927" sldId="726"/>
-        </pc:sldMkLst>
-      </pc:sldChg>
-      <pc:sldChg chg="add del">
-        <pc:chgData name="Mohammed Fasha" userId="cc64f42d-a1a6-4f08-b97b-0c37f877119f" providerId="ADAL" clId="{25C05559-E4DC-4EE1-91BC-1444D09EE869}" dt="2025-04-30T07:51:18.812" v="264" actId="47"/>
-        <pc:sldMkLst>
-          <pc:docMk/>
-          <pc:sldMk cId="2399550384" sldId="727"/>
-        </pc:sldMkLst>
-      </pc:sldChg>
-      <pc:sldChg chg="modSp add mod ord">
-        <pc:chgData name="Mohammed Fasha" userId="cc64f42d-a1a6-4f08-b97b-0c37f877119f" providerId="ADAL" clId="{25C05559-E4DC-4EE1-91BC-1444D09EE869}" dt="2025-04-30T06:47:23.280" v="238" actId="20577"/>
-        <pc:sldMkLst>
-          <pc:docMk/>
-          <pc:sldMk cId="4051640529" sldId="728"/>
-        </pc:sldMkLst>
-      </pc:sldChg>
-    </pc:docChg>
-  </pc:docChgLst>
-  <pc:docChgLst>
-    <pc:chgData name="Mohammed Fasha" userId="cc64f42d-a1a6-4f08-b97b-0c37f877119f" providerId="ADAL" clId="{2E5FBF59-3168-4932-9518-582502FE1AD5}"/>
-    <pc:docChg chg="undo custSel delSld modSld">
-      <pc:chgData name="Mohammed Fasha" userId="cc64f42d-a1a6-4f08-b97b-0c37f877119f" providerId="ADAL" clId="{2E5FBF59-3168-4932-9518-582502FE1AD5}" dt="2024-12-24T08:08:19.987" v="550" actId="20577"/>
-      <pc:docMkLst>
-        <pc:docMk/>
-      </pc:docMkLst>
-      <pc:sldChg chg="delSp">
-        <pc:chgData name="Mohammed Fasha" userId="cc64f42d-a1a6-4f08-b97b-0c37f877119f" providerId="ADAL" clId="{2E5FBF59-3168-4932-9518-582502FE1AD5}" dt="2024-11-19T07:40:47.121" v="208" actId="478"/>
-        <pc:sldMkLst>
-          <pc:docMk/>
-          <pc:sldMk cId="391491219" sldId="428"/>
-        </pc:sldMkLst>
-      </pc:sldChg>
-      <pc:sldChg chg="modSp">
-        <pc:chgData name="Mohammed Fasha" userId="cc64f42d-a1a6-4f08-b97b-0c37f877119f" providerId="ADAL" clId="{2E5FBF59-3168-4932-9518-582502FE1AD5}" dt="2024-12-03T07:43:58.007" v="456" actId="1076"/>
-        <pc:sldMkLst>
-          <pc:docMk/>
-          <pc:sldMk cId="3339445507" sldId="430"/>
-        </pc:sldMkLst>
-      </pc:sldChg>
-      <pc:sldChg chg="modSp">
-        <pc:chgData name="Mohammed Fasha" userId="cc64f42d-a1a6-4f08-b97b-0c37f877119f" providerId="ADAL" clId="{2E5FBF59-3168-4932-9518-582502FE1AD5}" dt="2024-12-03T07:45:08.136" v="474" actId="20577"/>
-        <pc:sldMkLst>
-          <pc:docMk/>
-          <pc:sldMk cId="3389046835" sldId="431"/>
-        </pc:sldMkLst>
-      </pc:sldChg>
-      <pc:sldChg chg="modSp">
-        <pc:chgData name="Mohammed Fasha" userId="cc64f42d-a1a6-4f08-b97b-0c37f877119f" providerId="ADAL" clId="{2E5FBF59-3168-4932-9518-582502FE1AD5}" dt="2024-11-10T06:33:09.727" v="37" actId="207"/>
-        <pc:sldMkLst>
-          <pc:docMk/>
-          <pc:sldMk cId="2726994946" sldId="479"/>
-        </pc:sldMkLst>
-      </pc:sldChg>
-      <pc:sldChg chg="modSp">
-        <pc:chgData name="Mohammed Fasha" userId="cc64f42d-a1a6-4f08-b97b-0c37f877119f" providerId="ADAL" clId="{2E5FBF59-3168-4932-9518-582502FE1AD5}" dt="2024-11-19T07:44:28.766" v="211" actId="20577"/>
-        <pc:sldMkLst>
-          <pc:docMk/>
-          <pc:sldMk cId="2297456757" sldId="483"/>
-        </pc:sldMkLst>
-      </pc:sldChg>
-      <pc:sldChg chg="modSp">
-        <pc:chgData name="Mohammed Fasha" userId="cc64f42d-a1a6-4f08-b97b-0c37f877119f" providerId="ADAL" clId="{2E5FBF59-3168-4932-9518-582502FE1AD5}" dt="2024-11-10T06:45:09.392" v="40" actId="20577"/>
-        <pc:sldMkLst>
-          <pc:docMk/>
-          <pc:sldMk cId="3474268344" sldId="596"/>
-        </pc:sldMkLst>
-      </pc:sldChg>
-      <pc:sldChg chg="modSp">
-        <pc:chgData name="Mohammed Fasha" userId="cc64f42d-a1a6-4f08-b97b-0c37f877119f" providerId="ADAL" clId="{2E5FBF59-3168-4932-9518-582502FE1AD5}" dt="2024-12-03T07:47:21.561" v="476" actId="6549"/>
-        <pc:sldMkLst>
-          <pc:docMk/>
-          <pc:sldMk cId="399592497" sldId="613"/>
-        </pc:sldMkLst>
-      </pc:sldChg>
-      <pc:sldChg chg="modSp">
-        <pc:chgData name="Mohammed Fasha" userId="cc64f42d-a1a6-4f08-b97b-0c37f877119f" providerId="ADAL" clId="{2E5FBF59-3168-4932-9518-582502FE1AD5}" dt="2024-12-03T07:49:02.980" v="478" actId="207"/>
-        <pc:sldMkLst>
-          <pc:docMk/>
-          <pc:sldMk cId="3329135496" sldId="617"/>
-        </pc:sldMkLst>
-      </pc:sldChg>
-      <pc:sldChg chg="modSp">
-        <pc:chgData name="Mohammed Fasha" userId="cc64f42d-a1a6-4f08-b97b-0c37f877119f" providerId="ADAL" clId="{2E5FBF59-3168-4932-9518-582502FE1AD5}" dt="2024-12-24T08:05:16.608" v="482" actId="403"/>
-        <pc:sldMkLst>
-          <pc:docMk/>
-          <pc:sldMk cId="2990045589" sldId="659"/>
-        </pc:sldMkLst>
-      </pc:sldChg>
-      <pc:sldChg chg="modSp">
-        <pc:chgData name="Mohammed Fasha" userId="cc64f42d-a1a6-4f08-b97b-0c37f877119f" providerId="ADAL" clId="{2E5FBF59-3168-4932-9518-582502FE1AD5}" dt="2024-12-24T08:08:19.987" v="550" actId="20577"/>
-        <pc:sldMkLst>
-          <pc:docMk/>
-          <pc:sldMk cId="2680231355" sldId="669"/>
-        </pc:sldMkLst>
-      </pc:sldChg>
-      <pc:sldChg chg="addSp modSp">
-        <pc:chgData name="Mohammed Fasha" userId="cc64f42d-a1a6-4f08-b97b-0c37f877119f" providerId="ADAL" clId="{2E5FBF59-3168-4932-9518-582502FE1AD5}" dt="2024-12-24T08:05:52.910" v="488" actId="1076"/>
-        <pc:sldMkLst>
-          <pc:docMk/>
-          <pc:sldMk cId="916102856" sldId="685"/>
-        </pc:sldMkLst>
-      </pc:sldChg>
-      <pc:sldChg chg="modSp">
-        <pc:chgData name="Mohammed Fasha" userId="cc64f42d-a1a6-4f08-b97b-0c37f877119f" providerId="ADAL" clId="{2E5FBF59-3168-4932-9518-582502FE1AD5}" dt="2024-11-19T07:03:29.557" v="206" actId="207"/>
-        <pc:sldMkLst>
-          <pc:docMk/>
-          <pc:sldMk cId="32004852" sldId="708"/>
-        </pc:sldMkLst>
-      </pc:sldChg>
+      <pc:sldMasterChg chg="delSp mod modSldLayout">
+        <pc:chgData name="Mohammed Fasha" userId="cc64f42d-a1a6-4f08-b97b-0c37f877119f" providerId="ADAL" clId="{6804A8E6-8D7F-46E3-B091-66A8F6B926BF}" dt="2024-11-09T05:15:35.019" v="2" actId="1076"/>
+        <pc:sldMasterMkLst>
+          <pc:docMk/>
+          <pc:sldMasterMk cId="742811419" sldId="2147483648"/>
+        </pc:sldMasterMkLst>
+        <pc:sldLayoutChg chg="addSp modSp mod">
+          <pc:chgData name="Mohammed Fasha" userId="cc64f42d-a1a6-4f08-b97b-0c37f877119f" providerId="ADAL" clId="{6804A8E6-8D7F-46E3-B091-66A8F6B926BF}" dt="2024-11-09T05:15:35.019" v="2" actId="1076"/>
+          <pc:sldLayoutMkLst>
+            <pc:docMk/>
+            <pc:sldMasterMk cId="742811419" sldId="2147483648"/>
+            <pc:sldLayoutMk cId="4063788262" sldId="2147483649"/>
+          </pc:sldLayoutMkLst>
+        </pc:sldLayoutChg>
+      </pc:sldMasterChg>
     </pc:docChg>
   </pc:docChgLst>
   <pc:docChgLst>
@@ -1814,1128 +3160,15 @@
             <pc:sldMasterMk cId="742811419" sldId="2147483648"/>
             <pc:sldLayoutMk cId="3573533501" sldId="2147483650"/>
           </pc:sldLayoutMkLst>
-        </pc:sldLayoutChg>
-      </pc:sldMasterChg>
-    </pc:docChg>
-  </pc:docChgLst>
-  <pc:docChgLst>
-    <pc:chgData name="Mohammed Fasha" userId="S::mohammed.fasha@uop.edu.jo::cc64f42d-a1a6-4f08-b97b-0c37f877119f" providerId="AD" clId="Web-{5A53F68D-5D62-2F91-0C34-5AF0710613BB}"/>
-    <pc:docChg chg="addSld modSld">
-      <pc:chgData name="Mohammed Fasha" userId="S::mohammed.fasha@uop.edu.jo::cc64f42d-a1a6-4f08-b97b-0c37f877119f" providerId="AD" clId="Web-{5A53F68D-5D62-2F91-0C34-5AF0710613BB}" dt="2025-06-18T07:34:46.145" v="255" actId="20577"/>
-      <pc:docMkLst>
-        <pc:docMk/>
-      </pc:docMkLst>
-      <pc:sldChg chg="modSp">
-        <pc:chgData name="Mohammed Fasha" userId="S::mohammed.fasha@uop.edu.jo::cc64f42d-a1a6-4f08-b97b-0c37f877119f" providerId="AD" clId="Web-{5A53F68D-5D62-2F91-0C34-5AF0710613BB}" dt="2025-06-18T07:34:46.145" v="255" actId="20577"/>
-        <pc:sldMkLst>
-          <pc:docMk/>
-          <pc:sldMk cId="1855355283" sldId="498"/>
-        </pc:sldMkLst>
-        <pc:spChg chg="mod">
-          <ac:chgData name="Mohammed Fasha" userId="S::mohammed.fasha@uop.edu.jo::cc64f42d-a1a6-4f08-b97b-0c37f877119f" providerId="AD" clId="Web-{5A53F68D-5D62-2F91-0C34-5AF0710613BB}" dt="2025-06-18T07:34:46.145" v="255" actId="20577"/>
-          <ac:spMkLst>
-            <pc:docMk/>
-            <pc:sldMk cId="1855355283" sldId="498"/>
-            <ac:spMk id="3" creationId="{EE397667-A7E4-7E53-67C9-F8B9D8DAF6D5}"/>
-          </ac:spMkLst>
-        </pc:spChg>
-      </pc:sldChg>
-      <pc:sldChg chg="modSp">
-        <pc:chgData name="Mohammed Fasha" userId="S::mohammed.fasha@uop.edu.jo::cc64f42d-a1a6-4f08-b97b-0c37f877119f" providerId="AD" clId="Web-{5A53F68D-5D62-2F91-0C34-5AF0710613BB}" dt="2025-06-18T07:33:42.518" v="245" actId="20577"/>
-        <pc:sldMkLst>
-          <pc:docMk/>
-          <pc:sldMk cId="3589465999" sldId="514"/>
-        </pc:sldMkLst>
-        <pc:spChg chg="mod">
-          <ac:chgData name="Mohammed Fasha" userId="S::mohammed.fasha@uop.edu.jo::cc64f42d-a1a6-4f08-b97b-0c37f877119f" providerId="AD" clId="Web-{5A53F68D-5D62-2F91-0C34-5AF0710613BB}" dt="2025-06-18T07:32:02.797" v="218" actId="20577"/>
-          <ac:spMkLst>
-            <pc:docMk/>
-            <pc:sldMk cId="3589465999" sldId="514"/>
-            <ac:spMk id="2" creationId="{88A29053-B25D-8437-7DDD-113C9833833C}"/>
-          </ac:spMkLst>
-        </pc:spChg>
-        <pc:spChg chg="mod">
-          <ac:chgData name="Mohammed Fasha" userId="S::mohammed.fasha@uop.edu.jo::cc64f42d-a1a6-4f08-b97b-0c37f877119f" providerId="AD" clId="Web-{5A53F68D-5D62-2F91-0C34-5AF0710613BB}" dt="2025-06-18T07:33:42.518" v="245" actId="20577"/>
-          <ac:spMkLst>
-            <pc:docMk/>
-            <pc:sldMk cId="3589465999" sldId="514"/>
-            <ac:spMk id="3" creationId="{5B93E470-126F-0470-F370-550A166C8CE3}"/>
-          </ac:spMkLst>
-        </pc:spChg>
-      </pc:sldChg>
-      <pc:sldChg chg="modSp">
-        <pc:chgData name="Mohammed Fasha" userId="S::mohammed.fasha@uop.edu.jo::cc64f42d-a1a6-4f08-b97b-0c37f877119f" providerId="AD" clId="Web-{5A53F68D-5D62-2F91-0C34-5AF0710613BB}" dt="2025-06-18T07:32:07.031" v="219" actId="20577"/>
-        <pc:sldMkLst>
-          <pc:docMk/>
-          <pc:sldMk cId="2311531301" sldId="515"/>
-        </pc:sldMkLst>
-        <pc:spChg chg="mod">
-          <ac:chgData name="Mohammed Fasha" userId="S::mohammed.fasha@uop.edu.jo::cc64f42d-a1a6-4f08-b97b-0c37f877119f" providerId="AD" clId="Web-{5A53F68D-5D62-2F91-0C34-5AF0710613BB}" dt="2025-06-18T07:32:07.031" v="219" actId="20577"/>
-          <ac:spMkLst>
-            <pc:docMk/>
-            <pc:sldMk cId="2311531301" sldId="515"/>
-            <ac:spMk id="2" creationId="{DC04C7CB-A0FB-53BD-F5B2-69AE96A0E5A0}"/>
-          </ac:spMkLst>
-        </pc:spChg>
-      </pc:sldChg>
-      <pc:sldChg chg="modSp">
-        <pc:chgData name="Mohammed Fasha" userId="S::mohammed.fasha@uop.edu.jo::cc64f42d-a1a6-4f08-b97b-0c37f877119f" providerId="AD" clId="Web-{5A53F68D-5D62-2F91-0C34-5AF0710613BB}" dt="2025-06-18T07:34:15.676" v="252" actId="14100"/>
-        <pc:sldMkLst>
-          <pc:docMk/>
-          <pc:sldMk cId="1201106649" sldId="516"/>
-        </pc:sldMkLst>
-        <pc:spChg chg="mod">
-          <ac:chgData name="Mohammed Fasha" userId="S::mohammed.fasha@uop.edu.jo::cc64f42d-a1a6-4f08-b97b-0c37f877119f" providerId="AD" clId="Web-{5A53F68D-5D62-2F91-0C34-5AF0710613BB}" dt="2025-06-18T07:34:04.910" v="248" actId="20577"/>
-          <ac:spMkLst>
-            <pc:docMk/>
-            <pc:sldMk cId="1201106649" sldId="516"/>
-            <ac:spMk id="2" creationId="{0200F449-8EB2-4A35-0E5D-148ACC5A1F7D}"/>
-          </ac:spMkLst>
-        </pc:spChg>
-        <pc:spChg chg="mod">
-          <ac:chgData name="Mohammed Fasha" userId="S::mohammed.fasha@uop.edu.jo::cc64f42d-a1a6-4f08-b97b-0c37f877119f" providerId="AD" clId="Web-{5A53F68D-5D62-2F91-0C34-5AF0710613BB}" dt="2025-06-18T07:34:15.676" v="252" actId="14100"/>
-          <ac:spMkLst>
-            <pc:docMk/>
-            <pc:sldMk cId="1201106649" sldId="516"/>
-            <ac:spMk id="10" creationId="{CBD069FD-7B37-85AA-7C66-0FC15C990DD8}"/>
-          </ac:spMkLst>
-        </pc:spChg>
-      </pc:sldChg>
-      <pc:sldChg chg="modSp">
-        <pc:chgData name="Mohammed Fasha" userId="S::mohammed.fasha@uop.edu.jo::cc64f42d-a1a6-4f08-b97b-0c37f877119f" providerId="AD" clId="Web-{5A53F68D-5D62-2F91-0C34-5AF0710613BB}" dt="2025-06-18T07:31:30.389" v="215" actId="20577"/>
-        <pc:sldMkLst>
-          <pc:docMk/>
-          <pc:sldMk cId="834475357" sldId="517"/>
-        </pc:sldMkLst>
-        <pc:spChg chg="mod">
-          <ac:chgData name="Mohammed Fasha" userId="S::mohammed.fasha@uop.edu.jo::cc64f42d-a1a6-4f08-b97b-0c37f877119f" providerId="AD" clId="Web-{5A53F68D-5D62-2F91-0C34-5AF0710613BB}" dt="2025-06-18T07:28:32.493" v="127" actId="20577"/>
-          <ac:spMkLst>
-            <pc:docMk/>
-            <pc:sldMk cId="834475357" sldId="517"/>
-            <ac:spMk id="2" creationId="{748EBE3E-0A49-2947-0CEC-18B7160B878C}"/>
-          </ac:spMkLst>
-        </pc:spChg>
-        <pc:spChg chg="mod">
-          <ac:chgData name="Mohammed Fasha" userId="S::mohammed.fasha@uop.edu.jo::cc64f42d-a1a6-4f08-b97b-0c37f877119f" providerId="AD" clId="Web-{5A53F68D-5D62-2F91-0C34-5AF0710613BB}" dt="2025-06-18T07:31:30.389" v="215" actId="20577"/>
-          <ac:spMkLst>
-            <pc:docMk/>
-            <pc:sldMk cId="834475357" sldId="517"/>
-            <ac:spMk id="3" creationId="{ACE394C5-CDB7-FD4D-AA66-701E1D158182}"/>
-          </ac:spMkLst>
-        </pc:spChg>
-      </pc:sldChg>
-      <pc:sldChg chg="addSp delSp modSp new">
-        <pc:chgData name="Mohammed Fasha" userId="S::mohammed.fasha@uop.edu.jo::cc64f42d-a1a6-4f08-b97b-0c37f877119f" providerId="AD" clId="Web-{5A53F68D-5D62-2F91-0C34-5AF0710613BB}" dt="2025-06-18T07:30:05.621" v="168"/>
-        <pc:sldMkLst>
-          <pc:docMk/>
-          <pc:sldMk cId="2757035436" sldId="524"/>
-        </pc:sldMkLst>
-        <pc:spChg chg="mod">
-          <ac:chgData name="Mohammed Fasha" userId="S::mohammed.fasha@uop.edu.jo::cc64f42d-a1a6-4f08-b97b-0c37f877119f" providerId="AD" clId="Web-{5A53F68D-5D62-2F91-0C34-5AF0710613BB}" dt="2025-06-18T07:27:14.553" v="64" actId="20577"/>
-          <ac:spMkLst>
-            <pc:docMk/>
-            <pc:sldMk cId="2757035436" sldId="524"/>
-            <ac:spMk id="2" creationId="{1462616C-41EE-2B5B-760C-E900F7CFDE29}"/>
-          </ac:spMkLst>
-        </pc:spChg>
-        <pc:graphicFrameChg chg="add mod ord modGraphic">
-          <ac:chgData name="Mohammed Fasha" userId="S::mohammed.fasha@uop.edu.jo::cc64f42d-a1a6-4f08-b97b-0c37f877119f" providerId="AD" clId="Web-{5A53F68D-5D62-2F91-0C34-5AF0710613BB}" dt="2025-06-18T07:30:05.621" v="168"/>
-          <ac:graphicFrameMkLst>
-            <pc:docMk/>
-            <pc:sldMk cId="2757035436" sldId="524"/>
-            <ac:graphicFrameMk id="5" creationId="{D986A135-B943-08AB-BF49-B8AFBFF1A02E}"/>
-          </ac:graphicFrameMkLst>
-        </pc:graphicFrameChg>
-      </pc:sldChg>
-    </pc:docChg>
-  </pc:docChgLst>
-  <pc:docChgLst>
-    <pc:chgData name="Mohammed Fasha" userId="cc64f42d-a1a6-4f08-b97b-0c37f877119f" providerId="ADAL" clId="{FEC9C214-E726-4192-8176-A8C9AACEB478}"/>
-    <pc:docChg chg="custSel addSld delSld modSld">
-      <pc:chgData name="Mohammed Fasha" userId="cc64f42d-a1a6-4f08-b97b-0c37f877119f" providerId="ADAL" clId="{FEC9C214-E726-4192-8176-A8C9AACEB478}" dt="2025-05-16T05:43:36.510" v="126" actId="2696"/>
-      <pc:docMkLst>
-        <pc:docMk/>
-      </pc:docMkLst>
-      <pc:sldChg chg="del">
-        <pc:chgData name="Mohammed Fasha" userId="cc64f42d-a1a6-4f08-b97b-0c37f877119f" providerId="ADAL" clId="{FEC9C214-E726-4192-8176-A8C9AACEB478}" dt="2025-05-16T05:43:36.510" v="126" actId="2696"/>
-        <pc:sldMkLst>
-          <pc:docMk/>
-          <pc:sldMk cId="607684796" sldId="333"/>
-        </pc:sldMkLst>
-      </pc:sldChg>
-      <pc:sldChg chg="del">
-        <pc:chgData name="Mohammed Fasha" userId="cc64f42d-a1a6-4f08-b97b-0c37f877119f" providerId="ADAL" clId="{FEC9C214-E726-4192-8176-A8C9AACEB478}" dt="2025-05-16T05:43:36.510" v="126" actId="2696"/>
-        <pc:sldMkLst>
-          <pc:docMk/>
-          <pc:sldMk cId="587789057" sldId="423"/>
-        </pc:sldMkLst>
-      </pc:sldChg>
-      <pc:sldChg chg="del">
-        <pc:chgData name="Mohammed Fasha" userId="cc64f42d-a1a6-4f08-b97b-0c37f877119f" providerId="ADAL" clId="{FEC9C214-E726-4192-8176-A8C9AACEB478}" dt="2025-05-16T05:43:36.510" v="126" actId="2696"/>
-        <pc:sldMkLst>
-          <pc:docMk/>
-          <pc:sldMk cId="2127906749" sldId="427"/>
-        </pc:sldMkLst>
-      </pc:sldChg>
-      <pc:sldChg chg="del">
-        <pc:chgData name="Mohammed Fasha" userId="cc64f42d-a1a6-4f08-b97b-0c37f877119f" providerId="ADAL" clId="{FEC9C214-E726-4192-8176-A8C9AACEB478}" dt="2025-05-16T05:43:36.510" v="126" actId="2696"/>
-        <pc:sldMkLst>
-          <pc:docMk/>
-          <pc:sldMk cId="391491219" sldId="428"/>
-        </pc:sldMkLst>
-      </pc:sldChg>
-      <pc:sldChg chg="del">
-        <pc:chgData name="Mohammed Fasha" userId="cc64f42d-a1a6-4f08-b97b-0c37f877119f" providerId="ADAL" clId="{FEC9C214-E726-4192-8176-A8C9AACEB478}" dt="2025-05-16T05:43:36.510" v="126" actId="2696"/>
-        <pc:sldMkLst>
-          <pc:docMk/>
-          <pc:sldMk cId="3339445507" sldId="430"/>
-        </pc:sldMkLst>
-      </pc:sldChg>
-      <pc:sldChg chg="del">
-        <pc:chgData name="Mohammed Fasha" userId="cc64f42d-a1a6-4f08-b97b-0c37f877119f" providerId="ADAL" clId="{FEC9C214-E726-4192-8176-A8C9AACEB478}" dt="2025-05-16T05:43:36.510" v="126" actId="2696"/>
-        <pc:sldMkLst>
-          <pc:docMk/>
-          <pc:sldMk cId="3389046835" sldId="431"/>
-        </pc:sldMkLst>
-      </pc:sldChg>
-      <pc:sldChg chg="modSp mod">
-        <pc:chgData name="Mohammed Fasha" userId="cc64f42d-a1a6-4f08-b97b-0c37f877119f" providerId="ADAL" clId="{FEC9C214-E726-4192-8176-A8C9AACEB478}" dt="2025-05-16T05:42:48.998" v="99" actId="6549"/>
-        <pc:sldMkLst>
-          <pc:docMk/>
-          <pc:sldMk cId="4208461039" sldId="447"/>
-        </pc:sldMkLst>
-      </pc:sldChg>
-      <pc:sldChg chg="modSp mod">
-        <pc:chgData name="Mohammed Fasha" userId="cc64f42d-a1a6-4f08-b97b-0c37f877119f" providerId="ADAL" clId="{FEC9C214-E726-4192-8176-A8C9AACEB478}" dt="2025-05-16T05:43:13.101" v="125" actId="6549"/>
-        <pc:sldMkLst>
-          <pc:docMk/>
-          <pc:sldMk cId="2297456757" sldId="483"/>
-        </pc:sldMkLst>
-        <pc:spChg chg="mod">
-          <ac:chgData name="Mohammed Fasha" userId="cc64f42d-a1a6-4f08-b97b-0c37f877119f" providerId="ADAL" clId="{FEC9C214-E726-4192-8176-A8C9AACEB478}" dt="2025-05-16T05:43:13.101" v="125" actId="6549"/>
-          <ac:spMkLst>
-            <pc:docMk/>
-            <pc:sldMk cId="2297456757" sldId="483"/>
-            <ac:spMk id="5" creationId="{89403830-E271-DAA0-8838-E295A84A8B5B}"/>
-          </ac:spMkLst>
-        </pc:spChg>
-      </pc:sldChg>
-      <pc:sldChg chg="del">
-        <pc:chgData name="Mohammed Fasha" userId="cc64f42d-a1a6-4f08-b97b-0c37f877119f" providerId="ADAL" clId="{FEC9C214-E726-4192-8176-A8C9AACEB478}" dt="2025-05-16T05:43:36.510" v="126" actId="2696"/>
-        <pc:sldMkLst>
-          <pc:docMk/>
-          <pc:sldMk cId="1586650541" sldId="510"/>
-        </pc:sldMkLst>
-      </pc:sldChg>
-      <pc:sldChg chg="del">
-        <pc:chgData name="Mohammed Fasha" userId="cc64f42d-a1a6-4f08-b97b-0c37f877119f" providerId="ADAL" clId="{FEC9C214-E726-4192-8176-A8C9AACEB478}" dt="2025-05-16T05:43:36.510" v="126" actId="2696"/>
-        <pc:sldMkLst>
-          <pc:docMk/>
-          <pc:sldMk cId="1271956779" sldId="514"/>
-        </pc:sldMkLst>
-      </pc:sldChg>
-      <pc:sldChg chg="del">
-        <pc:chgData name="Mohammed Fasha" userId="cc64f42d-a1a6-4f08-b97b-0c37f877119f" providerId="ADAL" clId="{FEC9C214-E726-4192-8176-A8C9AACEB478}" dt="2025-05-16T05:43:36.510" v="126" actId="2696"/>
-        <pc:sldMkLst>
-          <pc:docMk/>
-          <pc:sldMk cId="2281221656" sldId="527"/>
-        </pc:sldMkLst>
-      </pc:sldChg>
-      <pc:sldChg chg="del">
-        <pc:chgData name="Mohammed Fasha" userId="cc64f42d-a1a6-4f08-b97b-0c37f877119f" providerId="ADAL" clId="{FEC9C214-E726-4192-8176-A8C9AACEB478}" dt="2025-05-16T05:43:36.510" v="126" actId="2696"/>
-        <pc:sldMkLst>
-          <pc:docMk/>
-          <pc:sldMk cId="2877973779" sldId="607"/>
-        </pc:sldMkLst>
-      </pc:sldChg>
-      <pc:sldChg chg="del">
-        <pc:chgData name="Mohammed Fasha" userId="cc64f42d-a1a6-4f08-b97b-0c37f877119f" providerId="ADAL" clId="{FEC9C214-E726-4192-8176-A8C9AACEB478}" dt="2025-05-16T05:43:36.510" v="126" actId="2696"/>
-        <pc:sldMkLst>
-          <pc:docMk/>
-          <pc:sldMk cId="21481256" sldId="611"/>
-        </pc:sldMkLst>
-      </pc:sldChg>
-      <pc:sldChg chg="del">
-        <pc:chgData name="Mohammed Fasha" userId="cc64f42d-a1a6-4f08-b97b-0c37f877119f" providerId="ADAL" clId="{FEC9C214-E726-4192-8176-A8C9AACEB478}" dt="2025-05-16T05:43:36.510" v="126" actId="2696"/>
-        <pc:sldMkLst>
-          <pc:docMk/>
-          <pc:sldMk cId="4040874025" sldId="612"/>
-        </pc:sldMkLst>
-      </pc:sldChg>
-      <pc:sldChg chg="del">
-        <pc:chgData name="Mohammed Fasha" userId="cc64f42d-a1a6-4f08-b97b-0c37f877119f" providerId="ADAL" clId="{FEC9C214-E726-4192-8176-A8C9AACEB478}" dt="2025-05-16T05:43:36.510" v="126" actId="2696"/>
-        <pc:sldMkLst>
-          <pc:docMk/>
-          <pc:sldMk cId="399592497" sldId="613"/>
-        </pc:sldMkLst>
-      </pc:sldChg>
-      <pc:sldChg chg="del">
-        <pc:chgData name="Mohammed Fasha" userId="cc64f42d-a1a6-4f08-b97b-0c37f877119f" providerId="ADAL" clId="{FEC9C214-E726-4192-8176-A8C9AACEB478}" dt="2025-05-16T05:43:36.510" v="126" actId="2696"/>
-        <pc:sldMkLst>
-          <pc:docMk/>
-          <pc:sldMk cId="3535314737" sldId="614"/>
-        </pc:sldMkLst>
-      </pc:sldChg>
-      <pc:sldChg chg="del">
-        <pc:chgData name="Mohammed Fasha" userId="cc64f42d-a1a6-4f08-b97b-0c37f877119f" providerId="ADAL" clId="{FEC9C214-E726-4192-8176-A8C9AACEB478}" dt="2025-05-16T05:43:36.510" v="126" actId="2696"/>
-        <pc:sldMkLst>
-          <pc:docMk/>
-          <pc:sldMk cId="627652750" sldId="615"/>
-        </pc:sldMkLst>
-      </pc:sldChg>
-      <pc:sldChg chg="del">
-        <pc:chgData name="Mohammed Fasha" userId="cc64f42d-a1a6-4f08-b97b-0c37f877119f" providerId="ADAL" clId="{FEC9C214-E726-4192-8176-A8C9AACEB478}" dt="2025-05-16T05:43:36.510" v="126" actId="2696"/>
-        <pc:sldMkLst>
-          <pc:docMk/>
-          <pc:sldMk cId="423212581" sldId="616"/>
-        </pc:sldMkLst>
-      </pc:sldChg>
-      <pc:sldChg chg="del">
-        <pc:chgData name="Mohammed Fasha" userId="cc64f42d-a1a6-4f08-b97b-0c37f877119f" providerId="ADAL" clId="{FEC9C214-E726-4192-8176-A8C9AACEB478}" dt="2025-05-16T05:43:36.510" v="126" actId="2696"/>
-        <pc:sldMkLst>
-          <pc:docMk/>
-          <pc:sldMk cId="3329135496" sldId="617"/>
-        </pc:sldMkLst>
-      </pc:sldChg>
-      <pc:sldChg chg="del">
-        <pc:chgData name="Mohammed Fasha" userId="cc64f42d-a1a6-4f08-b97b-0c37f877119f" providerId="ADAL" clId="{FEC9C214-E726-4192-8176-A8C9AACEB478}" dt="2025-05-16T05:43:36.510" v="126" actId="2696"/>
-        <pc:sldMkLst>
-          <pc:docMk/>
-          <pc:sldMk cId="1380276415" sldId="618"/>
-        </pc:sldMkLst>
-      </pc:sldChg>
-      <pc:sldChg chg="del">
-        <pc:chgData name="Mohammed Fasha" userId="cc64f42d-a1a6-4f08-b97b-0c37f877119f" providerId="ADAL" clId="{FEC9C214-E726-4192-8176-A8C9AACEB478}" dt="2025-05-16T05:43:36.510" v="126" actId="2696"/>
-        <pc:sldMkLst>
-          <pc:docMk/>
-          <pc:sldMk cId="246730148" sldId="619"/>
-        </pc:sldMkLst>
-      </pc:sldChg>
-      <pc:sldChg chg="del">
-        <pc:chgData name="Mohammed Fasha" userId="cc64f42d-a1a6-4f08-b97b-0c37f877119f" providerId="ADAL" clId="{FEC9C214-E726-4192-8176-A8C9AACEB478}" dt="2025-05-16T05:43:36.510" v="126" actId="2696"/>
-        <pc:sldMkLst>
-          <pc:docMk/>
-          <pc:sldMk cId="839834530" sldId="621"/>
-        </pc:sldMkLst>
-      </pc:sldChg>
-      <pc:sldChg chg="del">
-        <pc:chgData name="Mohammed Fasha" userId="cc64f42d-a1a6-4f08-b97b-0c37f877119f" providerId="ADAL" clId="{FEC9C214-E726-4192-8176-A8C9AACEB478}" dt="2025-05-16T05:43:36.510" v="126" actId="2696"/>
-        <pc:sldMkLst>
-          <pc:docMk/>
-          <pc:sldMk cId="3734309461" sldId="625"/>
-        </pc:sldMkLst>
-      </pc:sldChg>
-      <pc:sldChg chg="del">
-        <pc:chgData name="Mohammed Fasha" userId="cc64f42d-a1a6-4f08-b97b-0c37f877119f" providerId="ADAL" clId="{FEC9C214-E726-4192-8176-A8C9AACEB478}" dt="2025-05-16T05:43:36.510" v="126" actId="2696"/>
-        <pc:sldMkLst>
-          <pc:docMk/>
-          <pc:sldMk cId="4269580935" sldId="634"/>
-        </pc:sldMkLst>
-      </pc:sldChg>
-      <pc:sldChg chg="del">
-        <pc:chgData name="Mohammed Fasha" userId="cc64f42d-a1a6-4f08-b97b-0c37f877119f" providerId="ADAL" clId="{FEC9C214-E726-4192-8176-A8C9AACEB478}" dt="2025-05-16T05:43:36.510" v="126" actId="2696"/>
-        <pc:sldMkLst>
-          <pc:docMk/>
-          <pc:sldMk cId="2838240985" sldId="635"/>
-        </pc:sldMkLst>
-      </pc:sldChg>
-      <pc:sldChg chg="del">
-        <pc:chgData name="Mohammed Fasha" userId="cc64f42d-a1a6-4f08-b97b-0c37f877119f" providerId="ADAL" clId="{FEC9C214-E726-4192-8176-A8C9AACEB478}" dt="2025-05-16T05:43:36.510" v="126" actId="2696"/>
-        <pc:sldMkLst>
-          <pc:docMk/>
-          <pc:sldMk cId="1675291572" sldId="638"/>
-        </pc:sldMkLst>
-      </pc:sldChg>
-      <pc:sldChg chg="modSp del">
-        <pc:chgData name="Mohammed Fasha" userId="cc64f42d-a1a6-4f08-b97b-0c37f877119f" providerId="ADAL" clId="{FEC9C214-E726-4192-8176-A8C9AACEB478}" dt="2025-05-16T05:43:36.510" v="126" actId="2696"/>
-        <pc:sldMkLst>
-          <pc:docMk/>
-          <pc:sldMk cId="2145145303" sldId="640"/>
-        </pc:sldMkLst>
-      </pc:sldChg>
-      <pc:sldChg chg="del">
-        <pc:chgData name="Mohammed Fasha" userId="cc64f42d-a1a6-4f08-b97b-0c37f877119f" providerId="ADAL" clId="{FEC9C214-E726-4192-8176-A8C9AACEB478}" dt="2025-05-16T05:43:36.510" v="126" actId="2696"/>
-        <pc:sldMkLst>
-          <pc:docMk/>
-          <pc:sldMk cId="1135291414" sldId="643"/>
-        </pc:sldMkLst>
-      </pc:sldChg>
-      <pc:sldChg chg="del">
-        <pc:chgData name="Mohammed Fasha" userId="cc64f42d-a1a6-4f08-b97b-0c37f877119f" providerId="ADAL" clId="{FEC9C214-E726-4192-8176-A8C9AACEB478}" dt="2025-05-16T05:43:36.510" v="126" actId="2696"/>
-        <pc:sldMkLst>
-          <pc:docMk/>
-          <pc:sldMk cId="1030124935" sldId="644"/>
-        </pc:sldMkLst>
-      </pc:sldChg>
-      <pc:sldChg chg="del">
-        <pc:chgData name="Mohammed Fasha" userId="cc64f42d-a1a6-4f08-b97b-0c37f877119f" providerId="ADAL" clId="{FEC9C214-E726-4192-8176-A8C9AACEB478}" dt="2025-05-16T05:43:36.510" v="126" actId="2696"/>
-        <pc:sldMkLst>
-          <pc:docMk/>
-          <pc:sldMk cId="2168644593" sldId="645"/>
-        </pc:sldMkLst>
-      </pc:sldChg>
-      <pc:sldChg chg="del">
-        <pc:chgData name="Mohammed Fasha" userId="cc64f42d-a1a6-4f08-b97b-0c37f877119f" providerId="ADAL" clId="{FEC9C214-E726-4192-8176-A8C9AACEB478}" dt="2025-05-16T05:43:36.510" v="126" actId="2696"/>
-        <pc:sldMkLst>
-          <pc:docMk/>
-          <pc:sldMk cId="2743226386" sldId="646"/>
-        </pc:sldMkLst>
-      </pc:sldChg>
-      <pc:sldChg chg="del">
-        <pc:chgData name="Mohammed Fasha" userId="cc64f42d-a1a6-4f08-b97b-0c37f877119f" providerId="ADAL" clId="{FEC9C214-E726-4192-8176-A8C9AACEB478}" dt="2025-05-16T05:43:36.510" v="126" actId="2696"/>
-        <pc:sldMkLst>
-          <pc:docMk/>
-          <pc:sldMk cId="202107314" sldId="647"/>
-        </pc:sldMkLst>
-      </pc:sldChg>
-      <pc:sldChg chg="del">
-        <pc:chgData name="Mohammed Fasha" userId="cc64f42d-a1a6-4f08-b97b-0c37f877119f" providerId="ADAL" clId="{FEC9C214-E726-4192-8176-A8C9AACEB478}" dt="2025-05-16T05:43:36.510" v="126" actId="2696"/>
-        <pc:sldMkLst>
-          <pc:docMk/>
-          <pc:sldMk cId="662689605" sldId="649"/>
-        </pc:sldMkLst>
-      </pc:sldChg>
-      <pc:sldChg chg="del">
-        <pc:chgData name="Mohammed Fasha" userId="cc64f42d-a1a6-4f08-b97b-0c37f877119f" providerId="ADAL" clId="{FEC9C214-E726-4192-8176-A8C9AACEB478}" dt="2025-05-16T05:43:36.510" v="126" actId="2696"/>
-        <pc:sldMkLst>
-          <pc:docMk/>
-          <pc:sldMk cId="3942060319" sldId="650"/>
-        </pc:sldMkLst>
-      </pc:sldChg>
-      <pc:sldChg chg="del">
-        <pc:chgData name="Mohammed Fasha" userId="cc64f42d-a1a6-4f08-b97b-0c37f877119f" providerId="ADAL" clId="{FEC9C214-E726-4192-8176-A8C9AACEB478}" dt="2025-05-16T05:43:36.510" v="126" actId="2696"/>
-        <pc:sldMkLst>
-          <pc:docMk/>
-          <pc:sldMk cId="916802035" sldId="651"/>
-        </pc:sldMkLst>
-      </pc:sldChg>
-      <pc:sldChg chg="del">
-        <pc:chgData name="Mohammed Fasha" userId="cc64f42d-a1a6-4f08-b97b-0c37f877119f" providerId="ADAL" clId="{FEC9C214-E726-4192-8176-A8C9AACEB478}" dt="2025-05-16T05:43:36.510" v="126" actId="2696"/>
-        <pc:sldMkLst>
-          <pc:docMk/>
-          <pc:sldMk cId="3061130053" sldId="653"/>
-        </pc:sldMkLst>
-      </pc:sldChg>
-      <pc:sldChg chg="del">
-        <pc:chgData name="Mohammed Fasha" userId="cc64f42d-a1a6-4f08-b97b-0c37f877119f" providerId="ADAL" clId="{FEC9C214-E726-4192-8176-A8C9AACEB478}" dt="2025-05-16T05:43:36.510" v="126" actId="2696"/>
-        <pc:sldMkLst>
-          <pc:docMk/>
-          <pc:sldMk cId="3585687456" sldId="654"/>
-        </pc:sldMkLst>
-      </pc:sldChg>
-      <pc:sldChg chg="del">
-        <pc:chgData name="Mohammed Fasha" userId="cc64f42d-a1a6-4f08-b97b-0c37f877119f" providerId="ADAL" clId="{FEC9C214-E726-4192-8176-A8C9AACEB478}" dt="2025-05-16T05:43:36.510" v="126" actId="2696"/>
-        <pc:sldMkLst>
-          <pc:docMk/>
-          <pc:sldMk cId="2892622100" sldId="655"/>
-        </pc:sldMkLst>
-      </pc:sldChg>
-      <pc:sldChg chg="modSp del mod">
-        <pc:chgData name="Mohammed Fasha" userId="cc64f42d-a1a6-4f08-b97b-0c37f877119f" providerId="ADAL" clId="{FEC9C214-E726-4192-8176-A8C9AACEB478}" dt="2025-05-16T05:43:36.510" v="126" actId="2696"/>
-        <pc:sldMkLst>
-          <pc:docMk/>
-          <pc:sldMk cId="555764928" sldId="657"/>
-        </pc:sldMkLst>
-      </pc:sldChg>
-      <pc:sldChg chg="del">
-        <pc:chgData name="Mohammed Fasha" userId="cc64f42d-a1a6-4f08-b97b-0c37f877119f" providerId="ADAL" clId="{FEC9C214-E726-4192-8176-A8C9AACEB478}" dt="2025-05-16T05:43:36.510" v="126" actId="2696"/>
-        <pc:sldMkLst>
-          <pc:docMk/>
-          <pc:sldMk cId="1461426122" sldId="658"/>
-        </pc:sldMkLst>
-      </pc:sldChg>
-      <pc:sldChg chg="del">
-        <pc:chgData name="Mohammed Fasha" userId="cc64f42d-a1a6-4f08-b97b-0c37f877119f" providerId="ADAL" clId="{FEC9C214-E726-4192-8176-A8C9AACEB478}" dt="2025-05-16T05:43:36.510" v="126" actId="2696"/>
-        <pc:sldMkLst>
-          <pc:docMk/>
-          <pc:sldMk cId="2990045589" sldId="659"/>
-        </pc:sldMkLst>
-      </pc:sldChg>
-      <pc:sldChg chg="del">
-        <pc:chgData name="Mohammed Fasha" userId="cc64f42d-a1a6-4f08-b97b-0c37f877119f" providerId="ADAL" clId="{FEC9C214-E726-4192-8176-A8C9AACEB478}" dt="2025-05-16T05:43:36.510" v="126" actId="2696"/>
-        <pc:sldMkLst>
-          <pc:docMk/>
-          <pc:sldMk cId="2575039538" sldId="660"/>
-        </pc:sldMkLst>
-      </pc:sldChg>
-      <pc:sldChg chg="del">
-        <pc:chgData name="Mohammed Fasha" userId="cc64f42d-a1a6-4f08-b97b-0c37f877119f" providerId="ADAL" clId="{FEC9C214-E726-4192-8176-A8C9AACEB478}" dt="2025-05-16T05:43:36.510" v="126" actId="2696"/>
-        <pc:sldMkLst>
-          <pc:docMk/>
-          <pc:sldMk cId="1554491934" sldId="661"/>
-        </pc:sldMkLst>
-      </pc:sldChg>
-      <pc:sldChg chg="del">
-        <pc:chgData name="Mohammed Fasha" userId="cc64f42d-a1a6-4f08-b97b-0c37f877119f" providerId="ADAL" clId="{FEC9C214-E726-4192-8176-A8C9AACEB478}" dt="2025-05-16T05:43:36.510" v="126" actId="2696"/>
-        <pc:sldMkLst>
-          <pc:docMk/>
-          <pc:sldMk cId="691538069" sldId="662"/>
-        </pc:sldMkLst>
-      </pc:sldChg>
-      <pc:sldChg chg="del">
-        <pc:chgData name="Mohammed Fasha" userId="cc64f42d-a1a6-4f08-b97b-0c37f877119f" providerId="ADAL" clId="{FEC9C214-E726-4192-8176-A8C9AACEB478}" dt="2025-05-16T05:43:36.510" v="126" actId="2696"/>
-        <pc:sldMkLst>
-          <pc:docMk/>
-          <pc:sldMk cId="3980180774" sldId="663"/>
-        </pc:sldMkLst>
-      </pc:sldChg>
-      <pc:sldChg chg="del">
-        <pc:chgData name="Mohammed Fasha" userId="cc64f42d-a1a6-4f08-b97b-0c37f877119f" providerId="ADAL" clId="{FEC9C214-E726-4192-8176-A8C9AACEB478}" dt="2025-05-16T05:43:36.510" v="126" actId="2696"/>
-        <pc:sldMkLst>
-          <pc:docMk/>
-          <pc:sldMk cId="1728680596" sldId="664"/>
-        </pc:sldMkLst>
-      </pc:sldChg>
-      <pc:sldChg chg="del">
-        <pc:chgData name="Mohammed Fasha" userId="cc64f42d-a1a6-4f08-b97b-0c37f877119f" providerId="ADAL" clId="{FEC9C214-E726-4192-8176-A8C9AACEB478}" dt="2025-05-16T05:43:36.510" v="126" actId="2696"/>
-        <pc:sldMkLst>
-          <pc:docMk/>
-          <pc:sldMk cId="148099094" sldId="665"/>
-        </pc:sldMkLst>
-      </pc:sldChg>
-      <pc:sldChg chg="del">
-        <pc:chgData name="Mohammed Fasha" userId="cc64f42d-a1a6-4f08-b97b-0c37f877119f" providerId="ADAL" clId="{FEC9C214-E726-4192-8176-A8C9AACEB478}" dt="2025-05-16T05:43:36.510" v="126" actId="2696"/>
-        <pc:sldMkLst>
-          <pc:docMk/>
-          <pc:sldMk cId="898885298" sldId="667"/>
-        </pc:sldMkLst>
-      </pc:sldChg>
-      <pc:sldChg chg="del">
-        <pc:chgData name="Mohammed Fasha" userId="cc64f42d-a1a6-4f08-b97b-0c37f877119f" providerId="ADAL" clId="{FEC9C214-E726-4192-8176-A8C9AACEB478}" dt="2025-05-16T05:43:36.510" v="126" actId="2696"/>
-        <pc:sldMkLst>
-          <pc:docMk/>
-          <pc:sldMk cId="2652660250" sldId="668"/>
-        </pc:sldMkLst>
-      </pc:sldChg>
-      <pc:sldChg chg="del">
-        <pc:chgData name="Mohammed Fasha" userId="cc64f42d-a1a6-4f08-b97b-0c37f877119f" providerId="ADAL" clId="{FEC9C214-E726-4192-8176-A8C9AACEB478}" dt="2025-05-16T05:43:36.510" v="126" actId="2696"/>
-        <pc:sldMkLst>
-          <pc:docMk/>
-          <pc:sldMk cId="2680231355" sldId="669"/>
-        </pc:sldMkLst>
-      </pc:sldChg>
-      <pc:sldChg chg="modSp del mod">
-        <pc:chgData name="Mohammed Fasha" userId="cc64f42d-a1a6-4f08-b97b-0c37f877119f" providerId="ADAL" clId="{FEC9C214-E726-4192-8176-A8C9AACEB478}" dt="2025-05-16T05:43:36.510" v="126" actId="2696"/>
-        <pc:sldMkLst>
-          <pc:docMk/>
-          <pc:sldMk cId="1960150938" sldId="670"/>
-        </pc:sldMkLst>
-      </pc:sldChg>
-      <pc:sldChg chg="del">
-        <pc:chgData name="Mohammed Fasha" userId="cc64f42d-a1a6-4f08-b97b-0c37f877119f" providerId="ADAL" clId="{FEC9C214-E726-4192-8176-A8C9AACEB478}" dt="2025-05-16T05:43:36.510" v="126" actId="2696"/>
-        <pc:sldMkLst>
-          <pc:docMk/>
-          <pc:sldMk cId="3605011436" sldId="671"/>
-        </pc:sldMkLst>
-      </pc:sldChg>
-      <pc:sldChg chg="del">
-        <pc:chgData name="Mohammed Fasha" userId="cc64f42d-a1a6-4f08-b97b-0c37f877119f" providerId="ADAL" clId="{FEC9C214-E726-4192-8176-A8C9AACEB478}" dt="2025-05-16T05:43:36.510" v="126" actId="2696"/>
-        <pc:sldMkLst>
-          <pc:docMk/>
-          <pc:sldMk cId="1620993364" sldId="672"/>
-        </pc:sldMkLst>
-      </pc:sldChg>
-      <pc:sldChg chg="del">
-        <pc:chgData name="Mohammed Fasha" userId="cc64f42d-a1a6-4f08-b97b-0c37f877119f" providerId="ADAL" clId="{FEC9C214-E726-4192-8176-A8C9AACEB478}" dt="2025-05-16T05:43:36.510" v="126" actId="2696"/>
-        <pc:sldMkLst>
-          <pc:docMk/>
-          <pc:sldMk cId="2865119215" sldId="674"/>
-        </pc:sldMkLst>
-      </pc:sldChg>
-      <pc:sldChg chg="del">
-        <pc:chgData name="Mohammed Fasha" userId="cc64f42d-a1a6-4f08-b97b-0c37f877119f" providerId="ADAL" clId="{FEC9C214-E726-4192-8176-A8C9AACEB478}" dt="2025-05-16T05:43:36.510" v="126" actId="2696"/>
-        <pc:sldMkLst>
-          <pc:docMk/>
-          <pc:sldMk cId="2170303756" sldId="675"/>
-        </pc:sldMkLst>
-      </pc:sldChg>
-      <pc:sldChg chg="del">
-        <pc:chgData name="Mohammed Fasha" userId="cc64f42d-a1a6-4f08-b97b-0c37f877119f" providerId="ADAL" clId="{FEC9C214-E726-4192-8176-A8C9AACEB478}" dt="2025-05-16T05:43:36.510" v="126" actId="2696"/>
-        <pc:sldMkLst>
-          <pc:docMk/>
-          <pc:sldMk cId="1577854815" sldId="676"/>
-        </pc:sldMkLst>
-      </pc:sldChg>
-      <pc:sldChg chg="del">
-        <pc:chgData name="Mohammed Fasha" userId="cc64f42d-a1a6-4f08-b97b-0c37f877119f" providerId="ADAL" clId="{FEC9C214-E726-4192-8176-A8C9AACEB478}" dt="2025-05-16T05:43:36.510" v="126" actId="2696"/>
-        <pc:sldMkLst>
-          <pc:docMk/>
-          <pc:sldMk cId="139882925" sldId="677"/>
-        </pc:sldMkLst>
-      </pc:sldChg>
-      <pc:sldChg chg="del">
-        <pc:chgData name="Mohammed Fasha" userId="cc64f42d-a1a6-4f08-b97b-0c37f877119f" providerId="ADAL" clId="{FEC9C214-E726-4192-8176-A8C9AACEB478}" dt="2025-05-16T05:43:36.510" v="126" actId="2696"/>
-        <pc:sldMkLst>
-          <pc:docMk/>
-          <pc:sldMk cId="4146654093" sldId="678"/>
-        </pc:sldMkLst>
-      </pc:sldChg>
-      <pc:sldChg chg="del">
-        <pc:chgData name="Mohammed Fasha" userId="cc64f42d-a1a6-4f08-b97b-0c37f877119f" providerId="ADAL" clId="{FEC9C214-E726-4192-8176-A8C9AACEB478}" dt="2025-05-16T05:43:36.510" v="126" actId="2696"/>
-        <pc:sldMkLst>
-          <pc:docMk/>
-          <pc:sldMk cId="3454522070" sldId="679"/>
-        </pc:sldMkLst>
-      </pc:sldChg>
-      <pc:sldChg chg="del">
-        <pc:chgData name="Mohammed Fasha" userId="cc64f42d-a1a6-4f08-b97b-0c37f877119f" providerId="ADAL" clId="{FEC9C214-E726-4192-8176-A8C9AACEB478}" dt="2025-05-16T05:43:36.510" v="126" actId="2696"/>
-        <pc:sldMkLst>
-          <pc:docMk/>
-          <pc:sldMk cId="2856814121" sldId="681"/>
-        </pc:sldMkLst>
-      </pc:sldChg>
-      <pc:sldChg chg="del">
-        <pc:chgData name="Mohammed Fasha" userId="cc64f42d-a1a6-4f08-b97b-0c37f877119f" providerId="ADAL" clId="{FEC9C214-E726-4192-8176-A8C9AACEB478}" dt="2025-05-16T05:43:36.510" v="126" actId="2696"/>
-        <pc:sldMkLst>
-          <pc:docMk/>
-          <pc:sldMk cId="1377124484" sldId="682"/>
-        </pc:sldMkLst>
-      </pc:sldChg>
-      <pc:sldChg chg="del">
-        <pc:chgData name="Mohammed Fasha" userId="cc64f42d-a1a6-4f08-b97b-0c37f877119f" providerId="ADAL" clId="{FEC9C214-E726-4192-8176-A8C9AACEB478}" dt="2025-05-16T05:43:36.510" v="126" actId="2696"/>
-        <pc:sldMkLst>
-          <pc:docMk/>
-          <pc:sldMk cId="2630096202" sldId="683"/>
-        </pc:sldMkLst>
-      </pc:sldChg>
-      <pc:sldChg chg="del">
-        <pc:chgData name="Mohammed Fasha" userId="cc64f42d-a1a6-4f08-b97b-0c37f877119f" providerId="ADAL" clId="{FEC9C214-E726-4192-8176-A8C9AACEB478}" dt="2025-05-16T05:43:36.510" v="126" actId="2696"/>
-        <pc:sldMkLst>
-          <pc:docMk/>
-          <pc:sldMk cId="3328652623" sldId="684"/>
-        </pc:sldMkLst>
-      </pc:sldChg>
-      <pc:sldChg chg="del">
-        <pc:chgData name="Mohammed Fasha" userId="cc64f42d-a1a6-4f08-b97b-0c37f877119f" providerId="ADAL" clId="{FEC9C214-E726-4192-8176-A8C9AACEB478}" dt="2025-05-16T05:43:36.510" v="126" actId="2696"/>
-        <pc:sldMkLst>
-          <pc:docMk/>
-          <pc:sldMk cId="916102856" sldId="685"/>
-        </pc:sldMkLst>
-      </pc:sldChg>
-      <pc:sldChg chg="del">
-        <pc:chgData name="Mohammed Fasha" userId="cc64f42d-a1a6-4f08-b97b-0c37f877119f" providerId="ADAL" clId="{FEC9C214-E726-4192-8176-A8C9AACEB478}" dt="2025-05-16T05:43:36.510" v="126" actId="2696"/>
-        <pc:sldMkLst>
-          <pc:docMk/>
-          <pc:sldMk cId="2620697854" sldId="686"/>
-        </pc:sldMkLst>
-      </pc:sldChg>
-      <pc:sldChg chg="del">
-        <pc:chgData name="Mohammed Fasha" userId="cc64f42d-a1a6-4f08-b97b-0c37f877119f" providerId="ADAL" clId="{FEC9C214-E726-4192-8176-A8C9AACEB478}" dt="2025-05-16T05:43:36.510" v="126" actId="2696"/>
-        <pc:sldMkLst>
-          <pc:docMk/>
-          <pc:sldMk cId="140683555" sldId="687"/>
-        </pc:sldMkLst>
-      </pc:sldChg>
-      <pc:sldChg chg="del">
-        <pc:chgData name="Mohammed Fasha" userId="cc64f42d-a1a6-4f08-b97b-0c37f877119f" providerId="ADAL" clId="{FEC9C214-E726-4192-8176-A8C9AACEB478}" dt="2025-05-16T05:43:36.510" v="126" actId="2696"/>
-        <pc:sldMkLst>
-          <pc:docMk/>
-          <pc:sldMk cId="1788308240" sldId="688"/>
-        </pc:sldMkLst>
-      </pc:sldChg>
-      <pc:sldChg chg="del">
-        <pc:chgData name="Mohammed Fasha" userId="cc64f42d-a1a6-4f08-b97b-0c37f877119f" providerId="ADAL" clId="{FEC9C214-E726-4192-8176-A8C9AACEB478}" dt="2025-05-16T05:43:36.510" v="126" actId="2696"/>
-        <pc:sldMkLst>
-          <pc:docMk/>
-          <pc:sldMk cId="1660737293" sldId="689"/>
-        </pc:sldMkLst>
-      </pc:sldChg>
-      <pc:sldChg chg="del">
-        <pc:chgData name="Mohammed Fasha" userId="cc64f42d-a1a6-4f08-b97b-0c37f877119f" providerId="ADAL" clId="{FEC9C214-E726-4192-8176-A8C9AACEB478}" dt="2025-05-16T05:43:36.510" v="126" actId="2696"/>
-        <pc:sldMkLst>
-          <pc:docMk/>
-          <pc:sldMk cId="1987101698" sldId="690"/>
-        </pc:sldMkLst>
-      </pc:sldChg>
-      <pc:sldChg chg="del">
-        <pc:chgData name="Mohammed Fasha" userId="cc64f42d-a1a6-4f08-b97b-0c37f877119f" providerId="ADAL" clId="{FEC9C214-E726-4192-8176-A8C9AACEB478}" dt="2025-05-16T05:43:36.510" v="126" actId="2696"/>
-        <pc:sldMkLst>
-          <pc:docMk/>
-          <pc:sldMk cId="1982708772" sldId="692"/>
-        </pc:sldMkLst>
-      </pc:sldChg>
-      <pc:sldChg chg="del">
-        <pc:chgData name="Mohammed Fasha" userId="cc64f42d-a1a6-4f08-b97b-0c37f877119f" providerId="ADAL" clId="{FEC9C214-E726-4192-8176-A8C9AACEB478}" dt="2025-05-16T05:43:36.510" v="126" actId="2696"/>
-        <pc:sldMkLst>
-          <pc:docMk/>
-          <pc:sldMk cId="3424197979" sldId="694"/>
-        </pc:sldMkLst>
-      </pc:sldChg>
-      <pc:sldChg chg="del">
-        <pc:chgData name="Mohammed Fasha" userId="cc64f42d-a1a6-4f08-b97b-0c37f877119f" providerId="ADAL" clId="{FEC9C214-E726-4192-8176-A8C9AACEB478}" dt="2025-05-16T05:43:36.510" v="126" actId="2696"/>
-        <pc:sldMkLst>
-          <pc:docMk/>
-          <pc:sldMk cId="1697141369" sldId="695"/>
-        </pc:sldMkLst>
-      </pc:sldChg>
-      <pc:sldChg chg="del">
-        <pc:chgData name="Mohammed Fasha" userId="cc64f42d-a1a6-4f08-b97b-0c37f877119f" providerId="ADAL" clId="{FEC9C214-E726-4192-8176-A8C9AACEB478}" dt="2025-05-16T05:43:36.510" v="126" actId="2696"/>
-        <pc:sldMkLst>
-          <pc:docMk/>
-          <pc:sldMk cId="1317643237" sldId="696"/>
-        </pc:sldMkLst>
-      </pc:sldChg>
-      <pc:sldChg chg="del">
-        <pc:chgData name="Mohammed Fasha" userId="cc64f42d-a1a6-4f08-b97b-0c37f877119f" providerId="ADAL" clId="{FEC9C214-E726-4192-8176-A8C9AACEB478}" dt="2025-05-16T05:43:36.510" v="126" actId="2696"/>
-        <pc:sldMkLst>
-          <pc:docMk/>
-          <pc:sldMk cId="265576630" sldId="698"/>
-        </pc:sldMkLst>
-      </pc:sldChg>
-      <pc:sldChg chg="del">
-        <pc:chgData name="Mohammed Fasha" userId="cc64f42d-a1a6-4f08-b97b-0c37f877119f" providerId="ADAL" clId="{FEC9C214-E726-4192-8176-A8C9AACEB478}" dt="2025-05-16T05:43:36.510" v="126" actId="2696"/>
-        <pc:sldMkLst>
-          <pc:docMk/>
-          <pc:sldMk cId="4247717824" sldId="700"/>
-        </pc:sldMkLst>
-      </pc:sldChg>
-      <pc:sldChg chg="del">
-        <pc:chgData name="Mohammed Fasha" userId="cc64f42d-a1a6-4f08-b97b-0c37f877119f" providerId="ADAL" clId="{FEC9C214-E726-4192-8176-A8C9AACEB478}" dt="2025-05-16T05:43:36.510" v="126" actId="2696"/>
-        <pc:sldMkLst>
-          <pc:docMk/>
-          <pc:sldMk cId="3085160177" sldId="704"/>
-        </pc:sldMkLst>
-      </pc:sldChg>
-      <pc:sldChg chg="del">
-        <pc:chgData name="Mohammed Fasha" userId="cc64f42d-a1a6-4f08-b97b-0c37f877119f" providerId="ADAL" clId="{FEC9C214-E726-4192-8176-A8C9AACEB478}" dt="2025-05-16T05:43:36.510" v="126" actId="2696"/>
-        <pc:sldMkLst>
-          <pc:docMk/>
-          <pc:sldMk cId="1862107672" sldId="705"/>
-        </pc:sldMkLst>
-      </pc:sldChg>
-      <pc:sldChg chg="modSp del mod">
-        <pc:chgData name="Mohammed Fasha" userId="cc64f42d-a1a6-4f08-b97b-0c37f877119f" providerId="ADAL" clId="{FEC9C214-E726-4192-8176-A8C9AACEB478}" dt="2025-05-16T05:43:36.510" v="126" actId="2696"/>
-        <pc:sldMkLst>
-          <pc:docMk/>
-          <pc:sldMk cId="1142780366" sldId="706"/>
-        </pc:sldMkLst>
-      </pc:sldChg>
-      <pc:sldChg chg="del">
-        <pc:chgData name="Mohammed Fasha" userId="cc64f42d-a1a6-4f08-b97b-0c37f877119f" providerId="ADAL" clId="{FEC9C214-E726-4192-8176-A8C9AACEB478}" dt="2025-05-16T05:43:36.510" v="126" actId="2696"/>
-        <pc:sldMkLst>
-          <pc:docMk/>
-          <pc:sldMk cId="67871309" sldId="709"/>
-        </pc:sldMkLst>
-      </pc:sldChg>
-      <pc:sldChg chg="del">
-        <pc:chgData name="Mohammed Fasha" userId="cc64f42d-a1a6-4f08-b97b-0c37f877119f" providerId="ADAL" clId="{FEC9C214-E726-4192-8176-A8C9AACEB478}" dt="2025-05-16T05:43:36.510" v="126" actId="2696"/>
-        <pc:sldMkLst>
-          <pc:docMk/>
-          <pc:sldMk cId="4114896152" sldId="710"/>
-        </pc:sldMkLst>
-      </pc:sldChg>
-      <pc:sldChg chg="del">
-        <pc:chgData name="Mohammed Fasha" userId="cc64f42d-a1a6-4f08-b97b-0c37f877119f" providerId="ADAL" clId="{FEC9C214-E726-4192-8176-A8C9AACEB478}" dt="2025-05-16T05:43:36.510" v="126" actId="2696"/>
-        <pc:sldMkLst>
-          <pc:docMk/>
-          <pc:sldMk cId="3794385322" sldId="711"/>
-        </pc:sldMkLst>
-      </pc:sldChg>
-      <pc:sldChg chg="del">
-        <pc:chgData name="Mohammed Fasha" userId="cc64f42d-a1a6-4f08-b97b-0c37f877119f" providerId="ADAL" clId="{FEC9C214-E726-4192-8176-A8C9AACEB478}" dt="2025-05-16T05:43:36.510" v="126" actId="2696"/>
-        <pc:sldMkLst>
-          <pc:docMk/>
-          <pc:sldMk cId="3701206727" sldId="712"/>
-        </pc:sldMkLst>
-      </pc:sldChg>
-      <pc:sldChg chg="del">
-        <pc:chgData name="Mohammed Fasha" userId="cc64f42d-a1a6-4f08-b97b-0c37f877119f" providerId="ADAL" clId="{FEC9C214-E726-4192-8176-A8C9AACEB478}" dt="2025-05-16T05:43:36.510" v="126" actId="2696"/>
-        <pc:sldMkLst>
-          <pc:docMk/>
-          <pc:sldMk cId="1499972066" sldId="713"/>
-        </pc:sldMkLst>
-      </pc:sldChg>
-      <pc:sldChg chg="del">
-        <pc:chgData name="Mohammed Fasha" userId="cc64f42d-a1a6-4f08-b97b-0c37f877119f" providerId="ADAL" clId="{FEC9C214-E726-4192-8176-A8C9AACEB478}" dt="2025-05-16T05:43:36.510" v="126" actId="2696"/>
-        <pc:sldMkLst>
-          <pc:docMk/>
-          <pc:sldMk cId="1270641495" sldId="714"/>
-        </pc:sldMkLst>
-      </pc:sldChg>
-      <pc:sldChg chg="modSp del mod">
-        <pc:chgData name="Mohammed Fasha" userId="cc64f42d-a1a6-4f08-b97b-0c37f877119f" providerId="ADAL" clId="{FEC9C214-E726-4192-8176-A8C9AACEB478}" dt="2025-05-16T05:43:36.510" v="126" actId="2696"/>
-        <pc:sldMkLst>
-          <pc:docMk/>
-          <pc:sldMk cId="1096386322" sldId="715"/>
-        </pc:sldMkLst>
-      </pc:sldChg>
-      <pc:sldChg chg="modSp del mod">
-        <pc:chgData name="Mohammed Fasha" userId="cc64f42d-a1a6-4f08-b97b-0c37f877119f" providerId="ADAL" clId="{FEC9C214-E726-4192-8176-A8C9AACEB478}" dt="2025-05-16T05:43:36.510" v="126" actId="2696"/>
-        <pc:sldMkLst>
-          <pc:docMk/>
-          <pc:sldMk cId="1784058309" sldId="716"/>
-        </pc:sldMkLst>
-      </pc:sldChg>
-      <pc:sldChg chg="modSp del mod">
-        <pc:chgData name="Mohammed Fasha" userId="cc64f42d-a1a6-4f08-b97b-0c37f877119f" providerId="ADAL" clId="{FEC9C214-E726-4192-8176-A8C9AACEB478}" dt="2025-05-16T05:43:36.510" v="126" actId="2696"/>
-        <pc:sldMkLst>
-          <pc:docMk/>
-          <pc:sldMk cId="3139017106" sldId="717"/>
-        </pc:sldMkLst>
-      </pc:sldChg>
-      <pc:sldChg chg="del">
-        <pc:chgData name="Mohammed Fasha" userId="cc64f42d-a1a6-4f08-b97b-0c37f877119f" providerId="ADAL" clId="{FEC9C214-E726-4192-8176-A8C9AACEB478}" dt="2025-05-16T05:43:36.510" v="126" actId="2696"/>
-        <pc:sldMkLst>
-          <pc:docMk/>
-          <pc:sldMk cId="3043812923" sldId="718"/>
-        </pc:sldMkLst>
-      </pc:sldChg>
-      <pc:sldChg chg="modSp del mod">
-        <pc:chgData name="Mohammed Fasha" userId="cc64f42d-a1a6-4f08-b97b-0c37f877119f" providerId="ADAL" clId="{FEC9C214-E726-4192-8176-A8C9AACEB478}" dt="2025-05-12T03:04:56.963" v="45" actId="2696"/>
-        <pc:sldMkLst>
-          <pc:docMk/>
-          <pc:sldMk cId="666527140" sldId="725"/>
-        </pc:sldMkLst>
-      </pc:sldChg>
-      <pc:sldChg chg="add del">
-        <pc:chgData name="Mohammed Fasha" userId="cc64f42d-a1a6-4f08-b97b-0c37f877119f" providerId="ADAL" clId="{FEC9C214-E726-4192-8176-A8C9AACEB478}" dt="2025-05-16T05:43:36.510" v="126" actId="2696"/>
-        <pc:sldMkLst>
-          <pc:docMk/>
-          <pc:sldMk cId="2280465272" sldId="725"/>
-        </pc:sldMkLst>
-      </pc:sldChg>
-      <pc:sldChg chg="del">
-        <pc:chgData name="Mohammed Fasha" userId="cc64f42d-a1a6-4f08-b97b-0c37f877119f" providerId="ADAL" clId="{FEC9C214-E726-4192-8176-A8C9AACEB478}" dt="2025-05-16T05:43:36.510" v="126" actId="2696"/>
-        <pc:sldMkLst>
-          <pc:docMk/>
-          <pc:sldMk cId="3660604927" sldId="726"/>
-        </pc:sldMkLst>
-      </pc:sldChg>
-      <pc:sldChg chg="del">
-        <pc:chgData name="Mohammed Fasha" userId="cc64f42d-a1a6-4f08-b97b-0c37f877119f" providerId="ADAL" clId="{FEC9C214-E726-4192-8176-A8C9AACEB478}" dt="2025-05-16T05:43:36.510" v="126" actId="2696"/>
-        <pc:sldMkLst>
-          <pc:docMk/>
-          <pc:sldMk cId="4051640529" sldId="728"/>
-        </pc:sldMkLst>
-      </pc:sldChg>
-      <pc:sldChg chg="modSp new del mod">
-        <pc:chgData name="Mohammed Fasha" userId="cc64f42d-a1a6-4f08-b97b-0c37f877119f" providerId="ADAL" clId="{FEC9C214-E726-4192-8176-A8C9AACEB478}" dt="2025-05-12T03:11:40.927" v="51" actId="47"/>
-        <pc:sldMkLst>
-          <pc:docMk/>
-          <pc:sldMk cId="1223704259" sldId="729"/>
-        </pc:sldMkLst>
-      </pc:sldChg>
-      <pc:sldChg chg="add del">
-        <pc:chgData name="Mohammed Fasha" userId="cc64f42d-a1a6-4f08-b97b-0c37f877119f" providerId="ADAL" clId="{FEC9C214-E726-4192-8176-A8C9AACEB478}" dt="2025-05-12T03:06:57.298" v="49"/>
-        <pc:sldMkLst>
-          <pc:docMk/>
-          <pc:sldMk cId="3927078588" sldId="730"/>
-        </pc:sldMkLst>
-      </pc:sldChg>
-    </pc:docChg>
-  </pc:docChgLst>
-  <pc:docChgLst>
-    <pc:chgData name="Mohammed Fasha" userId="cc64f42d-a1a6-4f08-b97b-0c37f877119f" providerId="ADAL" clId="{70766A0F-128E-4419-8252-2D4890C8AA84}"/>
-    <pc:docChg chg="modSld">
-      <pc:chgData name="Mohammed Fasha" userId="cc64f42d-a1a6-4f08-b97b-0c37f877119f" providerId="ADAL" clId="{70766A0F-128E-4419-8252-2D4890C8AA84}" dt="2025-07-21T16:48:29.594" v="0" actId="6549"/>
-      <pc:docMkLst>
-        <pc:docMk/>
-      </pc:docMkLst>
-      <pc:sldChg chg="modSp mod">
-        <pc:chgData name="Mohammed Fasha" userId="cc64f42d-a1a6-4f08-b97b-0c37f877119f" providerId="ADAL" clId="{70766A0F-128E-4419-8252-2D4890C8AA84}" dt="2025-07-21T16:48:29.594" v="0" actId="6549"/>
-        <pc:sldMkLst>
-          <pc:docMk/>
-          <pc:sldMk cId="2297456757" sldId="483"/>
-        </pc:sldMkLst>
-        <pc:spChg chg="mod">
-          <ac:chgData name="Mohammed Fasha" userId="cc64f42d-a1a6-4f08-b97b-0c37f877119f" providerId="ADAL" clId="{70766A0F-128E-4419-8252-2D4890C8AA84}" dt="2025-07-21T16:48:29.594" v="0" actId="6549"/>
-          <ac:spMkLst>
-            <pc:docMk/>
-            <pc:sldMk cId="2297456757" sldId="483"/>
-            <ac:spMk id="5" creationId="{89403830-E271-DAA0-8838-E295A84A8B5B}"/>
-          </ac:spMkLst>
-        </pc:spChg>
-      </pc:sldChg>
-    </pc:docChg>
-  </pc:docChgLst>
-  <pc:docChgLst>
-    <pc:chgData name="Mohammed Fasha" userId="cc64f42d-a1a6-4f08-b97b-0c37f877119f" providerId="ADAL" clId="{BECD4A7F-C1AF-4585-8C31-FE7D4FE3ED16}"/>
-    <pc:docChg chg="undo redo custSel addSld delSld modSld sldOrd">
-      <pc:chgData name="Mohammed Fasha" userId="cc64f42d-a1a6-4f08-b97b-0c37f877119f" providerId="ADAL" clId="{BECD4A7F-C1AF-4585-8C31-FE7D4FE3ED16}" dt="2025-01-05T16:36:16.605" v="1945" actId="1076"/>
-      <pc:docMkLst>
-        <pc:docMk/>
-      </pc:docMkLst>
-      <pc:sldChg chg="modSp mod">
-        <pc:chgData name="Mohammed Fasha" userId="cc64f42d-a1a6-4f08-b97b-0c37f877119f" providerId="ADAL" clId="{BECD4A7F-C1AF-4585-8C31-FE7D4FE3ED16}" dt="2024-12-30T18:47:27.683" v="988" actId="20577"/>
-        <pc:sldMkLst>
-          <pc:docMk/>
-          <pc:sldMk cId="2281221656" sldId="527"/>
-        </pc:sldMkLst>
-      </pc:sldChg>
-      <pc:sldChg chg="modSp mod">
-        <pc:chgData name="Mohammed Fasha" userId="cc64f42d-a1a6-4f08-b97b-0c37f877119f" providerId="ADAL" clId="{BECD4A7F-C1AF-4585-8C31-FE7D4FE3ED16}" dt="2024-12-27T13:59:26.893" v="366" actId="20577"/>
-        <pc:sldMkLst>
-          <pc:docMk/>
-          <pc:sldMk cId="3474268344" sldId="596"/>
-        </pc:sldMkLst>
-      </pc:sldChg>
-      <pc:sldChg chg="modSp mod">
-        <pc:chgData name="Mohammed Fasha" userId="cc64f42d-a1a6-4f08-b97b-0c37f877119f" providerId="ADAL" clId="{BECD4A7F-C1AF-4585-8C31-FE7D4FE3ED16}" dt="2024-12-30T18:44:34.649" v="884" actId="20577"/>
-        <pc:sldMkLst>
-          <pc:docMk/>
-          <pc:sldMk cId="916802035" sldId="651"/>
-        </pc:sldMkLst>
-      </pc:sldChg>
-      <pc:sldChg chg="del">
-        <pc:chgData name="Mohammed Fasha" userId="cc64f42d-a1a6-4f08-b97b-0c37f877119f" providerId="ADAL" clId="{BECD4A7F-C1AF-4585-8C31-FE7D4FE3ED16}" dt="2025-01-05T14:42:38.675" v="989" actId="2696"/>
-        <pc:sldMkLst>
-          <pc:docMk/>
-          <pc:sldMk cId="426516858" sldId="662"/>
-        </pc:sldMkLst>
-      </pc:sldChg>
-      <pc:sldChg chg="modSp add del mod">
-        <pc:chgData name="Mohammed Fasha" userId="cc64f42d-a1a6-4f08-b97b-0c37f877119f" providerId="ADAL" clId="{BECD4A7F-C1AF-4585-8C31-FE7D4FE3ED16}" dt="2025-01-05T16:34:59.233" v="1926" actId="20577"/>
-        <pc:sldMkLst>
-          <pc:docMk/>
-          <pc:sldMk cId="691538069" sldId="662"/>
-        </pc:sldMkLst>
-      </pc:sldChg>
-      <pc:sldChg chg="del">
-        <pc:chgData name="Mohammed Fasha" userId="cc64f42d-a1a6-4f08-b97b-0c37f877119f" providerId="ADAL" clId="{BECD4A7F-C1AF-4585-8C31-FE7D4FE3ED16}" dt="2025-01-05T14:42:38.675" v="989" actId="2696"/>
-        <pc:sldMkLst>
-          <pc:docMk/>
-          <pc:sldMk cId="895445062" sldId="663"/>
-        </pc:sldMkLst>
-      </pc:sldChg>
-      <pc:sldChg chg="add del">
-        <pc:chgData name="Mohammed Fasha" userId="cc64f42d-a1a6-4f08-b97b-0c37f877119f" providerId="ADAL" clId="{BECD4A7F-C1AF-4585-8C31-FE7D4FE3ED16}" dt="2025-01-05T14:43:16.100" v="993" actId="2696"/>
-        <pc:sldMkLst>
-          <pc:docMk/>
-          <pc:sldMk cId="3980180774" sldId="663"/>
-        </pc:sldMkLst>
-      </pc:sldChg>
-      <pc:sldChg chg="add del">
-        <pc:chgData name="Mohammed Fasha" userId="cc64f42d-a1a6-4f08-b97b-0c37f877119f" providerId="ADAL" clId="{BECD4A7F-C1AF-4585-8C31-FE7D4FE3ED16}" dt="2025-01-05T14:43:16.100" v="993" actId="2696"/>
-        <pc:sldMkLst>
-          <pc:docMk/>
-          <pc:sldMk cId="1728680596" sldId="664"/>
-        </pc:sldMkLst>
-      </pc:sldChg>
-      <pc:sldChg chg="del">
-        <pc:chgData name="Mohammed Fasha" userId="cc64f42d-a1a6-4f08-b97b-0c37f877119f" providerId="ADAL" clId="{BECD4A7F-C1AF-4585-8C31-FE7D4FE3ED16}" dt="2025-01-05T14:42:38.675" v="989" actId="2696"/>
-        <pc:sldMkLst>
-          <pc:docMk/>
-          <pc:sldMk cId="3900588277" sldId="664"/>
-        </pc:sldMkLst>
-      </pc:sldChg>
-      <pc:sldChg chg="del">
-        <pc:chgData name="Mohammed Fasha" userId="cc64f42d-a1a6-4f08-b97b-0c37f877119f" providerId="ADAL" clId="{BECD4A7F-C1AF-4585-8C31-FE7D4FE3ED16}" dt="2025-01-05T14:42:38.675" v="989" actId="2696"/>
-        <pc:sldMkLst>
-          <pc:docMk/>
-          <pc:sldMk cId="123002105" sldId="665"/>
-        </pc:sldMkLst>
-      </pc:sldChg>
-      <pc:sldChg chg="modSp add del mod">
-        <pc:chgData name="Mohammed Fasha" userId="cc64f42d-a1a6-4f08-b97b-0c37f877119f" providerId="ADAL" clId="{BECD4A7F-C1AF-4585-8C31-FE7D4FE3ED16}" dt="2025-01-05T15:05:12.729" v="1226" actId="21"/>
-        <pc:sldMkLst>
-          <pc:docMk/>
-          <pc:sldMk cId="148099094" sldId="665"/>
-        </pc:sldMkLst>
-      </pc:sldChg>
-      <pc:sldChg chg="del">
-        <pc:chgData name="Mohammed Fasha" userId="cc64f42d-a1a6-4f08-b97b-0c37f877119f" providerId="ADAL" clId="{BECD4A7F-C1AF-4585-8C31-FE7D4FE3ED16}" dt="2025-01-05T14:42:38.675" v="989" actId="2696"/>
-        <pc:sldMkLst>
-          <pc:docMk/>
-          <pc:sldMk cId="659863378" sldId="676"/>
-        </pc:sldMkLst>
-      </pc:sldChg>
-      <pc:sldChg chg="modSp add del mod">
-        <pc:chgData name="Mohammed Fasha" userId="cc64f42d-a1a6-4f08-b97b-0c37f877119f" providerId="ADAL" clId="{BECD4A7F-C1AF-4585-8C31-FE7D4FE3ED16}" dt="2025-01-05T14:55:27.595" v="1130" actId="255"/>
-        <pc:sldMkLst>
-          <pc:docMk/>
-          <pc:sldMk cId="1577854815" sldId="676"/>
-        </pc:sldMkLst>
-      </pc:sldChg>
-      <pc:sldChg chg="modSp add del mod">
-        <pc:chgData name="Mohammed Fasha" userId="cc64f42d-a1a6-4f08-b97b-0c37f877119f" providerId="ADAL" clId="{BECD4A7F-C1AF-4585-8C31-FE7D4FE3ED16}" dt="2025-01-05T14:55:43.754" v="1132" actId="1076"/>
-        <pc:sldMkLst>
-          <pc:docMk/>
-          <pc:sldMk cId="139882925" sldId="677"/>
-        </pc:sldMkLst>
-      </pc:sldChg>
-      <pc:sldChg chg="del">
-        <pc:chgData name="Mohammed Fasha" userId="cc64f42d-a1a6-4f08-b97b-0c37f877119f" providerId="ADAL" clId="{BECD4A7F-C1AF-4585-8C31-FE7D4FE3ED16}" dt="2025-01-05T14:42:38.675" v="989" actId="2696"/>
-        <pc:sldMkLst>
-          <pc:docMk/>
-          <pc:sldMk cId="2736863534" sldId="677"/>
-        </pc:sldMkLst>
-      </pc:sldChg>
-      <pc:sldChg chg="add del">
-        <pc:chgData name="Mohammed Fasha" userId="cc64f42d-a1a6-4f08-b97b-0c37f877119f" providerId="ADAL" clId="{BECD4A7F-C1AF-4585-8C31-FE7D4FE3ED16}" dt="2025-01-05T14:43:16.100" v="993" actId="2696"/>
-        <pc:sldMkLst>
-          <pc:docMk/>
-          <pc:sldMk cId="4146654093" sldId="678"/>
-        </pc:sldMkLst>
-      </pc:sldChg>
-      <pc:sldChg chg="del">
-        <pc:chgData name="Mohammed Fasha" userId="cc64f42d-a1a6-4f08-b97b-0c37f877119f" providerId="ADAL" clId="{BECD4A7F-C1AF-4585-8C31-FE7D4FE3ED16}" dt="2025-01-05T14:42:38.675" v="989" actId="2696"/>
-        <pc:sldMkLst>
-          <pc:docMk/>
-          <pc:sldMk cId="4228312762" sldId="678"/>
-        </pc:sldMkLst>
-      </pc:sldChg>
-      <pc:sldChg chg="del">
-        <pc:chgData name="Mohammed Fasha" userId="cc64f42d-a1a6-4f08-b97b-0c37f877119f" providerId="ADAL" clId="{BECD4A7F-C1AF-4585-8C31-FE7D4FE3ED16}" dt="2025-01-05T14:42:38.675" v="989" actId="2696"/>
-        <pc:sldMkLst>
-          <pc:docMk/>
-          <pc:sldMk cId="581717462" sldId="679"/>
-        </pc:sldMkLst>
-      </pc:sldChg>
-      <pc:sldChg chg="addSp delSp modSp add del mod chgLayout">
-        <pc:chgData name="Mohammed Fasha" userId="cc64f42d-a1a6-4f08-b97b-0c37f877119f" providerId="ADAL" clId="{BECD4A7F-C1AF-4585-8C31-FE7D4FE3ED16}" dt="2025-01-05T16:36:16.605" v="1945" actId="1076"/>
-        <pc:sldMkLst>
-          <pc:docMk/>
-          <pc:sldMk cId="3454522070" sldId="679"/>
-        </pc:sldMkLst>
-      </pc:sldChg>
-      <pc:sldChg chg="add del">
-        <pc:chgData name="Mohammed Fasha" userId="cc64f42d-a1a6-4f08-b97b-0c37f877119f" providerId="ADAL" clId="{BECD4A7F-C1AF-4585-8C31-FE7D4FE3ED16}" dt="2025-01-05T14:43:16.100" v="993" actId="2696"/>
-        <pc:sldMkLst>
-          <pc:docMk/>
-          <pc:sldMk cId="2856814121" sldId="681"/>
-        </pc:sldMkLst>
-      </pc:sldChg>
-      <pc:sldChg chg="del">
-        <pc:chgData name="Mohammed Fasha" userId="cc64f42d-a1a6-4f08-b97b-0c37f877119f" providerId="ADAL" clId="{BECD4A7F-C1AF-4585-8C31-FE7D4FE3ED16}" dt="2025-01-05T14:42:38.675" v="989" actId="2696"/>
-        <pc:sldMkLst>
-          <pc:docMk/>
-          <pc:sldMk cId="3083966018" sldId="681"/>
-        </pc:sldMkLst>
-      </pc:sldChg>
-      <pc:sldChg chg="modSp mod">
-        <pc:chgData name="Mohammed Fasha" userId="cc64f42d-a1a6-4f08-b97b-0c37f877119f" providerId="ADAL" clId="{BECD4A7F-C1AF-4585-8C31-FE7D4FE3ED16}" dt="2025-01-05T14:42:50.596" v="990" actId="14100"/>
-        <pc:sldMkLst>
-          <pc:docMk/>
-          <pc:sldMk cId="1697141369" sldId="695"/>
-        </pc:sldMkLst>
-      </pc:sldChg>
-      <pc:sldChg chg="addSp delSp modSp add del mod">
-        <pc:chgData name="Mohammed Fasha" userId="cc64f42d-a1a6-4f08-b97b-0c37f877119f" providerId="ADAL" clId="{BECD4A7F-C1AF-4585-8C31-FE7D4FE3ED16}" dt="2025-01-05T14:54:31.375" v="1125" actId="14100"/>
-        <pc:sldMkLst>
-          <pc:docMk/>
-          <pc:sldMk cId="265576630" sldId="698"/>
-        </pc:sldMkLst>
-      </pc:sldChg>
-      <pc:sldChg chg="del">
-        <pc:chgData name="Mohammed Fasha" userId="cc64f42d-a1a6-4f08-b97b-0c37f877119f" providerId="ADAL" clId="{BECD4A7F-C1AF-4585-8C31-FE7D4FE3ED16}" dt="2025-01-05T14:42:38.675" v="989" actId="2696"/>
-        <pc:sldMkLst>
-          <pc:docMk/>
-          <pc:sldMk cId="991725834" sldId="698"/>
-        </pc:sldMkLst>
-      </pc:sldChg>
-      <pc:sldChg chg="del">
-        <pc:chgData name="Mohammed Fasha" userId="cc64f42d-a1a6-4f08-b97b-0c37f877119f" providerId="ADAL" clId="{BECD4A7F-C1AF-4585-8C31-FE7D4FE3ED16}" dt="2025-01-05T14:42:38.675" v="989" actId="2696"/>
-        <pc:sldMkLst>
-          <pc:docMk/>
-          <pc:sldMk cId="3109561867" sldId="700"/>
-        </pc:sldMkLst>
-      </pc:sldChg>
-      <pc:sldChg chg="addSp delSp modSp add del mod">
-        <pc:chgData name="Mohammed Fasha" userId="cc64f42d-a1a6-4f08-b97b-0c37f877119f" providerId="ADAL" clId="{BECD4A7F-C1AF-4585-8C31-FE7D4FE3ED16}" dt="2025-01-05T16:00:05.564" v="1529" actId="20577"/>
-        <pc:sldMkLst>
-          <pc:docMk/>
-          <pc:sldMk cId="4247717824" sldId="700"/>
-        </pc:sldMkLst>
-      </pc:sldChg>
-      <pc:sldChg chg="addSp delSp modSp add mod">
-        <pc:chgData name="Mohammed Fasha" userId="cc64f42d-a1a6-4f08-b97b-0c37f877119f" providerId="ADAL" clId="{BECD4A7F-C1AF-4585-8C31-FE7D4FE3ED16}" dt="2025-01-05T14:53:29.185" v="1101" actId="21"/>
-        <pc:sldMkLst>
-          <pc:docMk/>
-          <pc:sldMk cId="67871309" sldId="709"/>
-        </pc:sldMkLst>
-      </pc:sldChg>
-      <pc:sldChg chg="modSp add mod">
-        <pc:chgData name="Mohammed Fasha" userId="cc64f42d-a1a6-4f08-b97b-0c37f877119f" providerId="ADAL" clId="{BECD4A7F-C1AF-4585-8C31-FE7D4FE3ED16}" dt="2025-01-05T15:31:09.113" v="1385" actId="6549"/>
-        <pc:sldMkLst>
-          <pc:docMk/>
-          <pc:sldMk cId="4114896152" sldId="710"/>
-        </pc:sldMkLst>
-      </pc:sldChg>
-      <pc:sldChg chg="addSp modSp add mod">
-        <pc:chgData name="Mohammed Fasha" userId="cc64f42d-a1a6-4f08-b97b-0c37f877119f" providerId="ADAL" clId="{BECD4A7F-C1AF-4585-8C31-FE7D4FE3ED16}" dt="2025-01-05T15:27:36.027" v="1348" actId="20577"/>
-        <pc:sldMkLst>
-          <pc:docMk/>
-          <pc:sldMk cId="3794385322" sldId="711"/>
-        </pc:sldMkLst>
-      </pc:sldChg>
-      <pc:sldChg chg="add del">
-        <pc:chgData name="Mohammed Fasha" userId="cc64f42d-a1a6-4f08-b97b-0c37f877119f" providerId="ADAL" clId="{BECD4A7F-C1AF-4585-8C31-FE7D4FE3ED16}" dt="2025-01-05T14:57:43.613" v="1146" actId="2696"/>
-        <pc:sldMkLst>
-          <pc:docMk/>
-          <pc:sldMk cId="501127302" sldId="712"/>
-        </pc:sldMkLst>
-      </pc:sldChg>
-      <pc:sldChg chg="modSp add mod">
-        <pc:chgData name="Mohammed Fasha" userId="cc64f42d-a1a6-4f08-b97b-0c37f877119f" providerId="ADAL" clId="{BECD4A7F-C1AF-4585-8C31-FE7D4FE3ED16}" dt="2025-01-05T15:32:23.870" v="1388"/>
-        <pc:sldMkLst>
-          <pc:docMk/>
-          <pc:sldMk cId="3701206727" sldId="712"/>
-        </pc:sldMkLst>
-      </pc:sldChg>
-      <pc:sldChg chg="addSp modSp add mod">
-        <pc:chgData name="Mohammed Fasha" userId="cc64f42d-a1a6-4f08-b97b-0c37f877119f" providerId="ADAL" clId="{BECD4A7F-C1AF-4585-8C31-FE7D4FE3ED16}" dt="2025-01-05T16:06:36.028" v="1538" actId="1076"/>
-        <pc:sldMkLst>
-          <pc:docMk/>
-          <pc:sldMk cId="1499972066" sldId="713"/>
-        </pc:sldMkLst>
-      </pc:sldChg>
-      <pc:sldChg chg="addSp delSp modSp add mod">
-        <pc:chgData name="Mohammed Fasha" userId="cc64f42d-a1a6-4f08-b97b-0c37f877119f" providerId="ADAL" clId="{BECD4A7F-C1AF-4585-8C31-FE7D4FE3ED16}" dt="2025-01-05T16:19:08.436" v="1705" actId="1036"/>
-        <pc:sldMkLst>
-          <pc:docMk/>
-          <pc:sldMk cId="1270641495" sldId="714"/>
-        </pc:sldMkLst>
-      </pc:sldChg>
-      <pc:sldChg chg="addSp modSp new mod">
-        <pc:chgData name="Mohammed Fasha" userId="cc64f42d-a1a6-4f08-b97b-0c37f877119f" providerId="ADAL" clId="{BECD4A7F-C1AF-4585-8C31-FE7D4FE3ED16}" dt="2025-01-05T16:23:44.632" v="1736" actId="12"/>
-        <pc:sldMkLst>
-          <pc:docMk/>
-          <pc:sldMk cId="1096386322" sldId="715"/>
-        </pc:sldMkLst>
-      </pc:sldChg>
-      <pc:sldChg chg="modSp new mod">
-        <pc:chgData name="Mohammed Fasha" userId="cc64f42d-a1a6-4f08-b97b-0c37f877119f" providerId="ADAL" clId="{BECD4A7F-C1AF-4585-8C31-FE7D4FE3ED16}" dt="2025-01-05T16:34:02.360" v="1902" actId="27636"/>
-        <pc:sldMkLst>
-          <pc:docMk/>
-          <pc:sldMk cId="1784058309" sldId="716"/>
-        </pc:sldMkLst>
-      </pc:sldChg>
-      <pc:sldChg chg="modSp add mod ord">
-        <pc:chgData name="Mohammed Fasha" userId="cc64f42d-a1a6-4f08-b97b-0c37f877119f" providerId="ADAL" clId="{BECD4A7F-C1AF-4585-8C31-FE7D4FE3ED16}" dt="2025-01-05T16:27:20.520" v="1803"/>
-        <pc:sldMkLst>
-          <pc:docMk/>
-          <pc:sldMk cId="3139017106" sldId="717"/>
-        </pc:sldMkLst>
-      </pc:sldChg>
-      <pc:sldChg chg="addSp delSp modSp new mod">
-        <pc:chgData name="Mohammed Fasha" userId="cc64f42d-a1a6-4f08-b97b-0c37f877119f" providerId="ADAL" clId="{BECD4A7F-C1AF-4585-8C31-FE7D4FE3ED16}" dt="2025-01-05T16:32:45.446" v="1897" actId="20577"/>
-        <pc:sldMkLst>
-          <pc:docMk/>
-          <pc:sldMk cId="3043812923" sldId="718"/>
-        </pc:sldMkLst>
-      </pc:sldChg>
-    </pc:docChg>
-  </pc:docChgLst>
-  <pc:docChgLst>
-    <pc:chgData name="Mohammed Fasha" userId="cc64f42d-a1a6-4f08-b97b-0c37f877119f" providerId="ADAL" clId="{6804A8E6-8D7F-46E3-B091-66A8F6B926BF}"/>
-    <pc:docChg chg="custSel modMainMaster">
-      <pc:chgData name="Mohammed Fasha" userId="cc64f42d-a1a6-4f08-b97b-0c37f877119f" providerId="ADAL" clId="{6804A8E6-8D7F-46E3-B091-66A8F6B926BF}" dt="2024-11-09T05:15:35.019" v="2" actId="1076"/>
-      <pc:docMkLst>
-        <pc:docMk/>
-      </pc:docMkLst>
-      <pc:sldMasterChg chg="delSp mod modSldLayout">
-        <pc:chgData name="Mohammed Fasha" userId="cc64f42d-a1a6-4f08-b97b-0c37f877119f" providerId="ADAL" clId="{6804A8E6-8D7F-46E3-B091-66A8F6B926BF}" dt="2024-11-09T05:15:35.019" v="2" actId="1076"/>
-        <pc:sldMasterMkLst>
-          <pc:docMk/>
-          <pc:sldMasterMk cId="742811419" sldId="2147483648"/>
-        </pc:sldMasterMkLst>
-        <pc:sldLayoutChg chg="addSp modSp mod">
-          <pc:chgData name="Mohammed Fasha" userId="cc64f42d-a1a6-4f08-b97b-0c37f877119f" providerId="ADAL" clId="{6804A8E6-8D7F-46E3-B091-66A8F6B926BF}" dt="2024-11-09T05:15:35.019" v="2" actId="1076"/>
-          <pc:sldLayoutMkLst>
-            <pc:docMk/>
-            <pc:sldMasterMk cId="742811419" sldId="2147483648"/>
-            <pc:sldLayoutMk cId="4063788262" sldId="2147483649"/>
-          </pc:sldLayoutMkLst>
+          <pc:spChg chg="mod">
+            <ac:chgData name="Mohammed Fasha" userId="cc64f42d-a1a6-4f08-b97b-0c37f877119f" providerId="ADAL" clId="{19B6BCF0-69C5-47B4-98CC-B0941D29A039}" dt="2025-04-09T04:24:26.302" v="479" actId="404"/>
+            <ac:spMkLst>
+              <pc:docMk/>
+              <pc:sldMasterMk cId="742811419" sldId="2147483648"/>
+              <pc:sldLayoutMk cId="3573533501" sldId="2147483650"/>
+              <ac:spMk id="3" creationId="{93FDCCF6-2612-A73C-C264-680D14569853}"/>
+            </ac:spMkLst>
+          </pc:spChg>
         </pc:sldLayoutChg>
       </pc:sldMasterChg>
     </pc:docChg>
@@ -3025,7 +3258,7 @@
           <a:p>
             <a:fld id="{13BA03A4-B9F1-404C-8A74-B1AFD6480953}" type="datetimeFigureOut">
               <a:rPr lang="en-US" smtClean="0"/>
-              <a:t>7/21/2025</a:t>
+              <a:t>6/18/2025</a:t>
             </a:fld>
             <a:endParaRPr lang="en-US"/>
           </a:p>
@@ -3523,7 +3756,7 @@
           <a:p>
             <a:fld id="{0DB78E95-DE77-44D3-BDB9-E242948FB112}" type="datetimeFigureOut">
               <a:rPr lang="en-US" smtClean="0"/>
-              <a:t>7/21/2025</a:t>
+              <a:t>6/18/2025</a:t>
             </a:fld>
             <a:endParaRPr lang="en-US"/>
           </a:p>
@@ -3751,7 +3984,7 @@
           <a:p>
             <a:fld id="{0DB78E95-DE77-44D3-BDB9-E242948FB112}" type="datetimeFigureOut">
               <a:rPr lang="en-US" smtClean="0"/>
-              <a:t>7/21/2025</a:t>
+              <a:t>6/18/2025</a:t>
             </a:fld>
             <a:endParaRPr lang="en-US"/>
           </a:p>
@@ -3959,7 +4192,7 @@
           <a:p>
             <a:fld id="{0DB78E95-DE77-44D3-BDB9-E242948FB112}" type="datetimeFigureOut">
               <a:rPr lang="en-US" smtClean="0"/>
-              <a:t>7/21/2025</a:t>
+              <a:t>6/18/2025</a:t>
             </a:fld>
             <a:endParaRPr lang="en-US"/>
           </a:p>
@@ -4390,7 +4623,7 @@
           <a:p>
             <a:fld id="{0DB78E95-DE77-44D3-BDB9-E242948FB112}" type="datetimeFigureOut">
               <a:rPr lang="en-US" smtClean="0"/>
-              <a:t>7/21/2025</a:t>
+              <a:t>6/18/2025</a:t>
             </a:fld>
             <a:endParaRPr lang="en-US"/>
           </a:p>
@@ -4769,7 +5002,7 @@
           <a:p>
             <a:fld id="{0DB78E95-DE77-44D3-BDB9-E242948FB112}" type="datetimeFigureOut">
               <a:rPr lang="en-US" smtClean="0"/>
-              <a:t>7/21/2025</a:t>
+              <a:t>6/18/2025</a:t>
             </a:fld>
             <a:endParaRPr lang="en-US"/>
           </a:p>
@@ -5181,7 +5414,7 @@
           <a:p>
             <a:fld id="{0DB78E95-DE77-44D3-BDB9-E242948FB112}" type="datetimeFigureOut">
               <a:rPr lang="en-US" smtClean="0"/>
-              <a:t>7/21/2025</a:t>
+              <a:t>6/18/2025</a:t>
             </a:fld>
             <a:endParaRPr lang="en-US"/>
           </a:p>
@@ -5322,7 +5555,7 @@
           <a:p>
             <a:fld id="{0DB78E95-DE77-44D3-BDB9-E242948FB112}" type="datetimeFigureOut">
               <a:rPr lang="en-US" smtClean="0"/>
-              <a:t>7/21/2025</a:t>
+              <a:t>6/18/2025</a:t>
             </a:fld>
             <a:endParaRPr lang="en-US"/>
           </a:p>
@@ -5435,7 +5668,7 @@
           <a:p>
             <a:fld id="{0DB78E95-DE77-44D3-BDB9-E242948FB112}" type="datetimeFigureOut">
               <a:rPr lang="en-US" smtClean="0"/>
-              <a:t>7/21/2025</a:t>
+              <a:t>6/18/2025</a:t>
             </a:fld>
             <a:endParaRPr lang="en-US"/>
           </a:p>
@@ -5746,7 +5979,7 @@
           <a:p>
             <a:fld id="{0DB78E95-DE77-44D3-BDB9-E242948FB112}" type="datetimeFigureOut">
               <a:rPr lang="en-US" smtClean="0"/>
-              <a:t>7/21/2025</a:t>
+              <a:t>6/18/2025</a:t>
             </a:fld>
             <a:endParaRPr lang="en-US"/>
           </a:p>
@@ -6034,7 +6267,7 @@
           <a:p>
             <a:fld id="{0DB78E95-DE77-44D3-BDB9-E242948FB112}" type="datetimeFigureOut">
               <a:rPr lang="en-US" smtClean="0"/>
-              <a:t>7/21/2025</a:t>
+              <a:t>6/18/2025</a:t>
             </a:fld>
             <a:endParaRPr lang="en-US"/>
           </a:p>
@@ -6275,7 +6508,7 @@
           <a:p>
             <a:fld id="{0DB78E95-DE77-44D3-BDB9-E242948FB112}" type="datetimeFigureOut">
               <a:rPr lang="en-US" smtClean="0"/>
-              <a:t>7/21/2025</a:t>
+              <a:t>6/18/2025</a:t>
             </a:fld>
             <a:endParaRPr lang="en-US"/>
           </a:p>
@@ -6832,13 +7065,14 @@
           <a:p>
             <a:r>
               <a:rPr lang="en-US" sz="3200" dirty="0"/>
-              <a:t>Association Rules Mining &amp; </a:t>
-            </a:r>
-            <a:r>
-              <a:rPr lang="en-US" sz="3200"/>
-              <a:t>Apriori Algorithm</a:t>
-            </a:r>
-            <a:endParaRPr lang="en-US" sz="3200" dirty="0"/>
+              <a:t>Association Rules Mining &amp; Apriori Algorithm</a:t>
+            </a:r>
+          </a:p>
+          <a:p>
+            <a:r>
+              <a:rPr lang="en-US" sz="3200" dirty="0"/>
+              <a:t>2024-2</a:t>
+            </a:r>
           </a:p>
         </p:txBody>
       </p:sp>
